--- a/resources/lakehouse.pptx
+++ b/resources/lakehouse.pptx
@@ -5,47 +5,59 @@
     <p:sldMasterId id="2147483648" r:id="rId4"/>
   </p:sldMasterIdLst>
   <p:notesMasterIdLst>
-    <p:notesMasterId r:id="rId6"/>
+    <p:notesMasterId r:id="rId55"/>
   </p:notesMasterIdLst>
   <p:sldIdLst>
     <p:sldId id="256" r:id="rId5"/>
-    <p:sldId id="257" r:id="rId12"/>
-    <p:sldId id="258" r:id="rId13"/>
-    <p:sldId id="259" r:id="rId14"/>
-    <p:sldId id="260" r:id="rId15"/>
-    <p:sldId id="261" r:id="rId16"/>
-    <p:sldId id="262" r:id="rId17"/>
-    <p:sldId id="263" r:id="rId18"/>
-    <p:sldId id="264" r:id="rId19"/>
-    <p:sldId id="265" r:id="rId20"/>
-    <p:sldId id="266" r:id="rId21"/>
-    <p:sldId id="267" r:id="rId22"/>
-    <p:sldId id="268" r:id="rId23"/>
-    <p:sldId id="269" r:id="rId24"/>
-    <p:sldId id="270" r:id="rId25"/>
-    <p:sldId id="271" r:id="rId26"/>
-    <p:sldId id="272" r:id="rId27"/>
-    <p:sldId id="273" r:id="rId28"/>
-    <p:sldId id="274" r:id="rId29"/>
-    <p:sldId id="275" r:id="rId30"/>
-    <p:sldId id="276" r:id="rId31"/>
-    <p:sldId id="277" r:id="rId32"/>
-    <p:sldId id="278" r:id="rId33"/>
-    <p:sldId id="279" r:id="rId34"/>
-    <p:sldId id="280" r:id="rId35"/>
-    <p:sldId id="281" r:id="rId36"/>
-    <p:sldId id="282" r:id="rId37"/>
-    <p:sldId id="283" r:id="rId38"/>
-    <p:sldId id="284" r:id="rId39"/>
-    <p:sldId id="285" r:id="rId40"/>
-    <p:sldId id="286" r:id="rId41"/>
-    <p:sldId id="287" r:id="rId42"/>
-    <p:sldId id="288" r:id="rId43"/>
-    <p:sldId id="289" r:id="rId44"/>
-    <p:sldId id="290" r:id="rId45"/>
-    <p:sldId id="291" r:id="rId46"/>
-    <p:sldId id="292" r:id="rId47"/>
-    <p:sldId id="293" r:id="rId48"/>
+    <p:sldId id="257" r:id="rId6"/>
+    <p:sldId id="258" r:id="rId7"/>
+    <p:sldId id="259" r:id="rId8"/>
+    <p:sldId id="260" r:id="rId9"/>
+    <p:sldId id="261" r:id="rId10"/>
+    <p:sldId id="262" r:id="rId11"/>
+    <p:sldId id="263" r:id="rId12"/>
+    <p:sldId id="294" r:id="rId13"/>
+    <p:sldId id="299" r:id="rId14"/>
+    <p:sldId id="304" r:id="rId15"/>
+    <p:sldId id="300" r:id="rId16"/>
+    <p:sldId id="303" r:id="rId17"/>
+    <p:sldId id="301" r:id="rId18"/>
+    <p:sldId id="302" r:id="rId19"/>
+    <p:sldId id="298" r:id="rId20"/>
+    <p:sldId id="264" r:id="rId21"/>
+    <p:sldId id="265" r:id="rId22"/>
+    <p:sldId id="266" r:id="rId23"/>
+    <p:sldId id="267" r:id="rId24"/>
+    <p:sldId id="268" r:id="rId25"/>
+    <p:sldId id="269" r:id="rId26"/>
+    <p:sldId id="270" r:id="rId27"/>
+    <p:sldId id="305" r:id="rId28"/>
+    <p:sldId id="307" r:id="rId29"/>
+    <p:sldId id="306" r:id="rId30"/>
+    <p:sldId id="308" r:id="rId31"/>
+    <p:sldId id="271" r:id="rId32"/>
+    <p:sldId id="272" r:id="rId33"/>
+    <p:sldId id="273" r:id="rId34"/>
+    <p:sldId id="274" r:id="rId35"/>
+    <p:sldId id="275" r:id="rId36"/>
+    <p:sldId id="276" r:id="rId37"/>
+    <p:sldId id="277" r:id="rId38"/>
+    <p:sldId id="278" r:id="rId39"/>
+    <p:sldId id="279" r:id="rId40"/>
+    <p:sldId id="280" r:id="rId41"/>
+    <p:sldId id="281" r:id="rId42"/>
+    <p:sldId id="282" r:id="rId43"/>
+    <p:sldId id="283" r:id="rId44"/>
+    <p:sldId id="284" r:id="rId45"/>
+    <p:sldId id="285" r:id="rId46"/>
+    <p:sldId id="286" r:id="rId47"/>
+    <p:sldId id="287" r:id="rId48"/>
+    <p:sldId id="288" r:id="rId49"/>
+    <p:sldId id="289" r:id="rId50"/>
+    <p:sldId id="290" r:id="rId51"/>
+    <p:sldId id="291" r:id="rId52"/>
+    <p:sldId id="292" r:id="rId53"/>
+    <p:sldId id="293" r:id="rId54"/>
   </p:sldIdLst>
   <p:sldSz cx="12192000" cy="6858000"/>
   <p:notesSz cx="6858000" cy="9144000"/>
@@ -3171,7 +3183,7 @@
           <a:p>
             <a:fld id="{DBE79B46-EA7A-443F-98A1-1CFE175F3DC6}" type="datetimeFigureOut">
               <a:rPr lang="es-CO" smtClean="0"/>
-              <a:t>15/03/26</a:t>
+              <a:t>13/04/26</a:t>
             </a:fld>
             <a:endParaRPr lang="es-CO"/>
           </a:p>
@@ -3588,7 +3600,7 @@
           <a:p>
             <a:fld id="{DE3743A8-55EC-4707-B34E-F025D197E566}" type="datetime1">
               <a:rPr lang="es-CO" smtClean="0"/>
-              <a:t>15/03/26</a:t>
+              <a:t>13/04/26</a:t>
             </a:fld>
             <a:endParaRPr lang="es-CO"/>
           </a:p>
@@ -3796,7 +3808,7 @@
           <a:p>
             <a:fld id="{8E885DD1-B6E8-4558-9D0C-CA877C011AB9}" type="datetime1">
               <a:rPr lang="es-CO" smtClean="0"/>
-              <a:t>15/03/26</a:t>
+              <a:t>13/04/26</a:t>
             </a:fld>
             <a:endParaRPr lang="es-CO"/>
           </a:p>
@@ -4014,7 +4026,7 @@
           <a:p>
             <a:fld id="{11C6641F-8875-4A3B-9605-BBA33BA09F7D}" type="datetime1">
               <a:rPr lang="es-CO" smtClean="0"/>
-              <a:t>15/03/26</a:t>
+              <a:t>13/04/26</a:t>
             </a:fld>
             <a:endParaRPr lang="es-CO"/>
           </a:p>
@@ -4900,7 +4912,7 @@
           <a:p>
             <a:fld id="{2D5ED08C-21A1-4459-925F-4AB7494AD6AF}" type="datetime1">
               <a:rPr lang="es-CO" smtClean="0"/>
-              <a:t>15/03/26</a:t>
+              <a:t>13/04/26</a:t>
             </a:fld>
             <a:endParaRPr lang="es-CO"/>
           </a:p>
@@ -5184,7 +5196,7 @@
           <a:p>
             <a:fld id="{773ECA2E-499F-4AAE-8024-2701227D37EA}" type="datetime1">
               <a:rPr lang="es-CO" smtClean="0"/>
-              <a:t>15/03/26</a:t>
+              <a:t>13/04/26</a:t>
             </a:fld>
             <a:endParaRPr lang="es-CO"/>
           </a:p>
@@ -5460,7 +5472,7 @@
           <a:p>
             <a:fld id="{2CF4FA2D-FBA9-4CC5-948E-C6C46AF1CFAC}" type="datetime1">
               <a:rPr lang="es-CO" smtClean="0"/>
-              <a:t>15/03/26</a:t>
+              <a:t>13/04/26</a:t>
             </a:fld>
             <a:endParaRPr lang="es-CO"/>
           </a:p>
@@ -5883,7 +5895,7 @@
           <a:p>
             <a:fld id="{E62688F6-FEFB-4CC4-9AE8-E3FBD5930348}" type="datetime1">
               <a:rPr lang="es-CO" smtClean="0"/>
-              <a:t>15/03/26</a:t>
+              <a:t>13/04/26</a:t>
             </a:fld>
             <a:endParaRPr lang="es-CO"/>
           </a:p>
@@ -6033,7 +6045,7 @@
           <a:p>
             <a:fld id="{F609322D-2C78-47AE-9411-DF09F1B23C5C}" type="datetime1">
               <a:rPr lang="es-CO" smtClean="0"/>
-              <a:t>15/03/26</a:t>
+              <a:t>13/04/26</a:t>
             </a:fld>
             <a:endParaRPr lang="es-CO"/>
           </a:p>
@@ -6154,7 +6166,7 @@
           <a:p>
             <a:fld id="{A67E9942-7877-4E74-8023-51D1A369E009}" type="datetime1">
               <a:rPr lang="es-CO" smtClean="0"/>
-              <a:t>15/03/26</a:t>
+              <a:t>13/04/26</a:t>
             </a:fld>
             <a:endParaRPr lang="es-CO"/>
           </a:p>
@@ -6475,7 +6487,7 @@
           <a:p>
             <a:fld id="{7D430CEB-109D-460C-A8FE-D6830FB86A52}" type="datetime1">
               <a:rPr lang="es-CO" smtClean="0"/>
-              <a:t>15/03/26</a:t>
+              <a:t>13/04/26</a:t>
             </a:fld>
             <a:endParaRPr lang="es-CO"/>
           </a:p>
@@ -6772,7 +6784,7 @@
           <a:p>
             <a:fld id="{5561C093-89F7-4354-A399-E69586B3AAAE}" type="datetime1">
               <a:rPr lang="es-CO" smtClean="0"/>
-              <a:t>15/03/26</a:t>
+              <a:t>13/04/26</a:t>
             </a:fld>
             <a:endParaRPr lang="es-CO"/>
           </a:p>
@@ -7023,7 +7035,7 @@
           <a:p>
             <a:fld id="{11AE3624-E68E-4A2B-A326-65DBF28F05D7}" type="datetime1">
               <a:rPr lang="es-CO" smtClean="0"/>
-              <a:t>15/03/26</a:t>
+              <a:t>13/04/26</a:t>
             </a:fld>
             <a:endParaRPr lang="es-CO"/>
           </a:p>
@@ -7156,10 +7168,10 @@
             <p:nvPr/>
           </p:nvPicPr>
           <p:blipFill>
-            <a:blip r:embed="rId14">
+            <a:blip>
               <a:extLst>
                 <a:ext uri="{96DAC541-7B7A-43D3-8B79-37D633B846F1}">
-                  <asvg:svgBlip xmlns:asvg="http://schemas.microsoft.com/office/drawing/2016/SVG/main" r:embed="rId15"/>
+                  <asvg:svgBlip xmlns:asvg="http://schemas.microsoft.com/office/drawing/2016/SVG/main" r:embed="rId14"/>
                 </a:ext>
               </a:extLst>
             </a:blip>
@@ -7270,10 +7282,10 @@
             <p:nvPr/>
           </p:nvPicPr>
           <p:blipFill>
-            <a:blip r:embed="rId16">
+            <a:blip>
               <a:extLst>
                 <a:ext uri="{96DAC541-7B7A-43D3-8B79-37D633B846F1}">
-                  <asvg:svgBlip xmlns:asvg="http://schemas.microsoft.com/office/drawing/2016/SVG/main" r:embed="rId17"/>
+                  <asvg:svgBlip xmlns:asvg="http://schemas.microsoft.com/office/drawing/2016/SVG/main" r:embed="rId15"/>
                 </a:ext>
               </a:extLst>
             </a:blip>
@@ -7764,7 +7776,7 @@
             <p:nvPr/>
           </p:nvPicPr>
           <p:blipFill>
-            <a:blip r:embed="rId18">
+            <a:blip r:embed="rId16">
               <a:duotone>
                 <a:schemeClr val="bg2">
                   <a:shade val="45000"/>
@@ -8111,7 +8123,7 @@
 </file>
 
 <file path=ppt/slides/slide1.xml><?xml version="1.0" encoding="utf-8"?>
-<p:sld xmlns:a="http://schemas.openxmlformats.org/drawingml/2006/main" xmlns:p="http://schemas.openxmlformats.org/presentationml/2006/main" xmlns:r="http://schemas.openxmlformats.org/officeDocument/2006/relationships">
+<p:sld xmlns:a="http://schemas.openxmlformats.org/drawingml/2006/main" xmlns:r="http://schemas.openxmlformats.org/officeDocument/2006/relationships" xmlns:p="http://schemas.openxmlformats.org/presentationml/2006/main">
   <p:cSld>
     <p:spTree>
       <p:nvGrpSpPr>
@@ -8119,7 +8131,14 @@
         <p:cNvGrpSpPr/>
         <p:nvPr/>
       </p:nvGrpSpPr>
-      <p:grpSpPr/>
+      <p:grpSpPr>
+        <a:xfrm>
+          <a:off x="0" y="0"/>
+          <a:ext cx="0" cy="0"/>
+          <a:chOff x="0" y="0"/>
+          <a:chExt cx="0" cy="0"/>
+        </a:xfrm>
+      </p:grpSpPr>
       <p:sp>
         <p:nvSpPr>
           <p:cNvPr id="2" name="Title 1"/>
@@ -8176,7 +8195,7 @@
 </file>
 
 <file path=ppt/slides/slide10.xml><?xml version="1.0" encoding="utf-8"?>
-<p:sld xmlns:a="http://schemas.openxmlformats.org/drawingml/2006/main" xmlns:p="http://schemas.openxmlformats.org/presentationml/2006/main" xmlns:r="http://schemas.openxmlformats.org/officeDocument/2006/relationships">
+<p:sld xmlns:a="http://schemas.openxmlformats.org/drawingml/2006/main" xmlns:r="http://schemas.openxmlformats.org/officeDocument/2006/relationships" xmlns:p="http://schemas.openxmlformats.org/presentationml/2006/main">
   <p:cSld>
     <p:spTree>
       <p:nvGrpSpPr>
@@ -8184,7 +8203,2774 @@
         <p:cNvGrpSpPr/>
         <p:nvPr/>
       </p:nvGrpSpPr>
-      <p:grpSpPr/>
+      <p:grpSpPr>
+        <a:xfrm>
+          <a:off x="0" y="0"/>
+          <a:ext cx="0" cy="0"/>
+          <a:chOff x="0" y="0"/>
+          <a:chExt cx="0" cy="0"/>
+        </a:xfrm>
+      </p:grpSpPr>
+      <p:sp>
+        <p:nvSpPr>
+          <p:cNvPr id="2" name="Title 1"/>
+          <p:cNvSpPr>
+            <a:spLocks noGrp="1"/>
+          </p:cNvSpPr>
+          <p:nvPr>
+            <p:ph type="title"/>
+          </p:nvPr>
+        </p:nvSpPr>
+        <p:spPr/>
+        <p:txBody>
+          <a:bodyPr/>
+          <a:lstStyle/>
+          <a:p>
+            <a:r>
+              <a:t>Almacenamiento por filas — Cómo funciona</a:t>
+            </a:r>
+          </a:p>
+        </p:txBody>
+      </p:sp>
+      <p:sp>
+        <p:nvSpPr>
+          <p:cNvPr id="3" name="Content Placeholder 2"/>
+          <p:cNvSpPr>
+            <a:spLocks noGrp="1"/>
+          </p:cNvSpPr>
+          <p:nvPr>
+            <p:ph idx="1"/>
+          </p:nvPr>
+        </p:nvSpPr>
+        <p:spPr/>
+        <p:txBody>
+          <a:bodyPr>
+            <a:normAutofit/>
+          </a:bodyPr>
+          <a:lstStyle/>
+          <a:p>
+            <a:r>
+              <a:rPr sz="1600" dirty="0" err="1"/>
+              <a:t>Imaginemos</a:t>
+            </a:r>
+            <a:r>
+              <a:rPr sz="1600" dirty="0"/>
+              <a:t> </a:t>
+            </a:r>
+            <a:r>
+              <a:rPr sz="1600" dirty="0" err="1"/>
+              <a:t>una</a:t>
+            </a:r>
+            <a:r>
+              <a:rPr sz="1600" dirty="0"/>
+              <a:t> </a:t>
+            </a:r>
+            <a:r>
+              <a:rPr sz="1600" dirty="0" err="1"/>
+              <a:t>tabla</a:t>
+            </a:r>
+            <a:r>
+              <a:rPr sz="1600" dirty="0"/>
+              <a:t> de </a:t>
+            </a:r>
+            <a:r>
+              <a:rPr sz="1600" dirty="0" err="1"/>
+              <a:t>ventas</a:t>
+            </a:r>
+            <a:r>
+              <a:rPr sz="1600" dirty="0"/>
+              <a:t> con 1 </a:t>
+            </a:r>
+            <a:r>
+              <a:rPr sz="1600" dirty="0" err="1"/>
+              <a:t>millón</a:t>
+            </a:r>
+            <a:r>
+              <a:rPr sz="1600" dirty="0"/>
+              <a:t> de </a:t>
+            </a:r>
+            <a:r>
+              <a:rPr sz="1600" dirty="0" err="1"/>
+              <a:t>filas</a:t>
+            </a:r>
+            <a:r>
+              <a:rPr sz="1600" dirty="0"/>
+              <a:t>:</a:t>
+            </a:r>
+            <a:endParaRPr lang="es-419" sz="1600" dirty="0"/>
+          </a:p>
+          <a:p>
+            <a:endParaRPr sz="1600" dirty="0"/>
+          </a:p>
+          <a:p>
+            <a:pPr marL="0" indent="0">
+              <a:buNone/>
+            </a:pPr>
+            <a:endParaRPr sz="1600" dirty="0"/>
+          </a:p>
+          <a:p>
+            <a:endParaRPr lang="es-419" sz="1600" dirty="0"/>
+          </a:p>
+          <a:p>
+            <a:endParaRPr lang="en-CO" sz="1600" dirty="0"/>
+          </a:p>
+          <a:p>
+            <a:endParaRPr lang="es-419" sz="1600" dirty="0"/>
+          </a:p>
+          <a:p>
+            <a:endParaRPr lang="en-CO" sz="1600" dirty="0"/>
+          </a:p>
+          <a:p>
+            <a:endParaRPr lang="en-CO" sz="1600" dirty="0"/>
+          </a:p>
+          <a:p>
+            <a:r>
+              <a:rPr sz="1600" dirty="0"/>
+              <a:t>En disco, </a:t>
+            </a:r>
+            <a:r>
+              <a:rPr sz="1600" dirty="0" err="1"/>
+              <a:t>los</a:t>
+            </a:r>
+            <a:r>
+              <a:rPr sz="1600" dirty="0"/>
+              <a:t> </a:t>
+            </a:r>
+            <a:r>
+              <a:rPr sz="1600" dirty="0" err="1"/>
+              <a:t>datos</a:t>
+            </a:r>
+            <a:r>
+              <a:rPr sz="1600" dirty="0"/>
+              <a:t> se </a:t>
+            </a:r>
+            <a:r>
+              <a:rPr sz="1600" dirty="0" err="1"/>
+              <a:t>guardan</a:t>
+            </a:r>
+            <a:r>
+              <a:rPr sz="1600" dirty="0"/>
+              <a:t> </a:t>
+            </a:r>
+            <a:r>
+              <a:rPr sz="1600" dirty="0" err="1"/>
+              <a:t>como</a:t>
+            </a:r>
+            <a:r>
+              <a:rPr sz="1600" dirty="0"/>
+              <a:t> </a:t>
+            </a:r>
+            <a:r>
+              <a:rPr sz="1600" dirty="0" err="1"/>
+              <a:t>una</a:t>
+            </a:r>
+            <a:r>
+              <a:rPr sz="1600" dirty="0"/>
+              <a:t> </a:t>
+            </a:r>
+            <a:r>
+              <a:rPr sz="1600" dirty="0" err="1"/>
+              <a:t>secuencia</a:t>
+            </a:r>
+            <a:r>
+              <a:rPr sz="1600" dirty="0"/>
+              <a:t> de bytes:</a:t>
+            </a:r>
+          </a:p>
+          <a:p>
+            <a:endParaRPr sz="1600" dirty="0"/>
+          </a:p>
+          <a:p>
+            <a:r>
+              <a:rPr sz="1600" dirty="0" err="1"/>
+              <a:t>Almacenamiento</a:t>
+            </a:r>
+            <a:r>
+              <a:rPr sz="1600" dirty="0"/>
+              <a:t> </a:t>
+            </a:r>
+            <a:r>
+              <a:rPr sz="1600" dirty="0" err="1"/>
+              <a:t>por</a:t>
+            </a:r>
+            <a:r>
+              <a:rPr sz="1600" dirty="0"/>
+              <a:t> FILAS (CSV, JSON, Avro, MySQL):</a:t>
+            </a:r>
+          </a:p>
+          <a:p>
+            <a:r>
+              <a:rPr sz="1600" dirty="0"/>
+              <a:t>→ [1, Laptop, Bogotá, 2500] [2, Mouse, Medellín, 35] [3, </a:t>
+            </a:r>
+            <a:r>
+              <a:rPr sz="1600" dirty="0" err="1"/>
+              <a:t>Teclado</a:t>
+            </a:r>
+            <a:r>
+              <a:rPr sz="1600" dirty="0"/>
+              <a:t>, Cali, 80]</a:t>
+            </a:r>
+          </a:p>
+          <a:p>
+            <a:r>
+              <a:rPr sz="1600" dirty="0"/>
+              <a:t>Cada </a:t>
+            </a:r>
+            <a:r>
+              <a:rPr sz="1600" dirty="0" err="1"/>
+              <a:t>registro</a:t>
+            </a:r>
+            <a:r>
+              <a:rPr sz="1600" dirty="0"/>
+              <a:t> </a:t>
+            </a:r>
+            <a:r>
+              <a:rPr sz="1600" dirty="0" err="1"/>
+              <a:t>completo</a:t>
+            </a:r>
+            <a:r>
+              <a:rPr sz="1600" dirty="0"/>
+              <a:t> </a:t>
+            </a:r>
+            <a:r>
+              <a:rPr sz="1600" dirty="0" err="1"/>
+              <a:t>va</a:t>
+            </a:r>
+            <a:r>
+              <a:rPr sz="1600" dirty="0"/>
+              <a:t> junto, uno </a:t>
+            </a:r>
+            <a:r>
+              <a:rPr sz="1600" dirty="0" err="1"/>
+              <a:t>tras</a:t>
+            </a:r>
+            <a:r>
+              <a:rPr sz="1600" dirty="0"/>
+              <a:t> </a:t>
+            </a:r>
+            <a:r>
+              <a:rPr sz="1600" dirty="0" err="1"/>
+              <a:t>otro</a:t>
+            </a:r>
+            <a:endParaRPr sz="1600" dirty="0"/>
+          </a:p>
+        </p:txBody>
+      </p:sp>
+      <p:graphicFrame>
+        <p:nvGraphicFramePr>
+          <p:cNvPr id="4" name="Table 3"/>
+          <p:cNvGraphicFramePr>
+            <a:graphicFrameLocks noGrp="1"/>
+          </p:cNvGraphicFramePr>
+          <p:nvPr/>
+        </p:nvGraphicFramePr>
+        <p:xfrm>
+          <a:off x="2776420" y="1783080"/>
+          <a:ext cx="4114800" cy="1645920"/>
+        </p:xfrm>
+        <a:graphic>
+          <a:graphicData uri="http://schemas.openxmlformats.org/drawingml/2006/table">
+            <a:tbl>
+              <a:tblPr firstRow="1" bandRow="1">
+                <a:tableStyleId>{5C22544A-7EE6-4342-B048-85BDC9FD1C3A}</a:tableStyleId>
+              </a:tblPr>
+              <a:tblGrid>
+                <a:gridCol w="1028700">
+                  <a:extLst>
+                    <a:ext uri="{9D8B030D-6E8A-4147-A177-3AD203B41FA5}">
+                      <a16:colId xmlns:a16="http://schemas.microsoft.com/office/drawing/2014/main" val="20000"/>
+                    </a:ext>
+                  </a:extLst>
+                </a:gridCol>
+                <a:gridCol w="1028700">
+                  <a:extLst>
+                    <a:ext uri="{9D8B030D-6E8A-4147-A177-3AD203B41FA5}">
+                      <a16:colId xmlns:a16="http://schemas.microsoft.com/office/drawing/2014/main" val="20001"/>
+                    </a:ext>
+                  </a:extLst>
+                </a:gridCol>
+                <a:gridCol w="1028700">
+                  <a:extLst>
+                    <a:ext uri="{9D8B030D-6E8A-4147-A177-3AD203B41FA5}">
+                      <a16:colId xmlns:a16="http://schemas.microsoft.com/office/drawing/2014/main" val="20002"/>
+                    </a:ext>
+                  </a:extLst>
+                </a:gridCol>
+                <a:gridCol w="1028700">
+                  <a:extLst>
+                    <a:ext uri="{9D8B030D-6E8A-4147-A177-3AD203B41FA5}">
+                      <a16:colId xmlns:a16="http://schemas.microsoft.com/office/drawing/2014/main" val="20003"/>
+                    </a:ext>
+                  </a:extLst>
+                </a:gridCol>
+              </a:tblGrid>
+              <a:tr h="411480">
+                <a:tc>
+                  <a:txBody>
+                    <a:bodyPr/>
+                    <a:lstStyle/>
+                    <a:p>
+                      <a:r>
+                        <a:rPr sz="1200" b="1"/>
+                        <a:t>ID</a:t>
+                      </a:r>
+                    </a:p>
+                  </a:txBody>
+                  <a:tcPr>
+                    <a:solidFill>
+                      <a:srgbClr val="2C3E50"/>
+                    </a:solidFill>
+                  </a:tcPr>
+                </a:tc>
+                <a:tc>
+                  <a:txBody>
+                    <a:bodyPr/>
+                    <a:lstStyle/>
+                    <a:p>
+                      <a:r>
+                        <a:rPr sz="1200" b="1"/>
+                        <a:t>Producto</a:t>
+                      </a:r>
+                    </a:p>
+                  </a:txBody>
+                  <a:tcPr>
+                    <a:solidFill>
+                      <a:srgbClr val="2C3E50"/>
+                    </a:solidFill>
+                  </a:tcPr>
+                </a:tc>
+                <a:tc>
+                  <a:txBody>
+                    <a:bodyPr/>
+                    <a:lstStyle/>
+                    <a:p>
+                      <a:r>
+                        <a:rPr sz="1200" b="1" dirty="0"/>
+                        <a:t>Ciudad</a:t>
+                      </a:r>
+                    </a:p>
+                  </a:txBody>
+                  <a:tcPr>
+                    <a:solidFill>
+                      <a:srgbClr val="2C3E50"/>
+                    </a:solidFill>
+                  </a:tcPr>
+                </a:tc>
+                <a:tc>
+                  <a:txBody>
+                    <a:bodyPr/>
+                    <a:lstStyle/>
+                    <a:p>
+                      <a:r>
+                        <a:rPr sz="1200" b="1"/>
+                        <a:t>Monto</a:t>
+                      </a:r>
+                    </a:p>
+                  </a:txBody>
+                  <a:tcPr>
+                    <a:solidFill>
+                      <a:srgbClr val="2C3E50"/>
+                    </a:solidFill>
+                  </a:tcPr>
+                </a:tc>
+                <a:extLst>
+                  <a:ext uri="{0D108BD9-81ED-4DB2-BD59-A6C34878D82A}">
+                    <a16:rowId xmlns:a16="http://schemas.microsoft.com/office/drawing/2014/main" val="10000"/>
+                  </a:ext>
+                </a:extLst>
+              </a:tr>
+              <a:tr h="411480">
+                <a:tc>
+                  <a:txBody>
+                    <a:bodyPr/>
+                    <a:lstStyle/>
+                    <a:p>
+                      <a:r>
+                        <a:rPr sz="1100" dirty="0"/>
+                        <a:t>1</a:t>
+                      </a:r>
+                    </a:p>
+                  </a:txBody>
+                  <a:tcPr>
+                    <a:solidFill>
+                      <a:srgbClr val="ECF0F1"/>
+                    </a:solidFill>
+                  </a:tcPr>
+                </a:tc>
+                <a:tc>
+                  <a:txBody>
+                    <a:bodyPr/>
+                    <a:lstStyle/>
+                    <a:p>
+                      <a:r>
+                        <a:rPr sz="1100" dirty="0"/>
+                        <a:t>Laptop</a:t>
+                      </a:r>
+                    </a:p>
+                  </a:txBody>
+                  <a:tcPr>
+                    <a:solidFill>
+                      <a:srgbClr val="ECF0F1"/>
+                    </a:solidFill>
+                  </a:tcPr>
+                </a:tc>
+                <a:tc>
+                  <a:txBody>
+                    <a:bodyPr/>
+                    <a:lstStyle/>
+                    <a:p>
+                      <a:r>
+                        <a:rPr sz="1100"/>
+                        <a:t>Bogotá</a:t>
+                      </a:r>
+                    </a:p>
+                  </a:txBody>
+                  <a:tcPr>
+                    <a:solidFill>
+                      <a:srgbClr val="ECF0F1"/>
+                    </a:solidFill>
+                  </a:tcPr>
+                </a:tc>
+                <a:tc>
+                  <a:txBody>
+                    <a:bodyPr/>
+                    <a:lstStyle/>
+                    <a:p>
+                      <a:r>
+                        <a:rPr sz="1100"/>
+                        <a:t>2500</a:t>
+                      </a:r>
+                    </a:p>
+                  </a:txBody>
+                  <a:tcPr>
+                    <a:solidFill>
+                      <a:srgbClr val="ECF0F1"/>
+                    </a:solidFill>
+                  </a:tcPr>
+                </a:tc>
+                <a:extLst>
+                  <a:ext uri="{0D108BD9-81ED-4DB2-BD59-A6C34878D82A}">
+                    <a16:rowId xmlns:a16="http://schemas.microsoft.com/office/drawing/2014/main" val="10001"/>
+                  </a:ext>
+                </a:extLst>
+              </a:tr>
+              <a:tr h="411480">
+                <a:tc>
+                  <a:txBody>
+                    <a:bodyPr/>
+                    <a:lstStyle/>
+                    <a:p>
+                      <a:r>
+                        <a:rPr sz="1100" dirty="0"/>
+                        <a:t>2</a:t>
+                      </a:r>
+                    </a:p>
+                  </a:txBody>
+                  <a:tcPr>
+                    <a:solidFill>
+                      <a:srgbClr val="ECF0F1"/>
+                    </a:solidFill>
+                  </a:tcPr>
+                </a:tc>
+                <a:tc>
+                  <a:txBody>
+                    <a:bodyPr/>
+                    <a:lstStyle/>
+                    <a:p>
+                      <a:r>
+                        <a:rPr sz="1100" dirty="0"/>
+                        <a:t>Mouse</a:t>
+                      </a:r>
+                    </a:p>
+                  </a:txBody>
+                  <a:tcPr>
+                    <a:solidFill>
+                      <a:srgbClr val="ECF0F1"/>
+                    </a:solidFill>
+                  </a:tcPr>
+                </a:tc>
+                <a:tc>
+                  <a:txBody>
+                    <a:bodyPr/>
+                    <a:lstStyle/>
+                    <a:p>
+                      <a:r>
+                        <a:rPr sz="1100"/>
+                        <a:t>Medellín</a:t>
+                      </a:r>
+                    </a:p>
+                  </a:txBody>
+                  <a:tcPr>
+                    <a:solidFill>
+                      <a:srgbClr val="ECF0F1"/>
+                    </a:solidFill>
+                  </a:tcPr>
+                </a:tc>
+                <a:tc>
+                  <a:txBody>
+                    <a:bodyPr/>
+                    <a:lstStyle/>
+                    <a:p>
+                      <a:r>
+                        <a:rPr sz="1100"/>
+                        <a:t>35</a:t>
+                      </a:r>
+                    </a:p>
+                  </a:txBody>
+                  <a:tcPr>
+                    <a:solidFill>
+                      <a:srgbClr val="ECF0F1"/>
+                    </a:solidFill>
+                  </a:tcPr>
+                </a:tc>
+                <a:extLst>
+                  <a:ext uri="{0D108BD9-81ED-4DB2-BD59-A6C34878D82A}">
+                    <a16:rowId xmlns:a16="http://schemas.microsoft.com/office/drawing/2014/main" val="10002"/>
+                  </a:ext>
+                </a:extLst>
+              </a:tr>
+              <a:tr h="411480">
+                <a:tc>
+                  <a:txBody>
+                    <a:bodyPr/>
+                    <a:lstStyle/>
+                    <a:p>
+                      <a:r>
+                        <a:rPr sz="1100"/>
+                        <a:t>3</a:t>
+                      </a:r>
+                    </a:p>
+                  </a:txBody>
+                  <a:tcPr>
+                    <a:solidFill>
+                      <a:srgbClr val="ECF0F1"/>
+                    </a:solidFill>
+                  </a:tcPr>
+                </a:tc>
+                <a:tc>
+                  <a:txBody>
+                    <a:bodyPr/>
+                    <a:lstStyle/>
+                    <a:p>
+                      <a:r>
+                        <a:rPr sz="1100"/>
+                        <a:t>Teclado</a:t>
+                      </a:r>
+                    </a:p>
+                  </a:txBody>
+                  <a:tcPr>
+                    <a:solidFill>
+                      <a:srgbClr val="ECF0F1"/>
+                    </a:solidFill>
+                  </a:tcPr>
+                </a:tc>
+                <a:tc>
+                  <a:txBody>
+                    <a:bodyPr/>
+                    <a:lstStyle/>
+                    <a:p>
+                      <a:r>
+                        <a:rPr sz="1100" dirty="0"/>
+                        <a:t>Cali</a:t>
+                      </a:r>
+                    </a:p>
+                  </a:txBody>
+                  <a:tcPr>
+                    <a:solidFill>
+                      <a:srgbClr val="ECF0F1"/>
+                    </a:solidFill>
+                  </a:tcPr>
+                </a:tc>
+                <a:tc>
+                  <a:txBody>
+                    <a:bodyPr/>
+                    <a:lstStyle/>
+                    <a:p>
+                      <a:r>
+                        <a:rPr sz="1100" dirty="0"/>
+                        <a:t>80</a:t>
+                      </a:r>
+                    </a:p>
+                  </a:txBody>
+                  <a:tcPr>
+                    <a:solidFill>
+                      <a:srgbClr val="ECF0F1"/>
+                    </a:solidFill>
+                  </a:tcPr>
+                </a:tc>
+                <a:extLst>
+                  <a:ext uri="{0D108BD9-81ED-4DB2-BD59-A6C34878D82A}">
+                    <a16:rowId xmlns:a16="http://schemas.microsoft.com/office/drawing/2014/main" val="10003"/>
+                  </a:ext>
+                </a:extLst>
+              </a:tr>
+            </a:tbl>
+          </a:graphicData>
+        </a:graphic>
+      </p:graphicFrame>
+    </p:spTree>
+    <p:extLst>
+      <p:ext uri="{BB962C8B-B14F-4D97-AF65-F5344CB8AC3E}">
+        <p14:creationId xmlns:p14="http://schemas.microsoft.com/office/powerpoint/2010/main" val="3729824519"/>
+      </p:ext>
+    </p:extLst>
+  </p:cSld>
+  <p:clrMapOvr>
+    <a:masterClrMapping/>
+  </p:clrMapOvr>
+</p:sld>
+</file>
+
+<file path=ppt/slides/slide11.xml><?xml version="1.0" encoding="utf-8"?>
+<p:sld xmlns:a="http://schemas.openxmlformats.org/drawingml/2006/main" xmlns:r="http://schemas.openxmlformats.org/officeDocument/2006/relationships" xmlns:p="http://schemas.openxmlformats.org/presentationml/2006/main">
+  <p:cSld>
+    <p:spTree>
+      <p:nvGrpSpPr>
+        <p:cNvPr id="1" name="">
+          <a:extLst>
+            <a:ext uri="{FF2B5EF4-FFF2-40B4-BE49-F238E27FC236}">
+              <a16:creationId xmlns:a16="http://schemas.microsoft.com/office/drawing/2014/main" id="{7FE0A0EF-31DF-8D17-205F-F54B0C503358}"/>
+            </a:ext>
+          </a:extLst>
+        </p:cNvPr>
+        <p:cNvGrpSpPr/>
+        <p:nvPr/>
+      </p:nvGrpSpPr>
+      <p:grpSpPr>
+        <a:xfrm>
+          <a:off x="0" y="0"/>
+          <a:ext cx="0" cy="0"/>
+          <a:chOff x="0" y="0"/>
+          <a:chExt cx="0" cy="0"/>
+        </a:xfrm>
+      </p:grpSpPr>
+      <p:sp>
+        <p:nvSpPr>
+          <p:cNvPr id="2" name="Title 1">
+            <a:extLst>
+              <a:ext uri="{FF2B5EF4-FFF2-40B4-BE49-F238E27FC236}">
+                <a16:creationId xmlns:a16="http://schemas.microsoft.com/office/drawing/2014/main" id="{57A8FFAE-4A0D-F878-6775-A9D75E85391A}"/>
+              </a:ext>
+            </a:extLst>
+          </p:cNvPr>
+          <p:cNvSpPr>
+            <a:spLocks noGrp="1"/>
+          </p:cNvSpPr>
+          <p:nvPr>
+            <p:ph type="title"/>
+          </p:nvPr>
+        </p:nvSpPr>
+        <p:spPr/>
+        <p:txBody>
+          <a:bodyPr/>
+          <a:lstStyle/>
+          <a:p>
+            <a:r>
+              <a:t>Almacenamiento por filas — Cómo funciona</a:t>
+            </a:r>
+          </a:p>
+        </p:txBody>
+      </p:sp>
+      <p:sp>
+        <p:nvSpPr>
+          <p:cNvPr id="3" name="Content Placeholder 2">
+            <a:extLst>
+              <a:ext uri="{FF2B5EF4-FFF2-40B4-BE49-F238E27FC236}">
+                <a16:creationId xmlns:a16="http://schemas.microsoft.com/office/drawing/2014/main" id="{DCEEFEAC-689E-3512-288D-E2ADDE4BE657}"/>
+              </a:ext>
+            </a:extLst>
+          </p:cNvPr>
+          <p:cNvSpPr>
+            <a:spLocks noGrp="1"/>
+          </p:cNvSpPr>
+          <p:nvPr>
+            <p:ph idx="1"/>
+          </p:nvPr>
+        </p:nvSpPr>
+        <p:spPr/>
+        <p:txBody>
+          <a:bodyPr>
+            <a:normAutofit/>
+          </a:bodyPr>
+          <a:lstStyle/>
+          <a:p>
+            <a:pPr marL="0" indent="0">
+              <a:buNone/>
+            </a:pPr>
+            <a:r>
+              <a:rPr sz="1600" dirty="0" err="1"/>
+              <a:t>Analogía</a:t>
+            </a:r>
+            <a:r>
+              <a:rPr sz="1600" dirty="0"/>
+              <a:t>: un </a:t>
+            </a:r>
+            <a:r>
+              <a:rPr sz="1600" dirty="0" err="1"/>
+              <a:t>cuaderno</a:t>
+            </a:r>
+            <a:r>
+              <a:rPr sz="1600" dirty="0"/>
+              <a:t> </a:t>
+            </a:r>
+            <a:r>
+              <a:rPr sz="1600" dirty="0" err="1"/>
+              <a:t>donde</a:t>
+            </a:r>
+            <a:r>
+              <a:rPr sz="1600" dirty="0"/>
+              <a:t> </a:t>
+            </a:r>
+            <a:r>
+              <a:rPr sz="1600" dirty="0" err="1"/>
+              <a:t>cada</a:t>
+            </a:r>
+            <a:r>
+              <a:rPr sz="1600" dirty="0"/>
+              <a:t> </a:t>
+            </a:r>
+            <a:r>
+              <a:rPr sz="1600" dirty="0" err="1"/>
+              <a:t>página</a:t>
+            </a:r>
+            <a:r>
+              <a:rPr sz="1600" dirty="0"/>
+              <a:t> </a:t>
+            </a:r>
+            <a:r>
+              <a:rPr sz="1600" dirty="0" err="1"/>
+              <a:t>tiene</a:t>
+            </a:r>
+            <a:r>
+              <a:rPr sz="1600" dirty="0"/>
+              <a:t> TODA la info de UN </a:t>
+            </a:r>
+            <a:r>
+              <a:rPr sz="1600" dirty="0" err="1"/>
+              <a:t>cliente</a:t>
+            </a:r>
+            <a:endParaRPr sz="1600" dirty="0"/>
+          </a:p>
+          <a:p>
+            <a:r>
+              <a:rPr sz="1600" dirty="0"/>
+              <a:t>Página 1: Juan — </a:t>
+            </a:r>
+            <a:r>
+              <a:rPr sz="1600" dirty="0" err="1"/>
+              <a:t>edad</a:t>
+            </a:r>
+            <a:r>
+              <a:rPr sz="1600" dirty="0"/>
+              <a:t>, </a:t>
+            </a:r>
+            <a:r>
+              <a:rPr sz="1600" dirty="0" err="1"/>
+              <a:t>dirección</a:t>
+            </a:r>
+            <a:r>
+              <a:rPr sz="1600" dirty="0"/>
+              <a:t>, </a:t>
+            </a:r>
+            <a:r>
+              <a:rPr sz="1600" dirty="0" err="1"/>
+              <a:t>teléfono</a:t>
+            </a:r>
+            <a:r>
+              <a:rPr sz="1600" dirty="0"/>
+              <a:t>, </a:t>
+            </a:r>
+            <a:r>
+              <a:rPr sz="1600" dirty="0" err="1"/>
+              <a:t>compras</a:t>
+            </a:r>
+            <a:r>
+              <a:rPr sz="1600" dirty="0"/>
+              <a:t>...</a:t>
+            </a:r>
+          </a:p>
+          <a:p>
+            <a:r>
+              <a:rPr sz="1600" dirty="0"/>
+              <a:t>Página 2: María — </a:t>
+            </a:r>
+            <a:r>
+              <a:rPr sz="1600" dirty="0" err="1"/>
+              <a:t>edad</a:t>
+            </a:r>
+            <a:r>
+              <a:rPr sz="1600" dirty="0"/>
+              <a:t>, </a:t>
+            </a:r>
+            <a:r>
+              <a:rPr sz="1600" dirty="0" err="1"/>
+              <a:t>dirección</a:t>
+            </a:r>
+            <a:r>
+              <a:rPr sz="1600" dirty="0"/>
+              <a:t>, </a:t>
+            </a:r>
+            <a:r>
+              <a:rPr sz="1600" dirty="0" err="1"/>
+              <a:t>teléfono</a:t>
+            </a:r>
+            <a:r>
+              <a:rPr sz="1600" dirty="0"/>
+              <a:t>, </a:t>
+            </a:r>
+            <a:r>
+              <a:rPr sz="1600" dirty="0" err="1"/>
+              <a:t>compras</a:t>
+            </a:r>
+            <a:r>
+              <a:rPr sz="1600" dirty="0"/>
+              <a:t>...</a:t>
+            </a:r>
+          </a:p>
+          <a:p>
+            <a:endParaRPr sz="1600" dirty="0"/>
+          </a:p>
+          <a:p>
+            <a:r>
+              <a:rPr sz="1600" dirty="0" err="1"/>
+              <a:t>Ventaja</a:t>
+            </a:r>
+            <a:r>
+              <a:rPr sz="1600" dirty="0"/>
+              <a:t>: leer UN </a:t>
+            </a:r>
+            <a:r>
+              <a:rPr sz="1600" dirty="0" err="1"/>
+              <a:t>registro</a:t>
+            </a:r>
+            <a:r>
+              <a:rPr sz="1600" dirty="0"/>
+              <a:t> </a:t>
+            </a:r>
+            <a:r>
+              <a:rPr sz="1600" dirty="0" err="1"/>
+              <a:t>completo</a:t>
+            </a:r>
+            <a:r>
+              <a:rPr sz="1600" dirty="0"/>
+              <a:t> es </a:t>
+            </a:r>
+            <a:r>
+              <a:rPr sz="1600" dirty="0" err="1"/>
+              <a:t>rapidísimo</a:t>
+            </a:r>
+            <a:r>
+              <a:rPr sz="1600" dirty="0"/>
+              <a:t> (</a:t>
+            </a:r>
+            <a:r>
+              <a:rPr sz="1600" dirty="0" err="1"/>
+              <a:t>todo</a:t>
+            </a:r>
+            <a:r>
+              <a:rPr sz="1600" dirty="0"/>
+              <a:t> </a:t>
+            </a:r>
+            <a:r>
+              <a:rPr sz="1600" dirty="0" err="1"/>
+              <a:t>está</a:t>
+            </a:r>
+            <a:r>
+              <a:rPr sz="1600" dirty="0"/>
+              <a:t> junto)</a:t>
+            </a:r>
+          </a:p>
+          <a:p>
+            <a:r>
+              <a:rPr sz="1600" dirty="0" err="1"/>
+              <a:t>Desventaja</a:t>
+            </a:r>
+            <a:r>
+              <a:rPr sz="1600" dirty="0"/>
+              <a:t>: </a:t>
+            </a:r>
+            <a:r>
+              <a:rPr sz="1600" dirty="0" err="1"/>
+              <a:t>si</a:t>
+            </a:r>
+            <a:r>
+              <a:rPr sz="1600" dirty="0"/>
+              <a:t> solo </a:t>
+            </a:r>
+            <a:r>
+              <a:rPr sz="1600" dirty="0" err="1"/>
+              <a:t>necesitas</a:t>
+            </a:r>
+            <a:r>
+              <a:rPr sz="1600" dirty="0"/>
+              <a:t> </a:t>
+            </a:r>
+            <a:r>
+              <a:rPr sz="1600" dirty="0" err="1"/>
+              <a:t>los</a:t>
+            </a:r>
+            <a:r>
+              <a:rPr sz="1600" dirty="0"/>
+              <a:t> </a:t>
+            </a:r>
+            <a:r>
+              <a:rPr sz="1600" dirty="0" err="1"/>
+              <a:t>montos</a:t>
+            </a:r>
+            <a:r>
+              <a:rPr sz="1600" dirty="0"/>
+              <a:t> → </a:t>
+            </a:r>
+            <a:r>
+              <a:rPr sz="1600" dirty="0" err="1"/>
+              <a:t>tienes</a:t>
+            </a:r>
+            <a:r>
+              <a:rPr sz="1600" dirty="0"/>
+              <a:t> </a:t>
+            </a:r>
+            <a:r>
+              <a:rPr sz="1600" dirty="0" err="1"/>
+              <a:t>que</a:t>
+            </a:r>
+            <a:r>
+              <a:rPr sz="1600" dirty="0"/>
+              <a:t> leer TODO</a:t>
+            </a:r>
+          </a:p>
+          <a:p>
+            <a:r>
+              <a:rPr sz="1600" dirty="0"/>
+              <a:t>Para </a:t>
+            </a:r>
+            <a:r>
+              <a:rPr sz="1600" dirty="0" err="1"/>
+              <a:t>obtener</a:t>
+            </a:r>
+            <a:r>
+              <a:rPr sz="1600" dirty="0"/>
+              <a:t> SUM(Monto) </a:t>
+            </a:r>
+            <a:r>
+              <a:rPr sz="1600" dirty="0" err="1"/>
+              <a:t>recorres</a:t>
+            </a:r>
+            <a:r>
+              <a:rPr sz="1600" dirty="0"/>
+              <a:t> 1</a:t>
+            </a:r>
+            <a:r>
+              <a:rPr lang="es-419" sz="1600" dirty="0"/>
+              <a:t> millon</a:t>
+            </a:r>
+            <a:r>
+              <a:rPr sz="1600" dirty="0"/>
+              <a:t> de </a:t>
+            </a:r>
+            <a:r>
+              <a:rPr sz="1600" dirty="0" err="1"/>
+              <a:t>filas</a:t>
+            </a:r>
+            <a:r>
+              <a:rPr sz="1600" dirty="0"/>
+              <a:t> </a:t>
+            </a:r>
+            <a:r>
+              <a:rPr sz="1600" dirty="0" err="1"/>
+              <a:t>leyendo</a:t>
+            </a:r>
+            <a:r>
+              <a:rPr sz="1600" dirty="0"/>
+              <a:t> </a:t>
+            </a:r>
+            <a:r>
+              <a:rPr sz="1600" dirty="0" err="1"/>
+              <a:t>datos</a:t>
+            </a:r>
+            <a:r>
+              <a:rPr sz="1600" dirty="0"/>
+              <a:t> </a:t>
+            </a:r>
+            <a:r>
+              <a:rPr sz="1600" dirty="0" err="1"/>
+              <a:t>que</a:t>
+            </a:r>
+            <a:r>
+              <a:rPr sz="1600" dirty="0"/>
+              <a:t> no </a:t>
+            </a:r>
+            <a:r>
+              <a:rPr sz="1600" dirty="0" err="1"/>
+              <a:t>necesitas</a:t>
+            </a:r>
+            <a:endParaRPr sz="1600" dirty="0"/>
+          </a:p>
+        </p:txBody>
+      </p:sp>
+    </p:spTree>
+    <p:extLst>
+      <p:ext uri="{BB962C8B-B14F-4D97-AF65-F5344CB8AC3E}">
+        <p14:creationId xmlns:p14="http://schemas.microsoft.com/office/powerpoint/2010/main" val="70577502"/>
+      </p:ext>
+    </p:extLst>
+  </p:cSld>
+  <p:clrMapOvr>
+    <a:masterClrMapping/>
+  </p:clrMapOvr>
+</p:sld>
+</file>
+
+<file path=ppt/slides/slide12.xml><?xml version="1.0" encoding="utf-8"?>
+<p:sld xmlns:a="http://schemas.openxmlformats.org/drawingml/2006/main" xmlns:r="http://schemas.openxmlformats.org/officeDocument/2006/relationships" xmlns:p="http://schemas.openxmlformats.org/presentationml/2006/main">
+  <p:cSld>
+    <p:spTree>
+      <p:nvGrpSpPr>
+        <p:cNvPr id="1" name=""/>
+        <p:cNvGrpSpPr/>
+        <p:nvPr/>
+      </p:nvGrpSpPr>
+      <p:grpSpPr>
+        <a:xfrm>
+          <a:off x="0" y="0"/>
+          <a:ext cx="0" cy="0"/>
+          <a:chOff x="0" y="0"/>
+          <a:chExt cx="0" cy="0"/>
+        </a:xfrm>
+      </p:grpSpPr>
+      <p:sp>
+        <p:nvSpPr>
+          <p:cNvPr id="2" name="Title 1"/>
+          <p:cNvSpPr>
+            <a:spLocks noGrp="1"/>
+          </p:cNvSpPr>
+          <p:nvPr>
+            <p:ph type="title"/>
+          </p:nvPr>
+        </p:nvSpPr>
+        <p:spPr/>
+        <p:txBody>
+          <a:bodyPr/>
+          <a:lstStyle/>
+          <a:p>
+            <a:r>
+              <a:t>Almacenamiento columnar — Cómo funciona</a:t>
+            </a:r>
+          </a:p>
+        </p:txBody>
+      </p:sp>
+      <p:sp>
+        <p:nvSpPr>
+          <p:cNvPr id="3" name="Content Placeholder 2"/>
+          <p:cNvSpPr>
+            <a:spLocks noGrp="1"/>
+          </p:cNvSpPr>
+          <p:nvPr>
+            <p:ph idx="1"/>
+          </p:nvPr>
+        </p:nvSpPr>
+        <p:spPr/>
+        <p:txBody>
+          <a:bodyPr>
+            <a:noAutofit/>
+          </a:bodyPr>
+          <a:lstStyle/>
+          <a:p>
+            <a:pPr marL="0" indent="0">
+              <a:buNone/>
+            </a:pPr>
+            <a:r>
+              <a:rPr sz="1600" dirty="0" err="1"/>
+              <a:t>Misma</a:t>
+            </a:r>
+            <a:r>
+              <a:rPr sz="1600" dirty="0"/>
+              <a:t> </a:t>
+            </a:r>
+            <a:r>
+              <a:rPr sz="1600" dirty="0" err="1"/>
+              <a:t>tabla</a:t>
+            </a:r>
+            <a:r>
+              <a:rPr sz="1600" dirty="0"/>
+              <a:t>, </a:t>
+            </a:r>
+            <a:r>
+              <a:rPr sz="1600" dirty="0" err="1"/>
+              <a:t>pero</a:t>
+            </a:r>
+            <a:r>
+              <a:rPr sz="1600" dirty="0"/>
+              <a:t> </a:t>
+            </a:r>
+            <a:r>
+              <a:rPr sz="1600" dirty="0" err="1"/>
+              <a:t>ahora</a:t>
+            </a:r>
+            <a:r>
+              <a:rPr sz="1600" dirty="0"/>
+              <a:t> </a:t>
+            </a:r>
+            <a:r>
+              <a:rPr sz="1600" dirty="0" err="1"/>
+              <a:t>guardada</a:t>
+            </a:r>
+            <a:r>
+              <a:rPr sz="1600" dirty="0"/>
+              <a:t> </a:t>
+            </a:r>
+            <a:r>
+              <a:rPr sz="1600" dirty="0" err="1"/>
+              <a:t>por</a:t>
+            </a:r>
+            <a:r>
+              <a:rPr sz="1600" dirty="0"/>
+              <a:t> COLUMNAS (Parquet, ORC):</a:t>
+            </a:r>
+          </a:p>
+          <a:p>
+            <a:endParaRPr sz="1600" dirty="0"/>
+          </a:p>
+          <a:p>
+            <a:r>
+              <a:rPr sz="1600" dirty="0"/>
+              <a:t>Columna ID:       [1, 2, 3, 4, 5, ...]</a:t>
+            </a:r>
+          </a:p>
+          <a:p>
+            <a:r>
+              <a:rPr sz="1600" dirty="0"/>
+              <a:t>Columna </a:t>
+            </a:r>
+            <a:r>
+              <a:rPr sz="1600" dirty="0" err="1"/>
+              <a:t>Producto</a:t>
+            </a:r>
+            <a:r>
+              <a:rPr sz="1600" dirty="0"/>
+              <a:t>:  [Laptop, Mouse, </a:t>
+            </a:r>
+            <a:r>
+              <a:rPr sz="1600" dirty="0" err="1"/>
+              <a:t>Teclado</a:t>
+            </a:r>
+            <a:r>
+              <a:rPr sz="1600" dirty="0"/>
+              <a:t>, ...]</a:t>
+            </a:r>
+          </a:p>
+          <a:p>
+            <a:r>
+              <a:rPr sz="1600" dirty="0"/>
+              <a:t>Columna Ciudad:    [Bogotá, Medellín, Cali, ...]</a:t>
+            </a:r>
+          </a:p>
+          <a:p>
+            <a:r>
+              <a:rPr sz="1600" dirty="0"/>
+              <a:t>Columna Monto:     [2500, 35, 80, ...]</a:t>
+            </a:r>
+          </a:p>
+          <a:p>
+            <a:endParaRPr sz="1600" dirty="0"/>
+          </a:p>
+          <a:p>
+            <a:pPr marL="0" indent="0">
+              <a:buNone/>
+            </a:pPr>
+            <a:r>
+              <a:rPr sz="1600" dirty="0"/>
+              <a:t>Todos </a:t>
+            </a:r>
+            <a:r>
+              <a:rPr sz="1600" dirty="0" err="1"/>
+              <a:t>los</a:t>
+            </a:r>
+            <a:r>
+              <a:rPr sz="1600" dirty="0"/>
+              <a:t> </a:t>
+            </a:r>
+            <a:r>
+              <a:rPr sz="1600" dirty="0" err="1"/>
+              <a:t>valores</a:t>
+            </a:r>
+            <a:r>
+              <a:rPr sz="1600" dirty="0"/>
+              <a:t> de UNA columna van </a:t>
+            </a:r>
+            <a:r>
+              <a:rPr sz="1600" dirty="0" err="1"/>
+              <a:t>juntos</a:t>
+            </a:r>
+            <a:r>
+              <a:rPr sz="1600" dirty="0"/>
+              <a:t> </a:t>
+            </a:r>
+            <a:r>
+              <a:rPr sz="1600" dirty="0" err="1"/>
+              <a:t>en</a:t>
+            </a:r>
+            <a:r>
+              <a:rPr sz="1600" dirty="0"/>
+              <a:t> disco</a:t>
+            </a:r>
+          </a:p>
+        </p:txBody>
+      </p:sp>
+    </p:spTree>
+    <p:extLst>
+      <p:ext uri="{BB962C8B-B14F-4D97-AF65-F5344CB8AC3E}">
+        <p14:creationId xmlns:p14="http://schemas.microsoft.com/office/powerpoint/2010/main" val="4201769717"/>
+      </p:ext>
+    </p:extLst>
+  </p:cSld>
+  <p:clrMapOvr>
+    <a:masterClrMapping/>
+  </p:clrMapOvr>
+</p:sld>
+</file>
+
+<file path=ppt/slides/slide13.xml><?xml version="1.0" encoding="utf-8"?>
+<p:sld xmlns:a="http://schemas.openxmlformats.org/drawingml/2006/main" xmlns:r="http://schemas.openxmlformats.org/officeDocument/2006/relationships" xmlns:p="http://schemas.openxmlformats.org/presentationml/2006/main">
+  <p:cSld>
+    <p:spTree>
+      <p:nvGrpSpPr>
+        <p:cNvPr id="1" name="">
+          <a:extLst>
+            <a:ext uri="{FF2B5EF4-FFF2-40B4-BE49-F238E27FC236}">
+              <a16:creationId xmlns:a16="http://schemas.microsoft.com/office/drawing/2014/main" id="{E7A297FB-808F-F6F8-899F-27C5B6B65301}"/>
+            </a:ext>
+          </a:extLst>
+        </p:cNvPr>
+        <p:cNvGrpSpPr/>
+        <p:nvPr/>
+      </p:nvGrpSpPr>
+      <p:grpSpPr>
+        <a:xfrm>
+          <a:off x="0" y="0"/>
+          <a:ext cx="0" cy="0"/>
+          <a:chOff x="0" y="0"/>
+          <a:chExt cx="0" cy="0"/>
+        </a:xfrm>
+      </p:grpSpPr>
+      <p:sp>
+        <p:nvSpPr>
+          <p:cNvPr id="2" name="Title 1">
+            <a:extLst>
+              <a:ext uri="{FF2B5EF4-FFF2-40B4-BE49-F238E27FC236}">
+                <a16:creationId xmlns:a16="http://schemas.microsoft.com/office/drawing/2014/main" id="{FEB4293D-1A43-A688-1C39-3D3162AE2A72}"/>
+              </a:ext>
+            </a:extLst>
+          </p:cNvPr>
+          <p:cNvSpPr>
+            <a:spLocks noGrp="1"/>
+          </p:cNvSpPr>
+          <p:nvPr>
+            <p:ph type="title"/>
+          </p:nvPr>
+        </p:nvSpPr>
+        <p:spPr/>
+        <p:txBody>
+          <a:bodyPr/>
+          <a:lstStyle/>
+          <a:p>
+            <a:r>
+              <a:t>Almacenamiento columnar — Cómo funciona</a:t>
+            </a:r>
+          </a:p>
+        </p:txBody>
+      </p:sp>
+      <p:sp>
+        <p:nvSpPr>
+          <p:cNvPr id="3" name="Content Placeholder 2">
+            <a:extLst>
+              <a:ext uri="{FF2B5EF4-FFF2-40B4-BE49-F238E27FC236}">
+                <a16:creationId xmlns:a16="http://schemas.microsoft.com/office/drawing/2014/main" id="{53407F02-8D5F-FB99-43F4-E0C8009BBC06}"/>
+              </a:ext>
+            </a:extLst>
+          </p:cNvPr>
+          <p:cNvSpPr>
+            <a:spLocks noGrp="1"/>
+          </p:cNvSpPr>
+          <p:nvPr>
+            <p:ph idx="1"/>
+          </p:nvPr>
+        </p:nvSpPr>
+        <p:spPr/>
+        <p:txBody>
+          <a:bodyPr>
+            <a:noAutofit/>
+          </a:bodyPr>
+          <a:lstStyle/>
+          <a:p>
+            <a:pPr marL="0" indent="0">
+              <a:buNone/>
+            </a:pPr>
+            <a:r>
+              <a:rPr lang="en-US" sz="1600" dirty="0" err="1"/>
+              <a:t>Analogía</a:t>
+            </a:r>
+            <a:r>
+              <a:rPr lang="en-US" sz="1600" dirty="0"/>
+              <a:t>: </a:t>
+            </a:r>
+            <a:r>
+              <a:rPr lang="en-US" sz="1600" dirty="0" err="1"/>
+              <a:t>en</a:t>
+            </a:r>
+            <a:r>
+              <a:rPr lang="en-US" sz="1600" dirty="0"/>
+              <a:t> </a:t>
+            </a:r>
+            <a:r>
+              <a:rPr lang="en-US" sz="1600" dirty="0" err="1"/>
+              <a:t>vez</a:t>
+            </a:r>
+            <a:r>
+              <a:rPr lang="en-US" sz="1600" dirty="0"/>
+              <a:t> de un </a:t>
+            </a:r>
+            <a:r>
+              <a:rPr lang="en-US" sz="1600" dirty="0" err="1"/>
+              <a:t>cuaderno</a:t>
+            </a:r>
+            <a:r>
+              <a:rPr lang="en-US" sz="1600" dirty="0"/>
+              <a:t> </a:t>
+            </a:r>
+            <a:r>
+              <a:rPr lang="en-US" sz="1600" dirty="0" err="1"/>
+              <a:t>por</a:t>
+            </a:r>
+            <a:r>
+              <a:rPr lang="en-US" sz="1600" dirty="0"/>
+              <a:t> </a:t>
+            </a:r>
+            <a:r>
+              <a:rPr lang="en-US" sz="1600" dirty="0" err="1"/>
+              <a:t>cliente</a:t>
+            </a:r>
+            <a:r>
+              <a:rPr lang="en-US" sz="1600" dirty="0"/>
+              <a:t>, </a:t>
+            </a:r>
+            <a:r>
+              <a:rPr lang="en-US" sz="1600" dirty="0" err="1"/>
+              <a:t>tienes</a:t>
+            </a:r>
+            <a:r>
+              <a:rPr lang="en-US" sz="1600" dirty="0"/>
+              <a:t> </a:t>
+            </a:r>
+            <a:r>
+              <a:rPr lang="en-US" sz="1600" dirty="0" err="1"/>
+              <a:t>una</a:t>
+            </a:r>
+            <a:r>
+              <a:rPr lang="en-US" sz="1600" dirty="0"/>
+              <a:t> LISTA </a:t>
+            </a:r>
+            <a:r>
+              <a:rPr lang="en-US" sz="1600" dirty="0" err="1"/>
+              <a:t>por</a:t>
+            </a:r>
+            <a:r>
+              <a:rPr lang="en-US" sz="1600" dirty="0"/>
+              <a:t> </a:t>
+            </a:r>
+            <a:r>
+              <a:rPr lang="en-US" sz="1600" dirty="0" err="1"/>
+              <a:t>tema</a:t>
+            </a:r>
+            <a:endParaRPr lang="en-US" sz="1600" dirty="0"/>
+          </a:p>
+          <a:p>
+            <a:r>
+              <a:rPr lang="en-US" sz="1600" dirty="0"/>
+              <a:t>Lista de </a:t>
+            </a:r>
+            <a:r>
+              <a:rPr lang="en-US" sz="1600" dirty="0" err="1"/>
+              <a:t>edades</a:t>
+            </a:r>
+            <a:r>
+              <a:rPr lang="en-US" sz="1600" dirty="0"/>
+              <a:t>: [25, 30, 22, 45, ...]</a:t>
+            </a:r>
+          </a:p>
+          <a:p>
+            <a:r>
+              <a:rPr lang="en-US" sz="1600" dirty="0"/>
+              <a:t>Lista de </a:t>
+            </a:r>
+            <a:r>
+              <a:rPr lang="en-US" sz="1600" dirty="0" err="1"/>
+              <a:t>ciudades</a:t>
+            </a:r>
+            <a:r>
+              <a:rPr lang="en-US" sz="1600" dirty="0"/>
+              <a:t>: [Bogotá, Cali, Medellín, ...]</a:t>
+            </a:r>
+          </a:p>
+          <a:p>
+            <a:r>
+              <a:rPr lang="en-US" sz="1600" dirty="0"/>
+              <a:t>Lista de </a:t>
+            </a:r>
+            <a:r>
+              <a:rPr lang="en-US" sz="1600" dirty="0" err="1"/>
+              <a:t>montos</a:t>
+            </a:r>
+            <a:r>
+              <a:rPr lang="en-US" sz="1600" dirty="0"/>
+              <a:t>: [2500, 35, 80, ...]</a:t>
+            </a:r>
+          </a:p>
+          <a:p>
+            <a:endParaRPr sz="1600" dirty="0"/>
+          </a:p>
+          <a:p>
+            <a:pPr marL="0" indent="0">
+              <a:buNone/>
+            </a:pPr>
+            <a:r>
+              <a:rPr sz="1600" dirty="0" err="1"/>
+              <a:t>Ahora</a:t>
+            </a:r>
+            <a:r>
+              <a:rPr sz="1600" dirty="0"/>
+              <a:t> SUM(Monto) solo lee la columna Monto → </a:t>
+            </a:r>
+            <a:r>
+              <a:rPr sz="1600" dirty="0" err="1"/>
+              <a:t>ignora</a:t>
+            </a:r>
+            <a:r>
+              <a:rPr sz="1600" dirty="0"/>
+              <a:t> </a:t>
+            </a:r>
+            <a:r>
+              <a:rPr sz="1600" dirty="0" err="1"/>
+              <a:t>el</a:t>
+            </a:r>
+            <a:r>
+              <a:rPr sz="1600" dirty="0"/>
+              <a:t> resto</a:t>
+            </a:r>
+          </a:p>
+          <a:p>
+            <a:r>
+              <a:rPr sz="1600" dirty="0"/>
+              <a:t>En 1</a:t>
+            </a:r>
+            <a:r>
+              <a:rPr lang="es-419" sz="1600" dirty="0"/>
+              <a:t> millon</a:t>
+            </a:r>
+            <a:r>
+              <a:rPr sz="1600" dirty="0"/>
+              <a:t> de </a:t>
+            </a:r>
+            <a:r>
+              <a:rPr sz="1600" dirty="0" err="1"/>
+              <a:t>filas</a:t>
+            </a:r>
+            <a:r>
+              <a:rPr sz="1600" dirty="0"/>
+              <a:t> con 20 columnas: lees 1/20 de </a:t>
+            </a:r>
+            <a:r>
+              <a:rPr sz="1600" dirty="0" err="1"/>
+              <a:t>los</a:t>
+            </a:r>
+            <a:r>
+              <a:rPr sz="1600" dirty="0"/>
+              <a:t> </a:t>
+            </a:r>
+            <a:r>
+              <a:rPr sz="1600" dirty="0" err="1"/>
+              <a:t>datos</a:t>
+            </a:r>
+            <a:r>
+              <a:rPr sz="1600" dirty="0"/>
+              <a:t> = 95% </a:t>
+            </a:r>
+            <a:r>
+              <a:rPr sz="1600" dirty="0" err="1"/>
+              <a:t>menos</a:t>
+            </a:r>
+            <a:r>
+              <a:rPr sz="1600" dirty="0"/>
+              <a:t> I/O</a:t>
+            </a:r>
+          </a:p>
+          <a:p>
+            <a:endParaRPr sz="1600" dirty="0"/>
+          </a:p>
+          <a:p>
+            <a:pPr marL="0" indent="0">
+              <a:buNone/>
+            </a:pPr>
+            <a:r>
+              <a:rPr sz="1600" dirty="0"/>
+              <a:t>Bonus — </a:t>
+            </a:r>
+            <a:r>
+              <a:rPr sz="1600" dirty="0" err="1"/>
+              <a:t>compresión</a:t>
+            </a:r>
+            <a:r>
+              <a:rPr sz="1600" dirty="0"/>
+              <a:t>: </a:t>
+            </a:r>
+            <a:r>
+              <a:rPr sz="1600" dirty="0" err="1"/>
+              <a:t>datos</a:t>
+            </a:r>
+            <a:r>
+              <a:rPr sz="1600" dirty="0"/>
+              <a:t> del </a:t>
+            </a:r>
+            <a:r>
+              <a:rPr sz="1600" dirty="0" err="1"/>
+              <a:t>mismo</a:t>
+            </a:r>
+            <a:r>
+              <a:rPr sz="1600" dirty="0"/>
+              <a:t> </a:t>
+            </a:r>
+            <a:r>
+              <a:rPr sz="1600" dirty="0" err="1"/>
+              <a:t>tipo</a:t>
+            </a:r>
+            <a:r>
+              <a:rPr sz="1600" dirty="0"/>
+              <a:t> </a:t>
+            </a:r>
+            <a:r>
+              <a:rPr sz="1600" dirty="0" err="1"/>
+              <a:t>juntos</a:t>
+            </a:r>
+            <a:r>
+              <a:rPr sz="1600" dirty="0"/>
+              <a:t> </a:t>
+            </a:r>
+            <a:r>
+              <a:rPr sz="1600" dirty="0" err="1"/>
+              <a:t>comprimen</a:t>
+            </a:r>
+            <a:r>
+              <a:rPr sz="1600" dirty="0"/>
+              <a:t> MUCHO </a:t>
+            </a:r>
+            <a:r>
+              <a:rPr sz="1600" dirty="0" err="1"/>
+              <a:t>mejor</a:t>
+            </a:r>
+            <a:endParaRPr sz="1600" dirty="0"/>
+          </a:p>
+          <a:p>
+            <a:r>
+              <a:rPr lang="en-CO" sz="1600" dirty="0"/>
+              <a:t>  </a:t>
+            </a:r>
+            <a:r>
+              <a:rPr sz="1600" dirty="0"/>
+              <a:t>[Bogotá, Bogotá, Bogotá, Cali, Cali] → 'Bogotá×3, Cali×2' (RLE)</a:t>
+            </a:r>
+          </a:p>
+          <a:p>
+            <a:r>
+              <a:rPr lang="en-CO" sz="1600" dirty="0"/>
+              <a:t>  </a:t>
+            </a:r>
+            <a:r>
+              <a:rPr sz="1600" dirty="0" err="1"/>
+              <a:t>Compresión</a:t>
+            </a:r>
+            <a:r>
+              <a:rPr sz="1600" dirty="0"/>
+              <a:t> 70-80% vs ~40% </a:t>
+            </a:r>
+            <a:r>
+              <a:rPr sz="1600" dirty="0" err="1"/>
+              <a:t>en</a:t>
+            </a:r>
+            <a:r>
+              <a:rPr sz="1600" dirty="0"/>
+              <a:t> </a:t>
+            </a:r>
+            <a:r>
+              <a:rPr sz="1600" dirty="0" err="1"/>
+              <a:t>formatos</a:t>
+            </a:r>
+            <a:r>
+              <a:rPr sz="1600" dirty="0"/>
+              <a:t> de </a:t>
+            </a:r>
+            <a:r>
+              <a:rPr sz="1600" dirty="0" err="1"/>
+              <a:t>filas</a:t>
+            </a:r>
+            <a:endParaRPr sz="1600" dirty="0"/>
+          </a:p>
+        </p:txBody>
+      </p:sp>
+    </p:spTree>
+    <p:extLst>
+      <p:ext uri="{BB962C8B-B14F-4D97-AF65-F5344CB8AC3E}">
+        <p14:creationId xmlns:p14="http://schemas.microsoft.com/office/powerpoint/2010/main" val="3486292046"/>
+      </p:ext>
+    </p:extLst>
+  </p:cSld>
+  <p:clrMapOvr>
+    <a:masterClrMapping/>
+  </p:clrMapOvr>
+</p:sld>
+</file>
+
+<file path=ppt/slides/slide14.xml><?xml version="1.0" encoding="utf-8"?>
+<p:sld xmlns:a="http://schemas.openxmlformats.org/drawingml/2006/main" xmlns:r="http://schemas.openxmlformats.org/officeDocument/2006/relationships" xmlns:p="http://schemas.openxmlformats.org/presentationml/2006/main">
+  <p:cSld>
+    <p:spTree>
+      <p:nvGrpSpPr>
+        <p:cNvPr id="1" name=""/>
+        <p:cNvGrpSpPr/>
+        <p:nvPr/>
+      </p:nvGrpSpPr>
+      <p:grpSpPr>
+        <a:xfrm>
+          <a:off x="0" y="0"/>
+          <a:ext cx="0" cy="0"/>
+          <a:chOff x="0" y="0"/>
+          <a:chExt cx="0" cy="0"/>
+        </a:xfrm>
+      </p:grpSpPr>
+      <p:sp>
+        <p:nvSpPr>
+          <p:cNvPr id="2" name="Title 1"/>
+          <p:cNvSpPr>
+            <a:spLocks noGrp="1"/>
+          </p:cNvSpPr>
+          <p:nvPr>
+            <p:ph type="title"/>
+          </p:nvPr>
+        </p:nvSpPr>
+        <p:spPr/>
+        <p:txBody>
+          <a:bodyPr/>
+          <a:lstStyle/>
+          <a:p>
+            <a:r>
+              <a:t>Filas vs Columnas — ¿Cuándo conviene cada uno?</a:t>
+            </a:r>
+          </a:p>
+        </p:txBody>
+      </p:sp>
+      <p:sp>
+        <p:nvSpPr>
+          <p:cNvPr id="3" name="Content Placeholder 2"/>
+          <p:cNvSpPr>
+            <a:spLocks noGrp="1"/>
+          </p:cNvSpPr>
+          <p:nvPr>
+            <p:ph idx="1"/>
+          </p:nvPr>
+        </p:nvSpPr>
+        <p:spPr/>
+        <p:txBody>
+          <a:bodyPr>
+            <a:noAutofit/>
+          </a:bodyPr>
+          <a:lstStyle/>
+          <a:p>
+            <a:endParaRPr sz="2000" dirty="0"/>
+          </a:p>
+          <a:p>
+            <a:r>
+              <a:rPr sz="2000" dirty="0"/>
+              <a:t>SELECT * FROM </a:t>
+            </a:r>
+            <a:r>
+              <a:rPr sz="2000" dirty="0" err="1"/>
+              <a:t>ventas</a:t>
+            </a:r>
+            <a:r>
+              <a:rPr sz="2000" dirty="0"/>
+              <a:t> WHERE id = 42</a:t>
+            </a:r>
+          </a:p>
+          <a:p>
+            <a:pPr marL="457200" lvl="1" indent="0">
+              <a:buNone/>
+            </a:pPr>
+            <a:r>
+              <a:rPr sz="1600" dirty="0"/>
+              <a:t>→ </a:t>
+            </a:r>
+            <a:r>
+              <a:rPr sz="1600" dirty="0" err="1"/>
+              <a:t>Necesitas</a:t>
+            </a:r>
+            <a:r>
+              <a:rPr sz="1600" dirty="0"/>
+              <a:t> TODOS </a:t>
+            </a:r>
+            <a:r>
+              <a:rPr sz="1600" dirty="0" err="1"/>
+              <a:t>los</a:t>
+            </a:r>
+            <a:r>
+              <a:rPr sz="1600" dirty="0"/>
+              <a:t> campos de UN </a:t>
+            </a:r>
+            <a:r>
+              <a:rPr sz="1600" dirty="0" err="1"/>
+              <a:t>registro</a:t>
+            </a:r>
+            <a:endParaRPr sz="1600" dirty="0"/>
+          </a:p>
+          <a:p>
+            <a:pPr marL="457200" lvl="1" indent="0">
+              <a:buNone/>
+            </a:pPr>
+            <a:r>
+              <a:rPr sz="1600" dirty="0"/>
+              <a:t>→ Filas </a:t>
+            </a:r>
+            <a:r>
+              <a:rPr sz="1600" dirty="0" err="1"/>
+              <a:t>gana</a:t>
+            </a:r>
+            <a:r>
+              <a:rPr sz="1600" dirty="0"/>
+              <a:t>: </a:t>
+            </a:r>
+            <a:r>
+              <a:rPr sz="1600" dirty="0" err="1"/>
+              <a:t>todo</a:t>
+            </a:r>
+            <a:r>
+              <a:rPr sz="1600" dirty="0"/>
+              <a:t> </a:t>
+            </a:r>
+            <a:r>
+              <a:rPr sz="1600" dirty="0" err="1"/>
+              <a:t>está</a:t>
+            </a:r>
+            <a:r>
+              <a:rPr sz="1600" dirty="0"/>
+              <a:t> junto, </a:t>
+            </a:r>
+            <a:r>
+              <a:rPr sz="1600" dirty="0" err="1"/>
+              <a:t>una</a:t>
+            </a:r>
+            <a:r>
+              <a:rPr sz="1600" dirty="0"/>
+              <a:t> sola </a:t>
+            </a:r>
+            <a:r>
+              <a:rPr sz="1600" dirty="0" err="1"/>
+              <a:t>lectura</a:t>
+            </a:r>
+            <a:endParaRPr sz="1600" dirty="0"/>
+          </a:p>
+          <a:p>
+            <a:pPr marL="457200" lvl="1" indent="0">
+              <a:buNone/>
+            </a:pPr>
+            <a:r>
+              <a:rPr sz="1600" dirty="0"/>
+              <a:t>→ Columnar </a:t>
+            </a:r>
+            <a:r>
+              <a:rPr sz="1600" dirty="0" err="1"/>
+              <a:t>pierde</a:t>
+            </a:r>
+            <a:r>
+              <a:rPr sz="1600" dirty="0"/>
+              <a:t>: </a:t>
+            </a:r>
+            <a:r>
+              <a:rPr sz="1600" dirty="0" err="1"/>
+              <a:t>tiene</a:t>
+            </a:r>
+            <a:r>
+              <a:rPr sz="1600" dirty="0"/>
+              <a:t> </a:t>
+            </a:r>
+            <a:r>
+              <a:rPr sz="1600" dirty="0" err="1"/>
+              <a:t>que</a:t>
+            </a:r>
+            <a:r>
+              <a:rPr sz="1600" dirty="0"/>
+              <a:t> </a:t>
+            </a:r>
+            <a:r>
+              <a:rPr sz="1600" dirty="0" err="1"/>
+              <a:t>ir</a:t>
+            </a:r>
+            <a:r>
+              <a:rPr sz="1600" dirty="0"/>
+              <a:t> a </a:t>
+            </a:r>
+            <a:r>
+              <a:rPr sz="1600" dirty="0" err="1"/>
+              <a:t>cada</a:t>
+            </a:r>
+            <a:r>
+              <a:rPr sz="1600" dirty="0"/>
+              <a:t> columna y </a:t>
+            </a:r>
+            <a:r>
+              <a:rPr sz="1600" dirty="0" err="1"/>
+              <a:t>reconstruir</a:t>
+            </a:r>
+            <a:r>
+              <a:rPr sz="1600" dirty="0"/>
+              <a:t> la fila</a:t>
+            </a:r>
+          </a:p>
+          <a:p>
+            <a:endParaRPr sz="2000" dirty="0"/>
+          </a:p>
+          <a:p>
+            <a:r>
+              <a:rPr sz="2000" dirty="0"/>
+              <a:t>SELECT ciudad, SUM(</a:t>
+            </a:r>
+            <a:r>
+              <a:rPr sz="2000" dirty="0" err="1"/>
+              <a:t>monto</a:t>
+            </a:r>
+            <a:r>
+              <a:rPr sz="2000" dirty="0"/>
+              <a:t>) FROM </a:t>
+            </a:r>
+            <a:r>
+              <a:rPr sz="2000" dirty="0" err="1"/>
+              <a:t>ventas</a:t>
+            </a:r>
+            <a:r>
+              <a:rPr sz="2000" dirty="0"/>
+              <a:t> GROUP BY ciudad</a:t>
+            </a:r>
+          </a:p>
+          <a:p>
+            <a:pPr marL="457200" lvl="1" indent="0">
+              <a:buNone/>
+            </a:pPr>
+            <a:r>
+              <a:rPr sz="1600" dirty="0"/>
+              <a:t>→ </a:t>
+            </a:r>
+            <a:r>
+              <a:rPr lang="en-US" sz="1600" dirty="0"/>
+              <a:t>S</a:t>
+            </a:r>
+            <a:r>
+              <a:rPr sz="1600" dirty="0"/>
+              <a:t>olo </a:t>
+            </a:r>
+            <a:r>
+              <a:rPr sz="1600" dirty="0" err="1"/>
+              <a:t>necesitas</a:t>
+            </a:r>
+            <a:r>
+              <a:rPr sz="1600" dirty="0"/>
+              <a:t> 2 de 20 columnas</a:t>
+            </a:r>
+          </a:p>
+          <a:p>
+            <a:pPr marL="457200" lvl="1" indent="0">
+              <a:buNone/>
+            </a:pPr>
+            <a:r>
+              <a:rPr sz="1600" dirty="0"/>
+              <a:t>→ Columnar </a:t>
+            </a:r>
+            <a:r>
+              <a:rPr sz="1600" dirty="0" err="1"/>
+              <a:t>gana</a:t>
+            </a:r>
+            <a:r>
+              <a:rPr sz="1600" dirty="0"/>
+              <a:t>: lee solo ciudad + </a:t>
+            </a:r>
+            <a:r>
+              <a:rPr sz="1600" dirty="0" err="1"/>
+              <a:t>monto</a:t>
+            </a:r>
+            <a:r>
+              <a:rPr sz="1600" dirty="0"/>
+              <a:t>, </a:t>
+            </a:r>
+            <a:r>
+              <a:rPr sz="1600" dirty="0" err="1"/>
+              <a:t>ignora</a:t>
+            </a:r>
+            <a:r>
+              <a:rPr sz="1600" dirty="0"/>
+              <a:t> las </a:t>
+            </a:r>
+            <a:r>
+              <a:rPr sz="1600" dirty="0" err="1"/>
+              <a:t>otras</a:t>
+            </a:r>
+            <a:r>
+              <a:rPr sz="1600" dirty="0"/>
+              <a:t> 18</a:t>
+            </a:r>
+          </a:p>
+          <a:p>
+            <a:pPr marL="457200" lvl="1" indent="0">
+              <a:buNone/>
+            </a:pPr>
+            <a:r>
+              <a:rPr sz="1600" dirty="0"/>
+              <a:t>→ Filas </a:t>
+            </a:r>
+            <a:r>
+              <a:rPr sz="1600" dirty="0" err="1"/>
+              <a:t>pierde</a:t>
+            </a:r>
+            <a:r>
+              <a:rPr sz="1600" dirty="0"/>
+              <a:t>: lee las 20 columnas de </a:t>
+            </a:r>
+            <a:r>
+              <a:rPr sz="1600" dirty="0" err="1"/>
+              <a:t>cada</a:t>
+            </a:r>
+            <a:r>
+              <a:rPr sz="1600" dirty="0"/>
+              <a:t> </a:t>
+            </a:r>
+            <a:r>
+              <a:rPr sz="1600" dirty="0" err="1"/>
+              <a:t>registro</a:t>
+            </a:r>
+            <a:r>
+              <a:rPr sz="1600" dirty="0"/>
+              <a:t> para </a:t>
+            </a:r>
+            <a:r>
+              <a:rPr sz="1600" dirty="0" err="1"/>
+              <a:t>sacar</a:t>
+            </a:r>
+            <a:r>
+              <a:rPr sz="1600" dirty="0"/>
+              <a:t> </a:t>
+            </a:r>
+          </a:p>
+        </p:txBody>
+      </p:sp>
+    </p:spTree>
+    <p:extLst>
+      <p:ext uri="{BB962C8B-B14F-4D97-AF65-F5344CB8AC3E}">
+        <p14:creationId xmlns:p14="http://schemas.microsoft.com/office/powerpoint/2010/main" val="747344842"/>
+      </p:ext>
+    </p:extLst>
+  </p:cSld>
+  <p:clrMapOvr>
+    <a:masterClrMapping/>
+  </p:clrMapOvr>
+</p:sld>
+</file>
+
+<file path=ppt/slides/slide15.xml><?xml version="1.0" encoding="utf-8"?>
+<p:sld xmlns:a="http://schemas.openxmlformats.org/drawingml/2006/main" xmlns:r="http://schemas.openxmlformats.org/officeDocument/2006/relationships" xmlns:p="http://schemas.openxmlformats.org/presentationml/2006/main">
+  <p:cSld>
+    <p:spTree>
+      <p:nvGrpSpPr>
+        <p:cNvPr id="1" name="">
+          <a:extLst>
+            <a:ext uri="{FF2B5EF4-FFF2-40B4-BE49-F238E27FC236}">
+              <a16:creationId xmlns:a16="http://schemas.microsoft.com/office/drawing/2014/main" id="{B487417C-1B91-9382-C857-3210E4224C0F}"/>
+            </a:ext>
+          </a:extLst>
+        </p:cNvPr>
+        <p:cNvGrpSpPr/>
+        <p:nvPr/>
+      </p:nvGrpSpPr>
+      <p:grpSpPr>
+        <a:xfrm>
+          <a:off x="0" y="0"/>
+          <a:ext cx="0" cy="0"/>
+          <a:chOff x="0" y="0"/>
+          <a:chExt cx="0" cy="0"/>
+        </a:xfrm>
+      </p:grpSpPr>
+      <p:sp>
+        <p:nvSpPr>
+          <p:cNvPr id="2" name="Title 1">
+            <a:extLst>
+              <a:ext uri="{FF2B5EF4-FFF2-40B4-BE49-F238E27FC236}">
+                <a16:creationId xmlns:a16="http://schemas.microsoft.com/office/drawing/2014/main" id="{84EC6BB8-FCA6-C9D9-1563-5AD5B6733CD9}"/>
+              </a:ext>
+            </a:extLst>
+          </p:cNvPr>
+          <p:cNvSpPr>
+            <a:spLocks noGrp="1"/>
+          </p:cNvSpPr>
+          <p:nvPr>
+            <p:ph type="title"/>
+          </p:nvPr>
+        </p:nvSpPr>
+        <p:spPr/>
+        <p:txBody>
+          <a:bodyPr/>
+          <a:lstStyle/>
+          <a:p>
+            <a:r>
+              <a:t>Filas vs Columnas — ¿Cuándo conviene cada uno?</a:t>
+            </a:r>
+          </a:p>
+        </p:txBody>
+      </p:sp>
+      <p:sp>
+        <p:nvSpPr>
+          <p:cNvPr id="3" name="Content Placeholder 2">
+            <a:extLst>
+              <a:ext uri="{FF2B5EF4-FFF2-40B4-BE49-F238E27FC236}">
+                <a16:creationId xmlns:a16="http://schemas.microsoft.com/office/drawing/2014/main" id="{B17EBAAF-A14C-612A-42C0-B2C78B969088}"/>
+              </a:ext>
+            </a:extLst>
+          </p:cNvPr>
+          <p:cNvSpPr>
+            <a:spLocks noGrp="1"/>
+          </p:cNvSpPr>
+          <p:nvPr>
+            <p:ph idx="1"/>
+          </p:nvPr>
+        </p:nvSpPr>
+        <p:spPr/>
+        <p:txBody>
+          <a:bodyPr>
+            <a:noAutofit/>
+          </a:bodyPr>
+          <a:lstStyle/>
+          <a:p>
+            <a:pPr marL="0" indent="0">
+              <a:buNone/>
+            </a:pPr>
+            <a:endParaRPr sz="1600" dirty="0"/>
+          </a:p>
+          <a:p>
+            <a:r>
+              <a:rPr sz="1600" dirty="0"/>
+              <a:t>Regla </a:t>
+            </a:r>
+            <a:r>
+              <a:rPr sz="1600" dirty="0" err="1"/>
+              <a:t>práctica</a:t>
+            </a:r>
+            <a:r>
+              <a:rPr sz="1600" dirty="0"/>
+              <a:t>:</a:t>
+            </a:r>
+          </a:p>
+          <a:p>
+            <a:r>
+              <a:rPr sz="1600" dirty="0"/>
+              <a:t>  Filas → </a:t>
+            </a:r>
+            <a:r>
+              <a:rPr sz="1600" dirty="0" err="1"/>
+              <a:t>escritura</a:t>
+            </a:r>
+            <a:r>
+              <a:rPr sz="1600" dirty="0"/>
+              <a:t> </a:t>
+            </a:r>
+            <a:r>
+              <a:rPr sz="1600" dirty="0" err="1"/>
+              <a:t>rápida</a:t>
+            </a:r>
+            <a:r>
+              <a:rPr sz="1600" dirty="0"/>
+              <a:t>, </a:t>
+            </a:r>
+            <a:r>
+              <a:rPr sz="1600" dirty="0" err="1"/>
+              <a:t>lectura</a:t>
+            </a:r>
+            <a:r>
+              <a:rPr sz="1600" dirty="0"/>
+              <a:t> de </a:t>
+            </a:r>
+            <a:r>
+              <a:rPr sz="1600" dirty="0" err="1"/>
+              <a:t>registros</a:t>
+            </a:r>
+            <a:r>
+              <a:rPr sz="1600" dirty="0"/>
+              <a:t> </a:t>
+            </a:r>
+            <a:r>
+              <a:rPr sz="1600" dirty="0" err="1"/>
+              <a:t>completos</a:t>
+            </a:r>
+            <a:r>
+              <a:rPr sz="1600" dirty="0"/>
+              <a:t>, OLTP</a:t>
+            </a:r>
+          </a:p>
+          <a:p>
+            <a:r>
+              <a:rPr sz="1600" dirty="0"/>
+              <a:t>           Bases </a:t>
+            </a:r>
+            <a:r>
+              <a:rPr sz="1600" dirty="0" err="1"/>
+              <a:t>transaccionales</a:t>
+            </a:r>
+            <a:r>
+              <a:rPr sz="1600" dirty="0"/>
+              <a:t>, APIs, streaming, Kafka</a:t>
+            </a:r>
+          </a:p>
+          <a:p>
+            <a:r>
+              <a:rPr sz="1600" dirty="0"/>
+              <a:t>  Columnas → </a:t>
+            </a:r>
+            <a:r>
+              <a:rPr sz="1600" dirty="0" err="1"/>
+              <a:t>lectura</a:t>
+            </a:r>
+            <a:r>
+              <a:rPr sz="1600" dirty="0"/>
+              <a:t> </a:t>
+            </a:r>
+            <a:r>
+              <a:rPr sz="1600" dirty="0" err="1"/>
+              <a:t>analítica</a:t>
+            </a:r>
+            <a:r>
+              <a:rPr sz="1600" dirty="0"/>
+              <a:t> </a:t>
+            </a:r>
+            <a:r>
+              <a:rPr sz="1600" dirty="0" err="1"/>
+              <a:t>rápida</a:t>
+            </a:r>
+            <a:r>
+              <a:rPr sz="1600" dirty="0"/>
+              <a:t>, </a:t>
+            </a:r>
+            <a:r>
+              <a:rPr sz="1600" dirty="0" err="1"/>
+              <a:t>agregaciones</a:t>
+            </a:r>
+            <a:r>
+              <a:rPr sz="1600" dirty="0"/>
+              <a:t>, OLAP</a:t>
+            </a:r>
+          </a:p>
+          <a:p>
+            <a:r>
+              <a:rPr sz="1600" dirty="0"/>
+              <a:t>              Data warehouses, data lakes, dashboards, ML</a:t>
+            </a:r>
+          </a:p>
+          <a:p>
+            <a:endParaRPr sz="1600" dirty="0"/>
+          </a:p>
+          <a:p>
+            <a:r>
+              <a:rPr sz="1600" dirty="0"/>
+              <a:t>En un Lakehouse: Avro (</a:t>
+            </a:r>
+            <a:r>
+              <a:rPr sz="1600" dirty="0" err="1"/>
+              <a:t>filas</a:t>
+            </a:r>
+            <a:r>
+              <a:rPr sz="1600" dirty="0"/>
+              <a:t>) para </a:t>
+            </a:r>
+            <a:r>
+              <a:rPr sz="1600" dirty="0" err="1"/>
+              <a:t>ingestar</a:t>
+            </a:r>
+            <a:r>
+              <a:rPr sz="1600" dirty="0"/>
+              <a:t> → Parquet (columnas) para </a:t>
+            </a:r>
+            <a:r>
+              <a:rPr sz="1600" dirty="0" err="1"/>
+              <a:t>analizar</a:t>
+            </a:r>
+            <a:endParaRPr sz="1600" dirty="0"/>
+          </a:p>
+          <a:p>
+            <a:r>
+              <a:rPr sz="1600" dirty="0"/>
+              <a:t>Los </a:t>
+            </a:r>
+            <a:r>
+              <a:rPr sz="1600" dirty="0" err="1"/>
+              <a:t>datos</a:t>
+            </a:r>
+            <a:r>
+              <a:rPr sz="1600" dirty="0"/>
+              <a:t> </a:t>
+            </a:r>
+            <a:r>
+              <a:rPr sz="1600" dirty="0" err="1"/>
+              <a:t>cambian</a:t>
+            </a:r>
+            <a:r>
+              <a:rPr sz="1600" dirty="0"/>
+              <a:t> de </a:t>
+            </a:r>
+            <a:r>
+              <a:rPr sz="1600" dirty="0" err="1"/>
+              <a:t>formato</a:t>
+            </a:r>
+            <a:r>
+              <a:rPr sz="1600" dirty="0"/>
+              <a:t> </a:t>
+            </a:r>
+            <a:r>
+              <a:rPr sz="1600" dirty="0" err="1"/>
+              <a:t>según</a:t>
+            </a:r>
+            <a:r>
+              <a:rPr sz="1600" dirty="0"/>
+              <a:t> la </a:t>
+            </a:r>
+            <a:r>
+              <a:rPr sz="1600" dirty="0" err="1"/>
+              <a:t>etapa</a:t>
+            </a:r>
+            <a:r>
+              <a:rPr sz="1600" dirty="0"/>
+              <a:t> del pipeline</a:t>
+            </a:r>
+          </a:p>
+        </p:txBody>
+      </p:sp>
+    </p:spTree>
+    <p:extLst>
+      <p:ext uri="{BB962C8B-B14F-4D97-AF65-F5344CB8AC3E}">
+        <p14:creationId xmlns:p14="http://schemas.microsoft.com/office/powerpoint/2010/main" val="4071962366"/>
+      </p:ext>
+    </p:extLst>
+  </p:cSld>
+  <p:clrMapOvr>
+    <a:masterClrMapping/>
+  </p:clrMapOvr>
+</p:sld>
+</file>
+
+<file path=ppt/slides/slide16.xml><?xml version="1.0" encoding="utf-8"?>
+<p:sld xmlns:a="http://schemas.openxmlformats.org/drawingml/2006/main" xmlns:r="http://schemas.openxmlformats.org/officeDocument/2006/relationships" xmlns:p="http://schemas.openxmlformats.org/presentationml/2006/main">
+  <p:cSld>
+    <p:spTree>
+      <p:nvGrpSpPr>
+        <p:cNvPr id="1" name=""/>
+        <p:cNvGrpSpPr/>
+        <p:nvPr/>
+      </p:nvGrpSpPr>
+      <p:grpSpPr>
+        <a:xfrm>
+          <a:off x="0" y="0"/>
+          <a:ext cx="0" cy="0"/>
+          <a:chOff x="0" y="0"/>
+          <a:chExt cx="0" cy="0"/>
+        </a:xfrm>
+      </p:grpSpPr>
+      <p:sp>
+        <p:nvSpPr>
+          <p:cNvPr id="2" name="Title 1"/>
+          <p:cNvSpPr>
+            <a:spLocks noGrp="1"/>
+          </p:cNvSpPr>
+          <p:nvPr>
+            <p:ph type="title"/>
+          </p:nvPr>
+        </p:nvSpPr>
+        <p:spPr/>
+        <p:txBody>
+          <a:bodyPr/>
+          <a:lstStyle/>
+          <a:p>
+            <a:r>
+              <a:t>Parquet vs Avro vs ORC — ¿Cuándo usar cada uno?</a:t>
+            </a:r>
+          </a:p>
+        </p:txBody>
+      </p:sp>
+      <p:sp>
+        <p:nvSpPr>
+          <p:cNvPr id="3" name="Content Placeholder 2"/>
+          <p:cNvSpPr>
+            <a:spLocks noGrp="1"/>
+          </p:cNvSpPr>
+          <p:nvPr>
+            <p:ph idx="1"/>
+          </p:nvPr>
+        </p:nvSpPr>
+        <p:spPr/>
+        <p:txBody>
+          <a:bodyPr>
+            <a:noAutofit/>
+          </a:bodyPr>
+          <a:lstStyle/>
+          <a:p>
+            <a:endParaRPr sz="1600" dirty="0"/>
+          </a:p>
+          <a:p>
+            <a:r>
+              <a:rPr sz="1600" dirty="0"/>
+              <a:t>Parquet: columnar | Lectura </a:t>
+            </a:r>
+            <a:r>
+              <a:rPr sz="1600" dirty="0" err="1"/>
+              <a:t>rápida</a:t>
+            </a:r>
+            <a:r>
+              <a:rPr sz="1600" dirty="0"/>
+              <a:t> | </a:t>
+            </a:r>
+            <a:r>
+              <a:rPr sz="1600" dirty="0" err="1"/>
+              <a:t>Compresión</a:t>
+            </a:r>
+            <a:r>
+              <a:rPr sz="1600" dirty="0"/>
+              <a:t> 70-80% | </a:t>
+            </a:r>
+            <a:r>
+              <a:rPr sz="1600" dirty="0" err="1"/>
+              <a:t>Ecosistema</a:t>
+            </a:r>
+            <a:r>
+              <a:rPr sz="1600" dirty="0"/>
+              <a:t> universal</a:t>
+            </a:r>
+            <a:r>
+              <a:rPr lang="es-419" sz="1600" dirty="0"/>
+              <a:t> </a:t>
+            </a:r>
+          </a:p>
+          <a:p>
+            <a:pPr lvl="1"/>
+            <a:r>
+              <a:rPr sz="1200" dirty="0"/>
+              <a:t>→ Analytics, data lakes, Spark, Athena, </a:t>
+            </a:r>
+            <a:r>
+              <a:rPr sz="1200" dirty="0" err="1"/>
+              <a:t>BigQuery</a:t>
+            </a:r>
+            <a:r>
+              <a:rPr sz="1200" dirty="0"/>
+              <a:t>, Snowflake</a:t>
+            </a:r>
+          </a:p>
+          <a:p>
+            <a:r>
+              <a:rPr sz="1600" dirty="0"/>
+              <a:t>ORC: columnar | </a:t>
+            </a:r>
+            <a:r>
+              <a:rPr sz="1600" dirty="0" err="1"/>
+              <a:t>Compresión</a:t>
+            </a:r>
+            <a:r>
+              <a:rPr sz="1600" dirty="0"/>
+              <a:t> </a:t>
+            </a:r>
+            <a:r>
+              <a:rPr sz="1600" dirty="0" err="1"/>
+              <a:t>agresiva</a:t>
+            </a:r>
+            <a:r>
+              <a:rPr sz="1600" dirty="0"/>
+              <a:t> | ACID </a:t>
+            </a:r>
+            <a:r>
+              <a:rPr sz="1600" dirty="0" err="1"/>
+              <a:t>nativo</a:t>
+            </a:r>
+            <a:r>
+              <a:rPr sz="1600" dirty="0"/>
+              <a:t> | </a:t>
+            </a:r>
+            <a:r>
+              <a:rPr sz="1600" dirty="0" err="1"/>
+              <a:t>Indexación</a:t>
+            </a:r>
+            <a:r>
+              <a:rPr sz="1600" dirty="0"/>
+              <a:t> </a:t>
+            </a:r>
+            <a:r>
+              <a:rPr sz="1600" dirty="0" err="1"/>
+              <a:t>avanzada</a:t>
+            </a:r>
+            <a:r>
+              <a:rPr lang="es-419" sz="1600" dirty="0"/>
+              <a:t> </a:t>
+            </a:r>
+          </a:p>
+          <a:p>
+            <a:pPr lvl="1"/>
+            <a:r>
+              <a:rPr sz="1200" dirty="0"/>
+              <a:t>→ Hadoop/Hive, batch processing, data warehousing, workloads </a:t>
+            </a:r>
+            <a:r>
+              <a:rPr sz="1200" dirty="0" err="1"/>
+              <a:t>transaccionales</a:t>
+            </a:r>
+            <a:endParaRPr sz="1200" dirty="0"/>
+          </a:p>
+          <a:p>
+            <a:r>
+              <a:rPr sz="1600" dirty="0"/>
+              <a:t>Avro: </a:t>
+            </a:r>
+            <a:r>
+              <a:rPr sz="1600" dirty="0" err="1"/>
+              <a:t>filas</a:t>
+            </a:r>
+            <a:r>
+              <a:rPr sz="1600" dirty="0"/>
+              <a:t> | Escritura </a:t>
+            </a:r>
+            <a:r>
+              <a:rPr sz="1600" dirty="0" err="1"/>
+              <a:t>rápida</a:t>
+            </a:r>
+            <a:r>
+              <a:rPr sz="1600" dirty="0"/>
+              <a:t> | Schema evolution | </a:t>
+            </a:r>
+            <a:r>
+              <a:rPr sz="1600" dirty="0" err="1"/>
+              <a:t>Binario</a:t>
+            </a:r>
+            <a:r>
+              <a:rPr sz="1600" dirty="0"/>
+              <a:t> </a:t>
+            </a:r>
+            <a:r>
+              <a:rPr sz="1600" dirty="0" err="1"/>
+              <a:t>compacto</a:t>
+            </a:r>
+            <a:r>
+              <a:rPr lang="es-419" sz="1600" dirty="0"/>
+              <a:t> </a:t>
+            </a:r>
+          </a:p>
+          <a:p>
+            <a:pPr lvl="1"/>
+            <a:r>
+              <a:rPr sz="1200" dirty="0"/>
+              <a:t>→ Streaming (Kafka), ingesta real-time, </a:t>
+            </a:r>
+            <a:r>
+              <a:rPr sz="1200" dirty="0" err="1"/>
+              <a:t>intercambio</a:t>
+            </a:r>
+            <a:r>
+              <a:rPr sz="1200" dirty="0"/>
+              <a:t> entre </a:t>
+            </a:r>
+            <a:r>
+              <a:rPr sz="1200" dirty="0" err="1"/>
+              <a:t>sistemas</a:t>
+            </a:r>
+            <a:r>
+              <a:rPr sz="1200" dirty="0"/>
+              <a:t>, RPC</a:t>
+            </a:r>
+          </a:p>
+          <a:p>
+            <a:r>
+              <a:rPr sz="1600" dirty="0" err="1"/>
+              <a:t>Rendimiento</a:t>
+            </a:r>
+            <a:r>
+              <a:rPr sz="1600" dirty="0"/>
+              <a:t> de </a:t>
+            </a:r>
+            <a:r>
+              <a:rPr sz="1600" dirty="0" err="1"/>
+              <a:t>escritura</a:t>
+            </a:r>
+            <a:r>
+              <a:rPr sz="1600" dirty="0"/>
+              <a:t>: Avro &gt; Parquet &gt; ORC</a:t>
+            </a:r>
+          </a:p>
+          <a:p>
+            <a:r>
+              <a:rPr sz="1600" dirty="0" err="1"/>
+              <a:t>Rendimiento</a:t>
+            </a:r>
+            <a:r>
+              <a:rPr sz="1600" dirty="0"/>
+              <a:t> de </a:t>
+            </a:r>
+            <a:r>
+              <a:rPr sz="1600" dirty="0" err="1"/>
+              <a:t>lectura</a:t>
+            </a:r>
+            <a:r>
+              <a:rPr sz="1600" dirty="0"/>
+              <a:t> </a:t>
+            </a:r>
+            <a:r>
+              <a:rPr sz="1600" dirty="0" err="1"/>
+              <a:t>analítica</a:t>
+            </a:r>
+            <a:r>
+              <a:rPr sz="1600" dirty="0"/>
+              <a:t>: Parquet ≈ ORC &gt;&gt; Avro</a:t>
+            </a:r>
+          </a:p>
+          <a:p>
+            <a:r>
+              <a:rPr sz="1600" dirty="0" err="1"/>
+              <a:t>Compresión</a:t>
+            </a:r>
+            <a:r>
+              <a:rPr sz="1600" dirty="0"/>
+              <a:t>: ORC ≥ Parquet &gt;&gt; Avro</a:t>
+            </a:r>
+          </a:p>
+          <a:p>
+            <a:r>
+              <a:rPr sz="1600" dirty="0" err="1"/>
+              <a:t>Compatibilidad</a:t>
+            </a:r>
+            <a:r>
+              <a:rPr sz="1600" dirty="0"/>
+              <a:t> cloud: Parquet &gt;&gt; ORC &gt; Avro</a:t>
+            </a:r>
+          </a:p>
+          <a:p>
+            <a:r>
+              <a:rPr sz="1600" dirty="0"/>
+              <a:t>En la </a:t>
+            </a:r>
+            <a:r>
+              <a:rPr sz="1600" dirty="0" err="1"/>
+              <a:t>práctica</a:t>
+            </a:r>
+            <a:r>
+              <a:rPr sz="1600" dirty="0"/>
+              <a:t> se </a:t>
+            </a:r>
+            <a:r>
+              <a:rPr sz="1600" dirty="0" err="1"/>
+              <a:t>combinan</a:t>
+            </a:r>
+            <a:r>
+              <a:rPr sz="1600" dirty="0"/>
+              <a:t>: Avro para ingesta → Parquet/ORC para </a:t>
+            </a:r>
+            <a:r>
+              <a:rPr sz="1600" dirty="0" err="1"/>
+              <a:t>análisis</a:t>
+            </a:r>
+            <a:endParaRPr sz="1600" dirty="0"/>
+          </a:p>
+          <a:p>
+            <a:r>
+              <a:rPr sz="1600" dirty="0"/>
+              <a:t>Regla general: </a:t>
+            </a:r>
+            <a:r>
+              <a:rPr sz="1600" dirty="0" err="1"/>
+              <a:t>si</a:t>
+            </a:r>
+            <a:r>
+              <a:rPr sz="1600" dirty="0"/>
+              <a:t> </a:t>
+            </a:r>
+            <a:r>
+              <a:rPr sz="1600" dirty="0" err="1"/>
+              <a:t>dudas</a:t>
+            </a:r>
+            <a:r>
+              <a:rPr sz="1600" dirty="0"/>
+              <a:t>, </a:t>
+            </a:r>
+            <a:r>
+              <a:rPr sz="1600" dirty="0" err="1"/>
+              <a:t>usa</a:t>
+            </a:r>
+            <a:r>
+              <a:rPr sz="1600" dirty="0"/>
+              <a:t> Parquet — es </a:t>
+            </a:r>
+            <a:r>
+              <a:rPr sz="1600" dirty="0" err="1"/>
+              <a:t>el</a:t>
+            </a:r>
+            <a:r>
+              <a:rPr sz="1600" dirty="0"/>
+              <a:t> </a:t>
+            </a:r>
+            <a:r>
+              <a:rPr sz="1600" dirty="0" err="1"/>
+              <a:t>más</a:t>
+            </a:r>
+            <a:r>
+              <a:rPr sz="1600" dirty="0"/>
+              <a:t> </a:t>
+            </a:r>
+            <a:r>
+              <a:rPr sz="1600" dirty="0" err="1"/>
+              <a:t>versátil</a:t>
+            </a:r>
+            <a:r>
+              <a:rPr sz="1600" dirty="0"/>
+              <a:t> y </a:t>
+            </a:r>
+            <a:r>
+              <a:rPr sz="1600" dirty="0" err="1"/>
+              <a:t>adoptado</a:t>
+            </a:r>
+            <a:endParaRPr sz="1600" dirty="0"/>
+          </a:p>
+          <a:p>
+            <a:r>
+              <a:rPr sz="1600" dirty="0"/>
+              <a:t>Los </a:t>
+            </a:r>
+            <a:r>
+              <a:rPr sz="1600" dirty="0" err="1"/>
+              <a:t>tres</a:t>
+            </a:r>
+            <a:r>
+              <a:rPr sz="1600" dirty="0"/>
+              <a:t> son open source, </a:t>
+            </a:r>
+            <a:r>
+              <a:rPr sz="1600" dirty="0" err="1"/>
+              <a:t>autodescriptivos</a:t>
+            </a:r>
+            <a:r>
+              <a:rPr sz="1600" dirty="0"/>
+              <a:t> y </a:t>
+            </a:r>
+            <a:r>
+              <a:rPr sz="1600" dirty="0" err="1"/>
+              <a:t>soportan</a:t>
+            </a:r>
+            <a:r>
+              <a:rPr sz="1600" dirty="0"/>
+              <a:t> schema evolution</a:t>
+            </a:r>
+          </a:p>
+        </p:txBody>
+      </p:sp>
+    </p:spTree>
+    <p:extLst>
+      <p:ext uri="{BB962C8B-B14F-4D97-AF65-F5344CB8AC3E}">
+        <p14:creationId xmlns:p14="http://schemas.microsoft.com/office/powerpoint/2010/main" val="3366161191"/>
+      </p:ext>
+    </p:extLst>
+  </p:cSld>
+  <p:clrMapOvr>
+    <a:masterClrMapping/>
+  </p:clrMapOvr>
+</p:sld>
+</file>
+
+<file path=ppt/slides/slide17.xml><?xml version="1.0" encoding="utf-8"?>
+<p:sld xmlns:a="http://schemas.openxmlformats.org/drawingml/2006/main" xmlns:r="http://schemas.openxmlformats.org/officeDocument/2006/relationships" xmlns:p="http://schemas.openxmlformats.org/presentationml/2006/main">
+  <p:cSld>
+    <p:spTree>
+      <p:nvGrpSpPr>
+        <p:cNvPr id="1" name=""/>
+        <p:cNvGrpSpPr/>
+        <p:nvPr/>
+      </p:nvGrpSpPr>
+      <p:grpSpPr>
+        <a:xfrm>
+          <a:off x="0" y="0"/>
+          <a:ext cx="0" cy="0"/>
+          <a:chOff x="0" y="0"/>
+          <a:chExt cx="0" cy="0"/>
+        </a:xfrm>
+      </p:grpSpPr>
+      <p:sp>
+        <p:nvSpPr>
+          <p:cNvPr id="2" name="Title 1"/>
+          <p:cNvSpPr>
+            <a:spLocks noGrp="1"/>
+          </p:cNvSpPr>
+          <p:nvPr>
+            <p:ph type="title"/>
+          </p:nvPr>
+        </p:nvSpPr>
+        <p:spPr/>
+        <p:txBody>
+          <a:bodyPr/>
+          <a:lstStyle/>
+          <a:p>
+            <a:r>
+              <a:t>03 — Data Swamp</a:t>
+            </a:r>
+          </a:p>
+        </p:txBody>
+      </p:sp>
+      <p:sp>
+        <p:nvSpPr>
+          <p:cNvPr id="3" name="Text Placeholder 2"/>
+          <p:cNvSpPr>
+            <a:spLocks noGrp="1"/>
+          </p:cNvSpPr>
+          <p:nvPr>
+            <p:ph type="body" idx="1"/>
+          </p:nvPr>
+        </p:nvSpPr>
+        <p:spPr/>
+        <p:txBody>
+          <a:bodyPr/>
+          <a:lstStyle/>
+          <a:p>
+            <a:r>
+              <a:t>Cuando el Data Lake se convierte en un pantano</a:t>
+            </a:r>
+          </a:p>
+        </p:txBody>
+      </p:sp>
+    </p:spTree>
+  </p:cSld>
+  <p:clrMapOvr>
+    <a:masterClrMapping/>
+  </p:clrMapOvr>
+</p:sld>
+</file>
+
+<file path=ppt/slides/slide18.xml><?xml version="1.0" encoding="utf-8"?>
+<p:sld xmlns:a="http://schemas.openxmlformats.org/drawingml/2006/main" xmlns:r="http://schemas.openxmlformats.org/officeDocument/2006/relationships" xmlns:p="http://schemas.openxmlformats.org/presentationml/2006/main">
+  <p:cSld>
+    <p:spTree>
+      <p:nvGrpSpPr>
+        <p:cNvPr id="1" name=""/>
+        <p:cNvGrpSpPr/>
+        <p:nvPr/>
+      </p:nvGrpSpPr>
+      <p:grpSpPr>
+        <a:xfrm>
+          <a:off x="0" y="0"/>
+          <a:ext cx="0" cy="0"/>
+          <a:chOff x="0" y="0"/>
+          <a:chExt cx="0" cy="0"/>
+        </a:xfrm>
+      </p:grpSpPr>
       <p:sp>
         <p:nvSpPr>
           <p:cNvPr id="2" name="Title 1"/>
@@ -8294,8 +11080,8 @@
 </p:sld>
 </file>
 
-<file path=ppt/slides/slide11.xml><?xml version="1.0" encoding="utf-8"?>
-<p:sld xmlns:a="http://schemas.openxmlformats.org/drawingml/2006/main" xmlns:p="http://schemas.openxmlformats.org/presentationml/2006/main" xmlns:r="http://schemas.openxmlformats.org/officeDocument/2006/relationships">
+<file path=ppt/slides/slide19.xml><?xml version="1.0" encoding="utf-8"?>
+<p:sld xmlns:a="http://schemas.openxmlformats.org/drawingml/2006/main" xmlns:r="http://schemas.openxmlformats.org/officeDocument/2006/relationships" xmlns:p="http://schemas.openxmlformats.org/presentationml/2006/main">
   <p:cSld>
     <p:spTree>
       <p:nvGrpSpPr>
@@ -8303,7 +11089,14 @@
         <p:cNvGrpSpPr/>
         <p:nvPr/>
       </p:nvGrpSpPr>
-      <p:grpSpPr/>
+      <p:grpSpPr>
+        <a:xfrm>
+          <a:off x="0" y="0"/>
+          <a:ext cx="0" cy="0"/>
+          <a:chOff x="0" y="0"/>
+          <a:chExt cx="0" cy="0"/>
+        </a:xfrm>
+      </p:grpSpPr>
       <p:sp>
         <p:nvSpPr>
           <p:cNvPr id="2" name="Title 1"/>
@@ -8405,8 +11198,8 @@
 </p:sld>
 </file>
 
-<file path=ppt/slides/slide12.xml><?xml version="1.0" encoding="utf-8"?>
-<p:sld xmlns:a="http://schemas.openxmlformats.org/drawingml/2006/main" xmlns:p="http://schemas.openxmlformats.org/presentationml/2006/main" xmlns:r="http://schemas.openxmlformats.org/officeDocument/2006/relationships">
+<file path=ppt/slides/slide2.xml><?xml version="1.0" encoding="utf-8"?>
+<p:sld xmlns:a="http://schemas.openxmlformats.org/drawingml/2006/main" xmlns:r="http://schemas.openxmlformats.org/officeDocument/2006/relationships" xmlns:p="http://schemas.openxmlformats.org/presentationml/2006/main">
   <p:cSld>
     <p:spTree>
       <p:nvGrpSpPr>
@@ -8414,7 +11207,132 @@
         <p:cNvGrpSpPr/>
         <p:nvPr/>
       </p:nvGrpSpPr>
-      <p:grpSpPr/>
+      <p:grpSpPr>
+        <a:xfrm>
+          <a:off x="0" y="0"/>
+          <a:ext cx="0" cy="0"/>
+          <a:chOff x="0" y="0"/>
+          <a:chExt cx="0" cy="0"/>
+        </a:xfrm>
+      </p:grpSpPr>
+      <p:sp>
+        <p:nvSpPr>
+          <p:cNvPr id="2" name="Title 1"/>
+          <p:cNvSpPr>
+            <a:spLocks noGrp="1"/>
+          </p:cNvSpPr>
+          <p:nvPr>
+            <p:ph type="title"/>
+          </p:nvPr>
+        </p:nvSpPr>
+        <p:spPr/>
+        <p:txBody>
+          <a:bodyPr/>
+          <a:lstStyle/>
+          <a:p>
+            <a:r>
+              <a:t>Agenda</a:t>
+            </a:r>
+          </a:p>
+        </p:txBody>
+      </p:sp>
+      <p:sp>
+        <p:nvSpPr>
+          <p:cNvPr id="3" name="Content Placeholder 2"/>
+          <p:cNvSpPr>
+            <a:spLocks noGrp="1"/>
+          </p:cNvSpPr>
+          <p:nvPr>
+            <p:ph idx="1"/>
+          </p:nvPr>
+        </p:nvSpPr>
+        <p:spPr/>
+        <p:txBody>
+          <a:bodyPr/>
+          <a:lstStyle/>
+          <a:p>
+            <a:pPr>
+              <a:defRPr sz="1600"/>
+            </a:pPr>
+            <a:r>
+              <a:t>1. Data Warehouses: el punto de partida</a:t>
+            </a:r>
+          </a:p>
+          <a:p>
+            <a:pPr>
+              <a:defRPr sz="1600"/>
+            </a:pPr>
+            <a:r>
+              <a:t>2. Data Lakes: la promesa del almacenamiento masivo</a:t>
+            </a:r>
+          </a:p>
+          <a:p>
+            <a:pPr>
+              <a:defRPr sz="1600"/>
+            </a:pPr>
+            <a:r>
+              <a:t>3. Problemas del Data Lake: el Data Swamp</a:t>
+            </a:r>
+          </a:p>
+          <a:p>
+            <a:pPr>
+              <a:defRPr sz="1600"/>
+            </a:pPr>
+            <a:r>
+              <a:t>4. Data Lakehouse: lo mejor de ambos mundos</a:t>
+            </a:r>
+          </a:p>
+          <a:p>
+            <a:pPr>
+              <a:defRPr sz="1600"/>
+            </a:pPr>
+            <a:r>
+              <a:t>5. Arquitectura Medallion (Bronze, Silver, Gold)</a:t>
+            </a:r>
+          </a:p>
+          <a:p>
+            <a:pPr>
+              <a:defRPr sz="1600"/>
+            </a:pPr>
+            <a:r>
+              <a:t>6. Catálogo y gobierno de datos (Unity Catalog)</a:t>
+            </a:r>
+          </a:p>
+          <a:p>
+            <a:pPr>
+              <a:defRPr sz="1600"/>
+            </a:pPr>
+            <a:r>
+              <a:t>7. Tecnologías, herramientas y evolución histórica</a:t>
+            </a:r>
+          </a:p>
+        </p:txBody>
+      </p:sp>
+    </p:spTree>
+  </p:cSld>
+  <p:clrMapOvr>
+    <a:masterClrMapping/>
+  </p:clrMapOvr>
+</p:sld>
+</file>
+
+<file path=ppt/slides/slide20.xml><?xml version="1.0" encoding="utf-8"?>
+<p:sld xmlns:a="http://schemas.openxmlformats.org/drawingml/2006/main" xmlns:r="http://schemas.openxmlformats.org/officeDocument/2006/relationships" xmlns:p="http://schemas.openxmlformats.org/presentationml/2006/main">
+  <p:cSld>
+    <p:spTree>
+      <p:nvGrpSpPr>
+        <p:cNvPr id="1" name=""/>
+        <p:cNvGrpSpPr/>
+        <p:nvPr/>
+      </p:nvGrpSpPr>
+      <p:grpSpPr>
+        <a:xfrm>
+          <a:off x="0" y="0"/>
+          <a:ext cx="0" cy="0"/>
+          <a:chOff x="0" y="0"/>
+          <a:chExt cx="0" cy="0"/>
+        </a:xfrm>
+      </p:grpSpPr>
       <p:sp>
         <p:nvSpPr>
           <p:cNvPr id="2" name="Title 1"/>
@@ -8465,8 +11383,8 @@
 </p:sld>
 </file>
 
-<file path=ppt/slides/slide13.xml><?xml version="1.0" encoding="utf-8"?>
-<p:sld xmlns:a="http://schemas.openxmlformats.org/drawingml/2006/main" xmlns:p="http://schemas.openxmlformats.org/presentationml/2006/main" xmlns:r="http://schemas.openxmlformats.org/officeDocument/2006/relationships">
+<file path=ppt/slides/slide21.xml><?xml version="1.0" encoding="utf-8"?>
+<p:sld xmlns:a="http://schemas.openxmlformats.org/drawingml/2006/main" xmlns:r="http://schemas.openxmlformats.org/officeDocument/2006/relationships" xmlns:p="http://schemas.openxmlformats.org/presentationml/2006/main">
   <p:cSld>
     <p:spTree>
       <p:nvGrpSpPr>
@@ -8474,7 +11392,14 @@
         <p:cNvGrpSpPr/>
         <p:nvPr/>
       </p:nvGrpSpPr>
-      <p:grpSpPr/>
+      <p:grpSpPr>
+        <a:xfrm>
+          <a:off x="0" y="0"/>
+          <a:ext cx="0" cy="0"/>
+          <a:chOff x="0" y="0"/>
+          <a:chExt cx="0" cy="0"/>
+        </a:xfrm>
+      </p:grpSpPr>
       <p:sp>
         <p:nvSpPr>
           <p:cNvPr id="2" name="Title 1"/>
@@ -8592,8 +11517,8 @@
 </p:sld>
 </file>
 
-<file path=ppt/slides/slide14.xml><?xml version="1.0" encoding="utf-8"?>
-<p:sld xmlns:a="http://schemas.openxmlformats.org/drawingml/2006/main" xmlns:p="http://schemas.openxmlformats.org/presentationml/2006/main" xmlns:r="http://schemas.openxmlformats.org/officeDocument/2006/relationships">
+<file path=ppt/slides/slide22.xml><?xml version="1.0" encoding="utf-8"?>
+<p:sld xmlns:a="http://schemas.openxmlformats.org/drawingml/2006/main" xmlns:r="http://schemas.openxmlformats.org/officeDocument/2006/relationships" xmlns:p="http://schemas.openxmlformats.org/presentationml/2006/main">
   <p:cSld>
     <p:spTree>
       <p:nvGrpSpPr>
@@ -8601,7 +11526,14 @@
         <p:cNvGrpSpPr/>
         <p:nvPr/>
       </p:nvGrpSpPr>
-      <p:grpSpPr/>
+      <p:grpSpPr>
+        <a:xfrm>
+          <a:off x="0" y="0"/>
+          <a:ext cx="0" cy="0"/>
+          <a:chOff x="0" y="0"/>
+          <a:chExt cx="0" cy="0"/>
+        </a:xfrm>
+      </p:grpSpPr>
       <p:sp>
         <p:nvSpPr>
           <p:cNvPr id="2" name="Title 1"/>
@@ -8711,8 +11643,8 @@
 </p:sld>
 </file>
 
-<file path=ppt/slides/slide15.xml><?xml version="1.0" encoding="utf-8"?>
-<p:sld xmlns:a="http://schemas.openxmlformats.org/drawingml/2006/main" xmlns:p="http://schemas.openxmlformats.org/presentationml/2006/main" xmlns:r="http://schemas.openxmlformats.org/officeDocument/2006/relationships">
+<file path=ppt/slides/slide23.xml><?xml version="1.0" encoding="utf-8"?>
+<p:sld xmlns:a="http://schemas.openxmlformats.org/drawingml/2006/main" xmlns:r="http://schemas.openxmlformats.org/officeDocument/2006/relationships" xmlns:p="http://schemas.openxmlformats.org/presentationml/2006/main">
   <p:cSld>
     <p:spTree>
       <p:nvGrpSpPr>
@@ -8720,7 +11652,14 @@
         <p:cNvGrpSpPr/>
         <p:nvPr/>
       </p:nvGrpSpPr>
-      <p:grpSpPr/>
+      <p:grpSpPr>
+        <a:xfrm>
+          <a:off x="0" y="0"/>
+          <a:ext cx="0" cy="0"/>
+          <a:chOff x="0" y="0"/>
+          <a:chExt cx="0" cy="0"/>
+        </a:xfrm>
+      </p:grpSpPr>
       <p:sp>
         <p:nvSpPr>
           <p:cNvPr id="2" name="Title 1"/>
@@ -8846,8 +11785,8 @@
 </p:sld>
 </file>
 
-<file path=ppt/slides/slide16.xml><?xml version="1.0" encoding="utf-8"?>
-<p:sld xmlns:a="http://schemas.openxmlformats.org/drawingml/2006/main" xmlns:p="http://schemas.openxmlformats.org/presentationml/2006/main" xmlns:r="http://schemas.openxmlformats.org/officeDocument/2006/relationships">
+<file path=ppt/slides/slide24.xml><?xml version="1.0" encoding="utf-8"?>
+<p:sld xmlns:a="http://schemas.openxmlformats.org/drawingml/2006/main" xmlns:r="http://schemas.openxmlformats.org/officeDocument/2006/relationships" xmlns:p="http://schemas.openxmlformats.org/presentationml/2006/main">
   <p:cSld>
     <p:spTree>
       <p:nvGrpSpPr>
@@ -8855,7 +11794,1656 @@
         <p:cNvGrpSpPr/>
         <p:nvPr/>
       </p:nvGrpSpPr>
-      <p:grpSpPr/>
+      <p:grpSpPr>
+        <a:xfrm>
+          <a:off x="0" y="0"/>
+          <a:ext cx="0" cy="0"/>
+          <a:chOff x="0" y="0"/>
+          <a:chExt cx="0" cy="0"/>
+        </a:xfrm>
+      </p:grpSpPr>
+      <p:sp>
+        <p:nvSpPr>
+          <p:cNvPr id="2" name="Title 1"/>
+          <p:cNvSpPr>
+            <a:spLocks noGrp="1"/>
+          </p:cNvSpPr>
+          <p:nvPr>
+            <p:ph type="title"/>
+          </p:nvPr>
+        </p:nvSpPr>
+        <p:spPr/>
+        <p:txBody>
+          <a:bodyPr/>
+          <a:lstStyle/>
+          <a:p>
+            <a:r>
+              <a:t>Delta Lake vs Iceberg — Comparativo</a:t>
+            </a:r>
+          </a:p>
+        </p:txBody>
+      </p:sp>
+      <p:sp>
+        <p:nvSpPr>
+          <p:cNvPr id="3" name="Content Placeholder 2"/>
+          <p:cNvSpPr>
+            <a:spLocks noGrp="1"/>
+          </p:cNvSpPr>
+          <p:nvPr>
+            <p:ph idx="1"/>
+          </p:nvPr>
+        </p:nvSpPr>
+        <p:spPr/>
+        <p:txBody>
+          <a:bodyPr>
+            <a:noAutofit/>
+          </a:bodyPr>
+          <a:lstStyle/>
+          <a:p>
+            <a:pPr marL="0" indent="0">
+              <a:buNone/>
+            </a:pPr>
+            <a:r>
+              <a:rPr sz="1600" dirty="0" err="1"/>
+              <a:t>Filosofía</a:t>
+            </a:r>
+            <a:r>
+              <a:rPr sz="1600" dirty="0"/>
+              <a:t> de </a:t>
+            </a:r>
+            <a:r>
+              <a:rPr sz="1600" dirty="0" err="1"/>
+              <a:t>diseño</a:t>
+            </a:r>
+            <a:r>
+              <a:rPr sz="1600" dirty="0"/>
+              <a:t>:</a:t>
+            </a:r>
+          </a:p>
+          <a:p>
+            <a:r>
+              <a:rPr sz="1600" dirty="0"/>
+              <a:t>Delta Lake → Spark-native, transaction log simple (JSON </a:t>
+            </a:r>
+            <a:r>
+              <a:rPr sz="1600" dirty="0" err="1"/>
+              <a:t>sobre</a:t>
+            </a:r>
+            <a:r>
+              <a:rPr sz="1600" dirty="0"/>
+              <a:t> Parquet)</a:t>
+            </a:r>
+          </a:p>
+          <a:p>
+            <a:r>
+              <a:rPr sz="1600" dirty="0"/>
+              <a:t>Iceberg → Spec-first, </a:t>
+            </a:r>
+            <a:r>
+              <a:rPr sz="1600" dirty="0" err="1"/>
+              <a:t>cualquier</a:t>
+            </a:r>
+            <a:r>
+              <a:rPr sz="1600" dirty="0"/>
+              <a:t> motor </a:t>
+            </a:r>
+            <a:r>
+              <a:rPr sz="1600" dirty="0" err="1"/>
+              <a:t>puede</a:t>
+            </a:r>
+            <a:r>
+              <a:rPr sz="1600" dirty="0"/>
+              <a:t> </a:t>
+            </a:r>
+            <a:r>
+              <a:rPr sz="1600" dirty="0" err="1"/>
+              <a:t>implementarlo</a:t>
+            </a:r>
+            <a:r>
+              <a:rPr sz="1600" dirty="0"/>
+              <a:t> (metadata </a:t>
+            </a:r>
+            <a:r>
+              <a:rPr sz="1600" dirty="0" err="1"/>
+              <a:t>jerárquica</a:t>
+            </a:r>
+            <a:r>
+              <a:rPr sz="1600" dirty="0"/>
+              <a:t>)</a:t>
+            </a:r>
+          </a:p>
+          <a:p>
+            <a:endParaRPr sz="1600" dirty="0"/>
+          </a:p>
+          <a:p>
+            <a:pPr marL="0" indent="0">
+              <a:buNone/>
+            </a:pPr>
+            <a:r>
+              <a:rPr sz="1600" dirty="0" err="1"/>
+              <a:t>Interoperabilidad</a:t>
+            </a:r>
+            <a:r>
+              <a:rPr sz="1600" dirty="0"/>
+              <a:t>:</a:t>
+            </a:r>
+          </a:p>
+          <a:p>
+            <a:r>
+              <a:rPr sz="1600" dirty="0"/>
+              <a:t>Delta Lake → Fuerte </a:t>
+            </a:r>
+            <a:r>
+              <a:rPr sz="1600" dirty="0" err="1"/>
+              <a:t>en</a:t>
+            </a:r>
+            <a:r>
+              <a:rPr sz="1600" dirty="0"/>
+              <a:t> Spark/Databricks, </a:t>
+            </a:r>
+            <a:r>
+              <a:rPr sz="1600" dirty="0" err="1"/>
+              <a:t>limitado</a:t>
+            </a:r>
+            <a:r>
+              <a:rPr sz="1600" dirty="0"/>
+              <a:t> fuera (</a:t>
+            </a:r>
+            <a:r>
+              <a:rPr sz="1600" dirty="0" err="1"/>
+              <a:t>necesita</a:t>
+            </a:r>
+            <a:r>
+              <a:rPr sz="1600" dirty="0"/>
+              <a:t> </a:t>
+            </a:r>
+            <a:r>
+              <a:rPr sz="1600" dirty="0" err="1"/>
+              <a:t>UniForm</a:t>
+            </a:r>
+            <a:r>
+              <a:rPr sz="1600" dirty="0"/>
+              <a:t>)</a:t>
+            </a:r>
+          </a:p>
+          <a:p>
+            <a:r>
+              <a:rPr sz="1600" dirty="0"/>
+              <a:t>Iceberg → Nativo </a:t>
+            </a:r>
+            <a:r>
+              <a:rPr sz="1600" dirty="0" err="1"/>
+              <a:t>en</a:t>
+            </a:r>
+            <a:r>
+              <a:rPr sz="1600" dirty="0"/>
+              <a:t> Spark, Flink, Trino, Snowflake, </a:t>
+            </a:r>
+            <a:r>
+              <a:rPr sz="1600" dirty="0" err="1"/>
+              <a:t>ClickHouse</a:t>
+            </a:r>
+            <a:r>
+              <a:rPr sz="1600" dirty="0"/>
+              <a:t>, </a:t>
+            </a:r>
+            <a:r>
+              <a:rPr sz="1600" dirty="0" err="1"/>
+              <a:t>DuckDB</a:t>
+            </a:r>
+            <a:r>
+              <a:rPr sz="1600" dirty="0"/>
+              <a:t>, Presto</a:t>
+            </a:r>
+          </a:p>
+          <a:p>
+            <a:endParaRPr sz="1600" dirty="0"/>
+          </a:p>
+          <a:p>
+            <a:pPr marL="0" indent="0">
+              <a:buNone/>
+            </a:pPr>
+            <a:r>
+              <a:rPr sz="1600" dirty="0" err="1"/>
+              <a:t>Particionamiento</a:t>
+            </a:r>
+            <a:r>
+              <a:rPr sz="1600" dirty="0"/>
+              <a:t>:</a:t>
+            </a:r>
+          </a:p>
+          <a:p>
+            <a:r>
+              <a:rPr sz="1600" dirty="0"/>
+              <a:t>Delta Lake → Liquid Clustering (2024+), </a:t>
+            </a:r>
+            <a:r>
+              <a:rPr sz="1600" dirty="0" err="1"/>
+              <a:t>requiere</a:t>
+            </a:r>
+            <a:r>
+              <a:rPr sz="1600" dirty="0"/>
+              <a:t> </a:t>
+            </a:r>
+            <a:r>
+              <a:rPr sz="1600" dirty="0" err="1"/>
+              <a:t>declarar</a:t>
+            </a:r>
+            <a:r>
+              <a:rPr sz="1600" dirty="0"/>
+              <a:t> </a:t>
+            </a:r>
+            <a:r>
+              <a:rPr sz="1600" dirty="0" err="1"/>
+              <a:t>particiones</a:t>
+            </a:r>
+            <a:endParaRPr sz="1600" dirty="0"/>
+          </a:p>
+          <a:p>
+            <a:r>
+              <a:rPr sz="1600" dirty="0"/>
+              <a:t>Iceberg → Hidden partitioning — </a:t>
+            </a:r>
+            <a:r>
+              <a:rPr sz="1600" dirty="0" err="1"/>
+              <a:t>el</a:t>
+            </a:r>
+            <a:r>
+              <a:rPr sz="1600" dirty="0"/>
+              <a:t> </a:t>
+            </a:r>
+            <a:r>
+              <a:rPr sz="1600" dirty="0" err="1"/>
+              <a:t>usuario</a:t>
+            </a:r>
+            <a:r>
+              <a:rPr sz="1600" dirty="0"/>
+              <a:t> NO </a:t>
+            </a:r>
+            <a:r>
+              <a:rPr sz="1600" dirty="0" err="1"/>
+              <a:t>declara</a:t>
+            </a:r>
+            <a:r>
+              <a:rPr sz="1600" dirty="0"/>
+              <a:t> </a:t>
+            </a:r>
+            <a:r>
+              <a:rPr sz="1600" dirty="0" err="1"/>
+              <a:t>particiones</a:t>
+            </a:r>
+            <a:r>
+              <a:rPr sz="1600" dirty="0"/>
+              <a:t>, </a:t>
+            </a:r>
+            <a:r>
+              <a:rPr sz="1600" dirty="0" err="1"/>
+              <a:t>evolución</a:t>
+            </a:r>
+            <a:r>
+              <a:rPr sz="1600" dirty="0"/>
+              <a:t> sin </a:t>
+            </a:r>
+            <a:r>
+              <a:rPr sz="1600" dirty="0" err="1"/>
+              <a:t>reescribir</a:t>
+            </a:r>
+            <a:endParaRPr sz="1600" dirty="0"/>
+          </a:p>
+          <a:p>
+            <a:endParaRPr sz="1600" dirty="0"/>
+          </a:p>
+          <a:p>
+            <a:pPr marL="0" indent="0">
+              <a:buNone/>
+            </a:pPr>
+            <a:r>
+              <a:rPr sz="1600" dirty="0"/>
+              <a:t>Schema evolution:</a:t>
+            </a:r>
+          </a:p>
+          <a:p>
+            <a:r>
+              <a:rPr sz="1600" dirty="0"/>
+              <a:t>Delta Lake → </a:t>
+            </a:r>
+            <a:r>
+              <a:rPr sz="1600" dirty="0" err="1"/>
+              <a:t>Soporta</a:t>
+            </a:r>
+            <a:r>
+              <a:rPr sz="1600" dirty="0"/>
+              <a:t> </a:t>
+            </a:r>
+            <a:r>
+              <a:rPr sz="1600" dirty="0" err="1"/>
+              <a:t>agregar</a:t>
+            </a:r>
+            <a:r>
+              <a:rPr sz="1600" dirty="0"/>
+              <a:t>/</a:t>
+            </a:r>
+            <a:r>
+              <a:rPr sz="1600" dirty="0" err="1"/>
+              <a:t>renombrar</a:t>
+            </a:r>
+            <a:r>
+              <a:rPr sz="1600" dirty="0"/>
+              <a:t> columnas, </a:t>
+            </a:r>
+            <a:r>
+              <a:rPr sz="1600" dirty="0" err="1"/>
+              <a:t>limitado</a:t>
+            </a:r>
+            <a:r>
+              <a:rPr sz="1600" dirty="0"/>
+              <a:t> </a:t>
+            </a:r>
+            <a:r>
+              <a:rPr sz="1600" dirty="0" err="1"/>
+              <a:t>en</a:t>
+            </a:r>
+            <a:r>
+              <a:rPr sz="1600" dirty="0"/>
+              <a:t> </a:t>
+            </a:r>
+            <a:r>
+              <a:rPr sz="1600" dirty="0" err="1"/>
+              <a:t>cambios</a:t>
+            </a:r>
+            <a:r>
+              <a:rPr sz="1600" dirty="0"/>
+              <a:t> de </a:t>
+            </a:r>
+            <a:r>
+              <a:rPr sz="1600" dirty="0" err="1"/>
+              <a:t>tipo</a:t>
+            </a:r>
+            <a:endParaRPr sz="1600" dirty="0"/>
+          </a:p>
+          <a:p>
+            <a:r>
+              <a:rPr sz="1600" dirty="0"/>
+              <a:t>Iceberg → Type-safe, </a:t>
+            </a:r>
+            <a:r>
+              <a:rPr sz="1600" dirty="0" err="1"/>
+              <a:t>cambios</a:t>
+            </a:r>
+            <a:r>
+              <a:rPr sz="1600" dirty="0"/>
+              <a:t> de </a:t>
+            </a:r>
+            <a:r>
+              <a:rPr sz="1600" dirty="0" err="1"/>
+              <a:t>tipo</a:t>
+            </a:r>
+            <a:r>
+              <a:rPr sz="1600" dirty="0"/>
+              <a:t> de </a:t>
+            </a:r>
+            <a:r>
+              <a:rPr sz="1600" dirty="0" err="1"/>
+              <a:t>dato</a:t>
+            </a:r>
+            <a:r>
+              <a:rPr sz="1600" dirty="0"/>
+              <a:t> sin </a:t>
+            </a:r>
+            <a:r>
+              <a:rPr sz="1600" dirty="0" err="1"/>
+              <a:t>reescribir</a:t>
+            </a:r>
+            <a:r>
+              <a:rPr sz="1600" dirty="0"/>
+              <a:t> </a:t>
+            </a:r>
+            <a:r>
+              <a:rPr sz="1600" dirty="0" err="1"/>
+              <a:t>datos</a:t>
+            </a:r>
+            <a:endParaRPr sz="1600" dirty="0"/>
+          </a:p>
+          <a:p>
+            <a:endParaRPr sz="1600" dirty="0"/>
+          </a:p>
+          <a:p>
+            <a:r>
+              <a:rPr sz="1600" dirty="0"/>
+              <a:t>Performance </a:t>
+            </a:r>
+            <a:r>
+              <a:rPr sz="1600" dirty="0" err="1"/>
+              <a:t>en</a:t>
+            </a:r>
+            <a:r>
+              <a:rPr sz="1600" dirty="0"/>
+              <a:t> Spark:</a:t>
+            </a:r>
+          </a:p>
+          <a:p>
+            <a:r>
+              <a:rPr sz="1600" dirty="0"/>
+              <a:t>Delta Lake → 20-40% </a:t>
+            </a:r>
+            <a:r>
+              <a:rPr sz="1600" dirty="0" err="1"/>
+              <a:t>más</a:t>
+            </a:r>
+            <a:r>
+              <a:rPr sz="1600" dirty="0"/>
+              <a:t> </a:t>
+            </a:r>
+            <a:r>
+              <a:rPr sz="1600" dirty="0" err="1"/>
+              <a:t>rápido</a:t>
+            </a:r>
+            <a:r>
+              <a:rPr sz="1600" dirty="0"/>
+              <a:t> </a:t>
+            </a:r>
+            <a:r>
+              <a:rPr sz="1600" dirty="0" err="1"/>
+              <a:t>en</a:t>
+            </a:r>
+            <a:r>
+              <a:rPr sz="1600" dirty="0"/>
+              <a:t> Databricks (</a:t>
+            </a:r>
+            <a:r>
+              <a:rPr sz="1600" dirty="0" err="1"/>
+              <a:t>optimizaciones</a:t>
+            </a:r>
+            <a:r>
+              <a:rPr sz="1600" dirty="0"/>
+              <a:t> Photon)</a:t>
+            </a:r>
+          </a:p>
+          <a:p>
+            <a:r>
+              <a:rPr sz="1600" dirty="0"/>
+              <a:t>Iceberg → Comparable fuera de Databricks, </a:t>
+            </a:r>
+            <a:r>
+              <a:rPr sz="1600" dirty="0" err="1"/>
+              <a:t>mejor</a:t>
+            </a:r>
+            <a:r>
+              <a:rPr sz="1600" dirty="0"/>
+              <a:t> </a:t>
+            </a:r>
+            <a:r>
+              <a:rPr sz="1600" dirty="0" err="1"/>
+              <a:t>en</a:t>
+            </a:r>
+            <a:r>
+              <a:rPr sz="1600" dirty="0"/>
+              <a:t> </a:t>
+            </a:r>
+            <a:r>
+              <a:rPr sz="1600" dirty="0" err="1"/>
+              <a:t>escenarios</a:t>
+            </a:r>
+            <a:r>
+              <a:rPr sz="1600" dirty="0"/>
+              <a:t> multi-motor</a:t>
+            </a:r>
+          </a:p>
+          <a:p>
+            <a:endParaRPr sz="1600" dirty="0"/>
+          </a:p>
+          <a:p>
+            <a:r>
+              <a:rPr sz="1600" dirty="0" err="1"/>
+              <a:t>Metadatos</a:t>
+            </a:r>
+            <a:r>
+              <a:rPr sz="1600" dirty="0"/>
+              <a:t>:</a:t>
+            </a:r>
+          </a:p>
+          <a:p>
+            <a:r>
+              <a:rPr sz="1600" dirty="0"/>
+              <a:t>Delta Lake → Transaction log lineal (checkpoint </a:t>
+            </a:r>
+            <a:r>
+              <a:rPr sz="1600" dirty="0" err="1"/>
+              <a:t>cada</a:t>
+            </a:r>
+            <a:r>
+              <a:rPr sz="1600" dirty="0"/>
+              <a:t> 10 commits)</a:t>
+            </a:r>
+          </a:p>
+          <a:p>
+            <a:r>
+              <a:rPr sz="1600" dirty="0"/>
+              <a:t>Iceberg → Metadata </a:t>
+            </a:r>
+            <a:r>
+              <a:rPr sz="1600" dirty="0" err="1"/>
+              <a:t>jerárquica</a:t>
+            </a:r>
+            <a:r>
+              <a:rPr sz="1600" dirty="0"/>
+              <a:t> con manifests → </a:t>
+            </a:r>
+            <a:r>
+              <a:rPr sz="1600" dirty="0" err="1"/>
+              <a:t>escala</a:t>
+            </a:r>
+            <a:r>
+              <a:rPr sz="1600" dirty="0"/>
+              <a:t> </a:t>
+            </a:r>
+            <a:r>
+              <a:rPr sz="1600" dirty="0" err="1"/>
+              <a:t>mejor</a:t>
+            </a:r>
+            <a:r>
+              <a:rPr sz="1600" dirty="0"/>
+              <a:t> </a:t>
+            </a:r>
+            <a:r>
+              <a:rPr sz="1600" dirty="0" err="1"/>
+              <a:t>en</a:t>
+            </a:r>
+            <a:r>
+              <a:rPr sz="1600" dirty="0"/>
+              <a:t> </a:t>
+            </a:r>
+            <a:r>
+              <a:rPr sz="1600" dirty="0" err="1"/>
+              <a:t>tablas</a:t>
+            </a:r>
+            <a:r>
+              <a:rPr sz="1600" dirty="0"/>
+              <a:t> </a:t>
+            </a:r>
+            <a:r>
+              <a:rPr sz="1600" dirty="0" err="1"/>
+              <a:t>masivas</a:t>
+            </a:r>
+            <a:endParaRPr sz="1600" dirty="0"/>
+          </a:p>
+        </p:txBody>
+      </p:sp>
+    </p:spTree>
+  </p:cSld>
+  <p:clrMapOvr>
+    <a:masterClrMapping/>
+  </p:clrMapOvr>
+</p:sld>
+</file>
+
+<file path=ppt/slides/slide25.xml><?xml version="1.0" encoding="utf-8"?>
+<p:sld xmlns:a="http://schemas.openxmlformats.org/drawingml/2006/main" xmlns:r="http://schemas.openxmlformats.org/officeDocument/2006/relationships" xmlns:p="http://schemas.openxmlformats.org/presentationml/2006/main">
+  <p:cSld>
+    <p:spTree>
+      <p:nvGrpSpPr>
+        <p:cNvPr id="1" name="">
+          <a:extLst>
+            <a:ext uri="{FF2B5EF4-FFF2-40B4-BE49-F238E27FC236}">
+              <a16:creationId xmlns:a16="http://schemas.microsoft.com/office/drawing/2014/main" id="{496BFF69-8F96-F655-894F-E5669E6D7E6B}"/>
+            </a:ext>
+          </a:extLst>
+        </p:cNvPr>
+        <p:cNvGrpSpPr/>
+        <p:nvPr/>
+      </p:nvGrpSpPr>
+      <p:grpSpPr>
+        <a:xfrm>
+          <a:off x="0" y="0"/>
+          <a:ext cx="0" cy="0"/>
+          <a:chOff x="0" y="0"/>
+          <a:chExt cx="0" cy="0"/>
+        </a:xfrm>
+      </p:grpSpPr>
+      <p:sp>
+        <p:nvSpPr>
+          <p:cNvPr id="2" name="Title 1">
+            <a:extLst>
+              <a:ext uri="{FF2B5EF4-FFF2-40B4-BE49-F238E27FC236}">
+                <a16:creationId xmlns:a16="http://schemas.microsoft.com/office/drawing/2014/main" id="{80C3EA66-BAD5-FD27-27A8-5752C94D4733}"/>
+              </a:ext>
+            </a:extLst>
+          </p:cNvPr>
+          <p:cNvSpPr>
+            <a:spLocks noGrp="1"/>
+          </p:cNvSpPr>
+          <p:nvPr>
+            <p:ph type="title"/>
+          </p:nvPr>
+        </p:nvSpPr>
+        <p:spPr/>
+        <p:txBody>
+          <a:bodyPr/>
+          <a:lstStyle/>
+          <a:p>
+            <a:r>
+              <a:t>Delta Lake vs Iceberg — Comparativo</a:t>
+            </a:r>
+          </a:p>
+        </p:txBody>
+      </p:sp>
+      <p:sp>
+        <p:nvSpPr>
+          <p:cNvPr id="3" name="Content Placeholder 2">
+            <a:extLst>
+              <a:ext uri="{FF2B5EF4-FFF2-40B4-BE49-F238E27FC236}">
+                <a16:creationId xmlns:a16="http://schemas.microsoft.com/office/drawing/2014/main" id="{EAF907CC-2D7E-5E71-ABB6-F184DACB10AB}"/>
+              </a:ext>
+            </a:extLst>
+          </p:cNvPr>
+          <p:cNvSpPr>
+            <a:spLocks noGrp="1"/>
+          </p:cNvSpPr>
+          <p:nvPr>
+            <p:ph idx="1"/>
+          </p:nvPr>
+        </p:nvSpPr>
+        <p:spPr/>
+        <p:txBody>
+          <a:bodyPr>
+            <a:noAutofit/>
+          </a:bodyPr>
+          <a:lstStyle/>
+          <a:p>
+            <a:pPr marL="0" indent="0">
+              <a:buNone/>
+            </a:pPr>
+            <a:r>
+              <a:rPr sz="1600" dirty="0"/>
+              <a:t>Performance </a:t>
+            </a:r>
+            <a:r>
+              <a:rPr sz="1600" dirty="0" err="1"/>
+              <a:t>en</a:t>
+            </a:r>
+            <a:r>
+              <a:rPr sz="1600" dirty="0"/>
+              <a:t> Spark:</a:t>
+            </a:r>
+          </a:p>
+          <a:p>
+            <a:r>
+              <a:rPr sz="1600" dirty="0"/>
+              <a:t>Delta Lake → 20-40% </a:t>
+            </a:r>
+            <a:r>
+              <a:rPr sz="1600" dirty="0" err="1"/>
+              <a:t>más</a:t>
+            </a:r>
+            <a:r>
+              <a:rPr sz="1600" dirty="0"/>
+              <a:t> </a:t>
+            </a:r>
+            <a:r>
+              <a:rPr sz="1600" dirty="0" err="1"/>
+              <a:t>rápido</a:t>
+            </a:r>
+            <a:r>
+              <a:rPr sz="1600" dirty="0"/>
+              <a:t> </a:t>
+            </a:r>
+            <a:r>
+              <a:rPr sz="1600" dirty="0" err="1"/>
+              <a:t>en</a:t>
+            </a:r>
+            <a:r>
+              <a:rPr sz="1600" dirty="0"/>
+              <a:t> Databricks (</a:t>
+            </a:r>
+            <a:r>
+              <a:rPr sz="1600" dirty="0" err="1"/>
+              <a:t>optimizaciones</a:t>
+            </a:r>
+            <a:r>
+              <a:rPr sz="1600" dirty="0"/>
+              <a:t> Photon)</a:t>
+            </a:r>
+          </a:p>
+          <a:p>
+            <a:r>
+              <a:rPr sz="1600" dirty="0"/>
+              <a:t>Iceberg → Comparable fuera de Databricks, </a:t>
+            </a:r>
+            <a:r>
+              <a:rPr sz="1600" dirty="0" err="1"/>
+              <a:t>mejor</a:t>
+            </a:r>
+            <a:r>
+              <a:rPr sz="1600" dirty="0"/>
+              <a:t> </a:t>
+            </a:r>
+            <a:r>
+              <a:rPr sz="1600" dirty="0" err="1"/>
+              <a:t>en</a:t>
+            </a:r>
+            <a:r>
+              <a:rPr sz="1600" dirty="0"/>
+              <a:t> </a:t>
+            </a:r>
+            <a:r>
+              <a:rPr sz="1600" dirty="0" err="1"/>
+              <a:t>escenarios</a:t>
+            </a:r>
+            <a:r>
+              <a:rPr sz="1600" dirty="0"/>
+              <a:t> multi-motor</a:t>
+            </a:r>
+          </a:p>
+          <a:p>
+            <a:endParaRPr sz="1600" dirty="0"/>
+          </a:p>
+          <a:p>
+            <a:pPr marL="0" indent="0">
+              <a:buNone/>
+            </a:pPr>
+            <a:r>
+              <a:rPr sz="1600" dirty="0" err="1"/>
+              <a:t>Metadatos</a:t>
+            </a:r>
+            <a:r>
+              <a:rPr sz="1600" dirty="0"/>
+              <a:t>:</a:t>
+            </a:r>
+          </a:p>
+          <a:p>
+            <a:r>
+              <a:rPr sz="1600" dirty="0"/>
+              <a:t>Delta Lake → Transaction log lineal (checkpoint </a:t>
+            </a:r>
+            <a:r>
+              <a:rPr sz="1600" dirty="0" err="1"/>
+              <a:t>cada</a:t>
+            </a:r>
+            <a:r>
+              <a:rPr sz="1600" dirty="0"/>
+              <a:t> 10 commits)</a:t>
+            </a:r>
+          </a:p>
+          <a:p>
+            <a:r>
+              <a:rPr sz="1600" dirty="0"/>
+              <a:t>Iceberg → Metadata </a:t>
+            </a:r>
+            <a:r>
+              <a:rPr sz="1600" dirty="0" err="1"/>
+              <a:t>jerárquica</a:t>
+            </a:r>
+            <a:r>
+              <a:rPr sz="1600" dirty="0"/>
+              <a:t> con manifests → </a:t>
+            </a:r>
+            <a:r>
+              <a:rPr sz="1600" dirty="0" err="1"/>
+              <a:t>escala</a:t>
+            </a:r>
+            <a:r>
+              <a:rPr sz="1600" dirty="0"/>
+              <a:t> </a:t>
+            </a:r>
+            <a:r>
+              <a:rPr sz="1600" dirty="0" err="1"/>
+              <a:t>mejor</a:t>
+            </a:r>
+            <a:r>
+              <a:rPr sz="1600" dirty="0"/>
+              <a:t> </a:t>
+            </a:r>
+            <a:r>
+              <a:rPr sz="1600" dirty="0" err="1"/>
+              <a:t>en</a:t>
+            </a:r>
+            <a:r>
+              <a:rPr sz="1600" dirty="0"/>
+              <a:t> </a:t>
+            </a:r>
+            <a:r>
+              <a:rPr sz="1600" dirty="0" err="1"/>
+              <a:t>tablas</a:t>
+            </a:r>
+            <a:r>
+              <a:rPr sz="1600" dirty="0"/>
+              <a:t> </a:t>
+            </a:r>
+            <a:r>
+              <a:rPr sz="1600" dirty="0" err="1"/>
+              <a:t>masivas</a:t>
+            </a:r>
+            <a:endParaRPr sz="1600" dirty="0"/>
+          </a:p>
+        </p:txBody>
+      </p:sp>
+    </p:spTree>
+    <p:extLst>
+      <p:ext uri="{BB962C8B-B14F-4D97-AF65-F5344CB8AC3E}">
+        <p14:creationId xmlns:p14="http://schemas.microsoft.com/office/powerpoint/2010/main" val="2455966775"/>
+      </p:ext>
+    </p:extLst>
+  </p:cSld>
+  <p:clrMapOvr>
+    <a:masterClrMapping/>
+  </p:clrMapOvr>
+</p:sld>
+</file>
+
+<file path=ppt/slides/slide26.xml><?xml version="1.0" encoding="utf-8"?>
+<p:sld xmlns:a="http://schemas.openxmlformats.org/drawingml/2006/main" xmlns:r="http://schemas.openxmlformats.org/officeDocument/2006/relationships" xmlns:p="http://schemas.openxmlformats.org/presentationml/2006/main">
+  <p:cSld>
+    <p:spTree>
+      <p:nvGrpSpPr>
+        <p:cNvPr id="1" name=""/>
+        <p:cNvGrpSpPr/>
+        <p:nvPr/>
+      </p:nvGrpSpPr>
+      <p:grpSpPr>
+        <a:xfrm>
+          <a:off x="0" y="0"/>
+          <a:ext cx="0" cy="0"/>
+          <a:chOff x="0" y="0"/>
+          <a:chExt cx="0" cy="0"/>
+        </a:xfrm>
+      </p:grpSpPr>
+      <p:sp>
+        <p:nvSpPr>
+          <p:cNvPr id="2" name="Title 1"/>
+          <p:cNvSpPr>
+            <a:spLocks noGrp="1"/>
+          </p:cNvSpPr>
+          <p:nvPr>
+            <p:ph type="title"/>
+          </p:nvPr>
+        </p:nvSpPr>
+        <p:spPr/>
+        <p:txBody>
+          <a:bodyPr/>
+          <a:lstStyle/>
+          <a:p>
+            <a:r>
+              <a:t>La guerra de formatos — ¿Quién va ganando?</a:t>
+            </a:r>
+          </a:p>
+        </p:txBody>
+      </p:sp>
+      <p:sp>
+        <p:nvSpPr>
+          <p:cNvPr id="3" name="Content Placeholder 2"/>
+          <p:cNvSpPr>
+            <a:spLocks noGrp="1"/>
+          </p:cNvSpPr>
+          <p:nvPr>
+            <p:ph idx="1"/>
+          </p:nvPr>
+        </p:nvSpPr>
+        <p:spPr/>
+        <p:txBody>
+          <a:bodyPr>
+            <a:noAutofit/>
+          </a:bodyPr>
+          <a:lstStyle/>
+          <a:p>
+            <a:pPr marL="0" indent="0">
+              <a:buNone/>
+            </a:pPr>
+            <a:r>
+              <a:rPr sz="1600" dirty="0"/>
+              <a:t>2024: Databricks </a:t>
+            </a:r>
+            <a:r>
+              <a:rPr sz="1600" dirty="0" err="1"/>
+              <a:t>compra</a:t>
+            </a:r>
+            <a:r>
+              <a:rPr sz="1600" dirty="0"/>
+              <a:t> Tabular (</a:t>
+            </a:r>
+            <a:r>
+              <a:rPr sz="1600" dirty="0" err="1"/>
+              <a:t>creadores</a:t>
+            </a:r>
+            <a:r>
+              <a:rPr sz="1600" dirty="0"/>
+              <a:t> de Iceberg) → </a:t>
+            </a:r>
+            <a:r>
+              <a:rPr sz="1600" dirty="0" err="1"/>
+              <a:t>bomba</a:t>
+            </a:r>
+            <a:r>
+              <a:rPr sz="1600" dirty="0"/>
+              <a:t> </a:t>
+            </a:r>
+            <a:r>
+              <a:rPr sz="1600" dirty="0" err="1"/>
+              <a:t>en</a:t>
+            </a:r>
+            <a:r>
+              <a:rPr sz="1600" dirty="0"/>
+              <a:t> la </a:t>
+            </a:r>
+            <a:r>
+              <a:rPr sz="1600" dirty="0" err="1"/>
+              <a:t>industria</a:t>
+            </a:r>
+            <a:endParaRPr sz="1600" dirty="0"/>
+          </a:p>
+          <a:p>
+            <a:pPr marL="0" indent="0">
+              <a:buNone/>
+            </a:pPr>
+            <a:r>
+              <a:rPr sz="1600" dirty="0"/>
+              <a:t>→ Los </a:t>
+            </a:r>
+            <a:r>
+              <a:rPr sz="1600" dirty="0" err="1"/>
+              <a:t>creadores</a:t>
+            </a:r>
+            <a:r>
+              <a:rPr sz="1600" dirty="0"/>
+              <a:t> de Delta Lake y de Iceberg </a:t>
+            </a:r>
+            <a:r>
+              <a:rPr sz="1600" dirty="0" err="1"/>
+              <a:t>ahora</a:t>
+            </a:r>
+            <a:r>
+              <a:rPr sz="1600" dirty="0"/>
+              <a:t> </a:t>
+            </a:r>
+            <a:r>
+              <a:rPr sz="1600" dirty="0" err="1"/>
+              <a:t>están</a:t>
+            </a:r>
+            <a:r>
+              <a:rPr sz="1600" dirty="0"/>
+              <a:t> </a:t>
+            </a:r>
+            <a:r>
+              <a:rPr sz="1600" dirty="0" err="1"/>
+              <a:t>en</a:t>
+            </a:r>
+            <a:r>
+              <a:rPr sz="1600" dirty="0"/>
+              <a:t> la </a:t>
+            </a:r>
+            <a:r>
+              <a:rPr sz="1600" dirty="0" err="1"/>
+              <a:t>misma</a:t>
+            </a:r>
+            <a:r>
+              <a:rPr sz="1600" dirty="0"/>
+              <a:t> </a:t>
+            </a:r>
+            <a:r>
+              <a:rPr sz="1600" dirty="0" err="1"/>
+              <a:t>empresa</a:t>
+            </a:r>
+            <a:endParaRPr sz="1600" dirty="0"/>
+          </a:p>
+          <a:p>
+            <a:pPr marL="0" indent="0">
+              <a:buNone/>
+            </a:pPr>
+            <a:r>
+              <a:rPr sz="1600" dirty="0"/>
+              <a:t>→ </a:t>
+            </a:r>
+            <a:r>
+              <a:rPr sz="1600" dirty="0" err="1"/>
+              <a:t>Objetivo</a:t>
+            </a:r>
+            <a:r>
+              <a:rPr sz="1600" dirty="0"/>
+              <a:t>: </a:t>
+            </a:r>
+            <a:r>
+              <a:rPr sz="1600" dirty="0" err="1"/>
+              <a:t>convergencia</a:t>
+            </a:r>
+            <a:r>
+              <a:rPr sz="1600" dirty="0"/>
+              <a:t> con </a:t>
+            </a:r>
+            <a:r>
+              <a:rPr sz="1600" dirty="0" err="1"/>
+              <a:t>UniForm</a:t>
+            </a:r>
+            <a:r>
+              <a:rPr sz="1600" dirty="0"/>
+              <a:t> — escribes Delta, se lee </a:t>
+            </a:r>
+            <a:r>
+              <a:rPr sz="1600" dirty="0" err="1"/>
+              <a:t>como</a:t>
+            </a:r>
+            <a:r>
+              <a:rPr sz="1600" dirty="0"/>
+              <a:t> Iceberg</a:t>
+            </a:r>
+          </a:p>
+          <a:p>
+            <a:endParaRPr sz="1600" dirty="0"/>
+          </a:p>
+          <a:p>
+            <a:pPr marL="0" indent="0">
+              <a:buNone/>
+            </a:pPr>
+            <a:r>
+              <a:rPr sz="1600" dirty="0" err="1"/>
+              <a:t>Adopción</a:t>
+            </a:r>
+            <a:r>
+              <a:rPr sz="1600" dirty="0"/>
+              <a:t> </a:t>
+            </a:r>
+            <a:r>
+              <a:rPr sz="1600" dirty="0" err="1"/>
+              <a:t>en</a:t>
+            </a:r>
+            <a:r>
+              <a:rPr sz="1600" dirty="0"/>
+              <a:t> 2025-2026:</a:t>
+            </a:r>
+          </a:p>
+          <a:p>
+            <a:r>
+              <a:rPr sz="1600" dirty="0"/>
+              <a:t>Iceberg </a:t>
+            </a:r>
+            <a:r>
+              <a:rPr sz="1600" dirty="0" err="1"/>
+              <a:t>gana</a:t>
+            </a:r>
+            <a:r>
+              <a:rPr sz="1600" dirty="0"/>
+              <a:t> </a:t>
+            </a:r>
+            <a:r>
+              <a:rPr sz="1600" dirty="0" err="1"/>
+              <a:t>en</a:t>
+            </a:r>
+            <a:r>
+              <a:rPr sz="1600" dirty="0"/>
+              <a:t> </a:t>
+            </a:r>
+            <a:r>
+              <a:rPr sz="1600" dirty="0" err="1"/>
+              <a:t>nuevas</a:t>
+            </a:r>
+            <a:r>
+              <a:rPr sz="1600" dirty="0"/>
+              <a:t> </a:t>
+            </a:r>
+            <a:r>
+              <a:rPr sz="1600" dirty="0" err="1"/>
+              <a:t>adopciones</a:t>
+            </a:r>
+            <a:r>
+              <a:rPr sz="1600" dirty="0"/>
+              <a:t> — </a:t>
+            </a:r>
+            <a:r>
+              <a:rPr sz="1600" dirty="0" err="1"/>
+              <a:t>soporte</a:t>
+            </a:r>
+            <a:r>
+              <a:rPr sz="1600" dirty="0"/>
+              <a:t> </a:t>
+            </a:r>
+            <a:r>
+              <a:rPr sz="1600" dirty="0" err="1"/>
+              <a:t>nativo</a:t>
+            </a:r>
+            <a:r>
+              <a:rPr sz="1600" dirty="0"/>
+              <a:t> </a:t>
+            </a:r>
+            <a:r>
+              <a:rPr sz="1600" dirty="0" err="1"/>
+              <a:t>en</a:t>
+            </a:r>
+            <a:r>
+              <a:rPr sz="1600" dirty="0"/>
+              <a:t> Snowflake, AWS, GCP, Flink</a:t>
+            </a:r>
+          </a:p>
+          <a:p>
+            <a:r>
+              <a:rPr sz="1600" dirty="0"/>
+              <a:t>Delta Lake </a:t>
+            </a:r>
+            <a:r>
+              <a:rPr sz="1600" dirty="0" err="1"/>
+              <a:t>domina</a:t>
+            </a:r>
+            <a:r>
+              <a:rPr sz="1600" dirty="0"/>
+              <a:t> </a:t>
+            </a:r>
+            <a:r>
+              <a:rPr sz="1600" dirty="0" err="1"/>
+              <a:t>en</a:t>
+            </a:r>
+            <a:r>
+              <a:rPr sz="1600" dirty="0"/>
+              <a:t> Databricks — 10,000+ </a:t>
+            </a:r>
+            <a:r>
+              <a:rPr sz="1600" dirty="0" err="1"/>
+              <a:t>empresas</a:t>
+            </a:r>
+            <a:r>
+              <a:rPr sz="1600" dirty="0"/>
+              <a:t>, </a:t>
+            </a:r>
+            <a:endParaRPr lang="en-US" sz="1600" dirty="0"/>
+          </a:p>
+          <a:p>
+            <a:r>
+              <a:rPr lang="en-US" sz="1600" dirty="0"/>
+              <a:t>Hudi </a:t>
+            </a:r>
+            <a:r>
+              <a:rPr lang="en-US" sz="1600" dirty="0" err="1"/>
+              <a:t>pierde</a:t>
+            </a:r>
+            <a:r>
+              <a:rPr lang="en-US" sz="1600" dirty="0"/>
+              <a:t> mindshare — comunidad </a:t>
+            </a:r>
+            <a:r>
+              <a:rPr lang="en-US" sz="1600" dirty="0" err="1"/>
+              <a:t>más</a:t>
+            </a:r>
+            <a:r>
+              <a:rPr lang="en-US" sz="1600" dirty="0"/>
+              <a:t> </a:t>
+            </a:r>
+            <a:r>
+              <a:rPr lang="en-US" sz="1600" dirty="0" err="1"/>
+              <a:t>pequeña</a:t>
+            </a:r>
+            <a:r>
+              <a:rPr lang="en-US" sz="1600" dirty="0"/>
+              <a:t>, momentum </a:t>
+            </a:r>
+            <a:r>
+              <a:rPr lang="en-US" sz="1600" dirty="0" err="1"/>
+              <a:t>hacia</a:t>
+            </a:r>
+            <a:r>
+              <a:rPr lang="en-US" sz="1600" dirty="0"/>
+              <a:t> Delta e Iceberg</a:t>
+            </a:r>
+          </a:p>
+          <a:p>
+            <a:r>
+              <a:rPr sz="1600" dirty="0"/>
+              <a:t>GitHub stars (2025): Iceberg ~7.5-8k | Delta ~7.5-8k | Hudi ~5.5-6k</a:t>
+            </a:r>
+            <a:endParaRPr lang="en-US" sz="1600" dirty="0"/>
+          </a:p>
+        </p:txBody>
+      </p:sp>
+    </p:spTree>
+  </p:cSld>
+  <p:clrMapOvr>
+    <a:masterClrMapping/>
+  </p:clrMapOvr>
+</p:sld>
+</file>
+
+<file path=ppt/slides/slide27.xml><?xml version="1.0" encoding="utf-8"?>
+<p:sld xmlns:a="http://schemas.openxmlformats.org/drawingml/2006/main" xmlns:r="http://schemas.openxmlformats.org/officeDocument/2006/relationships" xmlns:p="http://schemas.openxmlformats.org/presentationml/2006/main">
+  <p:cSld>
+    <p:spTree>
+      <p:nvGrpSpPr>
+        <p:cNvPr id="1" name="">
+          <a:extLst>
+            <a:ext uri="{FF2B5EF4-FFF2-40B4-BE49-F238E27FC236}">
+              <a16:creationId xmlns:a16="http://schemas.microsoft.com/office/drawing/2014/main" id="{1E12A199-6040-B544-6241-C0B78BF6C558}"/>
+            </a:ext>
+          </a:extLst>
+        </p:cNvPr>
+        <p:cNvGrpSpPr/>
+        <p:nvPr/>
+      </p:nvGrpSpPr>
+      <p:grpSpPr>
+        <a:xfrm>
+          <a:off x="0" y="0"/>
+          <a:ext cx="0" cy="0"/>
+          <a:chOff x="0" y="0"/>
+          <a:chExt cx="0" cy="0"/>
+        </a:xfrm>
+      </p:grpSpPr>
+      <p:sp>
+        <p:nvSpPr>
+          <p:cNvPr id="2" name="Title 1">
+            <a:extLst>
+              <a:ext uri="{FF2B5EF4-FFF2-40B4-BE49-F238E27FC236}">
+                <a16:creationId xmlns:a16="http://schemas.microsoft.com/office/drawing/2014/main" id="{564F02BB-6287-9DE8-1560-86A98E171E24}"/>
+              </a:ext>
+            </a:extLst>
+          </p:cNvPr>
+          <p:cNvSpPr>
+            <a:spLocks noGrp="1"/>
+          </p:cNvSpPr>
+          <p:nvPr>
+            <p:ph type="title"/>
+          </p:nvPr>
+        </p:nvSpPr>
+        <p:spPr/>
+        <p:txBody>
+          <a:bodyPr/>
+          <a:lstStyle/>
+          <a:p>
+            <a:r>
+              <a:t>La guerra de formatos — ¿Quién va ganando?</a:t>
+            </a:r>
+          </a:p>
+        </p:txBody>
+      </p:sp>
+      <p:sp>
+        <p:nvSpPr>
+          <p:cNvPr id="3" name="Content Placeholder 2">
+            <a:extLst>
+              <a:ext uri="{FF2B5EF4-FFF2-40B4-BE49-F238E27FC236}">
+                <a16:creationId xmlns:a16="http://schemas.microsoft.com/office/drawing/2014/main" id="{6A58C17F-58A4-A833-BC95-F36E27913A80}"/>
+              </a:ext>
+            </a:extLst>
+          </p:cNvPr>
+          <p:cNvSpPr>
+            <a:spLocks noGrp="1"/>
+          </p:cNvSpPr>
+          <p:nvPr>
+            <p:ph idx="1"/>
+          </p:nvPr>
+        </p:nvSpPr>
+        <p:spPr/>
+        <p:txBody>
+          <a:bodyPr>
+            <a:noAutofit/>
+          </a:bodyPr>
+          <a:lstStyle/>
+          <a:p>
+            <a:pPr marL="0" indent="0">
+              <a:buNone/>
+            </a:pPr>
+            <a:r>
+              <a:rPr sz="1600" dirty="0"/>
+              <a:t>¿</a:t>
+            </a:r>
+            <a:r>
+              <a:rPr sz="1600" dirty="0" err="1"/>
+              <a:t>Quién</a:t>
+            </a:r>
+            <a:r>
+              <a:rPr sz="1600" dirty="0"/>
+              <a:t> </a:t>
+            </a:r>
+            <a:r>
+              <a:rPr sz="1600" dirty="0" err="1"/>
+              <a:t>va</a:t>
+            </a:r>
+            <a:r>
+              <a:rPr sz="1600" dirty="0"/>
+              <a:t> </a:t>
+            </a:r>
+            <a:r>
+              <a:rPr sz="1600" dirty="0" err="1"/>
+              <a:t>ganando</a:t>
+            </a:r>
+            <a:r>
+              <a:rPr sz="1600" dirty="0"/>
+              <a:t>?</a:t>
+            </a:r>
+          </a:p>
+          <a:p>
+            <a:r>
+              <a:rPr sz="1600" dirty="0"/>
+              <a:t>Iceberg → </a:t>
+            </a:r>
+            <a:r>
+              <a:rPr sz="1600" dirty="0" err="1"/>
+              <a:t>gana</a:t>
+            </a:r>
+            <a:r>
+              <a:rPr sz="1600" dirty="0"/>
+              <a:t> la </a:t>
+            </a:r>
+            <a:r>
+              <a:rPr sz="1600" dirty="0" err="1"/>
+              <a:t>guerra</a:t>
+            </a:r>
+            <a:r>
+              <a:rPr sz="1600" dirty="0"/>
+              <a:t> del </a:t>
+            </a:r>
+            <a:r>
+              <a:rPr sz="1600" dirty="0" err="1"/>
+              <a:t>ecosistema</a:t>
+            </a:r>
+            <a:r>
+              <a:rPr sz="1600" dirty="0"/>
+              <a:t> </a:t>
+            </a:r>
+            <a:r>
+              <a:rPr sz="1600" dirty="0" err="1"/>
+              <a:t>abierto</a:t>
+            </a:r>
+            <a:r>
+              <a:rPr sz="1600" dirty="0"/>
+              <a:t> y multi-motor</a:t>
+            </a:r>
+          </a:p>
+          <a:p>
+            <a:r>
+              <a:rPr sz="1600" dirty="0"/>
+              <a:t>Delta Lake → </a:t>
+            </a:r>
+            <a:r>
+              <a:rPr sz="1600" dirty="0" err="1"/>
+              <a:t>gana</a:t>
+            </a:r>
+            <a:r>
+              <a:rPr sz="1600" dirty="0"/>
+              <a:t> la </a:t>
+            </a:r>
+            <a:r>
+              <a:rPr sz="1600" dirty="0" err="1"/>
+              <a:t>guerra</a:t>
+            </a:r>
+            <a:r>
+              <a:rPr sz="1600" dirty="0"/>
+              <a:t> del </a:t>
+            </a:r>
+            <a:r>
+              <a:rPr sz="1600" dirty="0" err="1"/>
+              <a:t>rendimiento</a:t>
+            </a:r>
+            <a:r>
+              <a:rPr sz="1600" dirty="0"/>
+              <a:t> </a:t>
+            </a:r>
+            <a:r>
+              <a:rPr sz="1600" dirty="0" err="1"/>
+              <a:t>en</a:t>
+            </a:r>
+            <a:r>
+              <a:rPr sz="1600" dirty="0"/>
+              <a:t> Spark/Databricks</a:t>
+            </a:r>
+          </a:p>
+          <a:p>
+            <a:r>
+              <a:rPr sz="1600" dirty="0"/>
+              <a:t>La </a:t>
+            </a:r>
+            <a:r>
+              <a:rPr sz="1600" dirty="0" err="1"/>
+              <a:t>respuesta</a:t>
+            </a:r>
+            <a:r>
+              <a:rPr sz="1600" dirty="0"/>
+              <a:t> real → </a:t>
+            </a:r>
+            <a:r>
+              <a:rPr sz="1600" dirty="0" err="1"/>
+              <a:t>están</a:t>
+            </a:r>
+            <a:r>
+              <a:rPr sz="1600" dirty="0"/>
+              <a:t> </a:t>
+            </a:r>
+            <a:r>
+              <a:rPr sz="1600" dirty="0" err="1"/>
+              <a:t>convergiendo</a:t>
+            </a:r>
+            <a:r>
+              <a:rPr sz="1600" dirty="0"/>
+              <a:t>, no </a:t>
+            </a:r>
+            <a:r>
+              <a:rPr sz="1600" dirty="0" err="1"/>
+              <a:t>compitiendo</a:t>
+            </a:r>
+            <a:endParaRPr sz="1600" dirty="0"/>
+          </a:p>
+          <a:p>
+            <a:endParaRPr sz="1600" dirty="0"/>
+          </a:p>
+          <a:p>
+            <a:pPr marL="0" indent="0">
+              <a:buNone/>
+            </a:pPr>
+            <a:r>
+              <a:rPr sz="1600" dirty="0"/>
+              <a:t>El </a:t>
+            </a:r>
+            <a:r>
+              <a:rPr sz="1600" dirty="0" err="1"/>
+              <a:t>futuro</a:t>
+            </a:r>
+            <a:r>
+              <a:rPr sz="1600" dirty="0"/>
+              <a:t>: </a:t>
+            </a:r>
+            <a:r>
+              <a:rPr sz="1600" dirty="0" err="1"/>
+              <a:t>UniForm</a:t>
+            </a:r>
+            <a:r>
+              <a:rPr sz="1600" dirty="0"/>
+              <a:t> v2 </a:t>
+            </a:r>
+            <a:r>
+              <a:rPr sz="1600" dirty="0" err="1"/>
+              <a:t>hace</a:t>
+            </a:r>
+            <a:r>
+              <a:rPr sz="1600" dirty="0"/>
+              <a:t> </a:t>
+            </a:r>
+            <a:r>
+              <a:rPr sz="1600" dirty="0" err="1"/>
+              <a:t>que</a:t>
+            </a:r>
+            <a:r>
+              <a:rPr sz="1600" dirty="0"/>
+              <a:t> Delta </a:t>
+            </a:r>
+            <a:r>
+              <a:rPr sz="1600" dirty="0" err="1"/>
+              <a:t>escriba</a:t>
+            </a:r>
+            <a:r>
+              <a:rPr sz="1600" dirty="0"/>
+              <a:t> metadata Iceberg </a:t>
+            </a:r>
+            <a:r>
+              <a:rPr sz="1600" dirty="0" err="1"/>
+              <a:t>automáticamente</a:t>
+            </a:r>
+            <a:endParaRPr sz="1600" dirty="0"/>
+          </a:p>
+          <a:p>
+            <a:r>
+              <a:rPr sz="1600" dirty="0"/>
+              <a:t>→ "Escribe Delta, lee Iceberg" — lo </a:t>
+            </a:r>
+            <a:r>
+              <a:rPr sz="1600" dirty="0" err="1"/>
+              <a:t>mejor</a:t>
+            </a:r>
+            <a:r>
+              <a:rPr sz="1600" dirty="0"/>
+              <a:t> de ambos </a:t>
+            </a:r>
+            <a:r>
+              <a:rPr sz="1600" dirty="0" err="1"/>
+              <a:t>mundos</a:t>
+            </a:r>
+            <a:endParaRPr sz="1600" dirty="0"/>
+          </a:p>
+          <a:p>
+            <a:r>
+              <a:rPr sz="1600" dirty="0"/>
+              <a:t>→ La </a:t>
+            </a:r>
+            <a:r>
+              <a:rPr sz="1600" dirty="0" err="1"/>
+              <a:t>guerra</a:t>
+            </a:r>
+            <a:r>
+              <a:rPr sz="1600" dirty="0"/>
+              <a:t> de </a:t>
+            </a:r>
+            <a:r>
+              <a:rPr sz="1600" dirty="0" err="1"/>
+              <a:t>formatos</a:t>
+            </a:r>
+            <a:r>
+              <a:rPr sz="1600" dirty="0"/>
+              <a:t> se </a:t>
+            </a:r>
+            <a:r>
+              <a:rPr sz="1600" dirty="0" err="1"/>
+              <a:t>está</a:t>
+            </a:r>
+            <a:r>
+              <a:rPr sz="1600" dirty="0"/>
+              <a:t> </a:t>
+            </a:r>
+            <a:r>
+              <a:rPr sz="1600" dirty="0" err="1"/>
+              <a:t>volviendo</a:t>
+            </a:r>
+            <a:r>
+              <a:rPr sz="1600" dirty="0"/>
+              <a:t> </a:t>
+            </a:r>
+            <a:r>
+              <a:rPr sz="1600" dirty="0" err="1"/>
+              <a:t>irrelevante</a:t>
+            </a:r>
+            <a:endParaRPr lang="es-419" sz="1600" dirty="0"/>
+          </a:p>
+          <a:p>
+            <a:pPr marL="0" indent="0">
+              <a:buNone/>
+            </a:pPr>
+            <a:endParaRPr sz="1600" dirty="0"/>
+          </a:p>
+          <a:p>
+            <a:pPr marL="0" indent="0">
+              <a:buNone/>
+            </a:pPr>
+            <a:r>
+              <a:rPr sz="1600" dirty="0"/>
+              <a:t>Consejo: </a:t>
+            </a:r>
+            <a:endParaRPr lang="es-419" sz="1600" dirty="0"/>
+          </a:p>
+          <a:p>
+            <a:r>
+              <a:rPr sz="1600" dirty="0" err="1"/>
+              <a:t>si</a:t>
+            </a:r>
+            <a:r>
+              <a:rPr sz="1600" dirty="0"/>
+              <a:t> </a:t>
+            </a:r>
+            <a:r>
+              <a:rPr sz="1600" dirty="0" err="1"/>
+              <a:t>estás</a:t>
+            </a:r>
+            <a:r>
+              <a:rPr sz="1600" dirty="0"/>
+              <a:t> </a:t>
+            </a:r>
+            <a:r>
+              <a:rPr sz="1600" dirty="0" err="1"/>
+              <a:t>en</a:t>
+            </a:r>
+            <a:r>
+              <a:rPr sz="1600" dirty="0"/>
+              <a:t> Databricks → Delta. </a:t>
+            </a:r>
+            <a:endParaRPr lang="es-419" sz="1600" dirty="0"/>
+          </a:p>
+          <a:p>
+            <a:r>
+              <a:rPr sz="1600" dirty="0"/>
+              <a:t>Si multi-motor → Iceberg. </a:t>
+            </a:r>
+            <a:endParaRPr lang="es-419" sz="1600" dirty="0"/>
+          </a:p>
+          <a:p>
+            <a:r>
+              <a:rPr sz="1600" dirty="0"/>
+              <a:t>Si </a:t>
+            </a:r>
+            <a:r>
+              <a:rPr sz="1600" dirty="0" err="1"/>
+              <a:t>dudas</a:t>
+            </a:r>
+            <a:r>
+              <a:rPr sz="1600" dirty="0"/>
+              <a:t> → </a:t>
+            </a:r>
+            <a:r>
+              <a:rPr sz="1600" dirty="0" err="1"/>
+              <a:t>cualquiera</a:t>
+            </a:r>
+            <a:r>
+              <a:rPr sz="1600" dirty="0"/>
+              <a:t> </a:t>
+            </a:r>
+            <a:r>
+              <a:rPr sz="1600" dirty="0" err="1"/>
+              <a:t>funciona</a:t>
+            </a:r>
+            <a:r>
+              <a:rPr sz="1600" dirty="0"/>
+              <a:t>.</a:t>
+            </a:r>
+          </a:p>
+        </p:txBody>
+      </p:sp>
+    </p:spTree>
+    <p:extLst>
+      <p:ext uri="{BB962C8B-B14F-4D97-AF65-F5344CB8AC3E}">
+        <p14:creationId xmlns:p14="http://schemas.microsoft.com/office/powerpoint/2010/main" val="2665608162"/>
+      </p:ext>
+    </p:extLst>
+  </p:cSld>
+  <p:clrMapOvr>
+    <a:masterClrMapping/>
+  </p:clrMapOvr>
+</p:sld>
+</file>
+
+<file path=ppt/slides/slide28.xml><?xml version="1.0" encoding="utf-8"?>
+<p:sld xmlns:a="http://schemas.openxmlformats.org/drawingml/2006/main" xmlns:r="http://schemas.openxmlformats.org/officeDocument/2006/relationships" xmlns:p="http://schemas.openxmlformats.org/presentationml/2006/main">
+  <p:cSld>
+    <p:spTree>
+      <p:nvGrpSpPr>
+        <p:cNvPr id="1" name=""/>
+        <p:cNvGrpSpPr/>
+        <p:nvPr/>
+      </p:nvGrpSpPr>
+      <p:grpSpPr>
+        <a:xfrm>
+          <a:off x="0" y="0"/>
+          <a:ext cx="0" cy="0"/>
+          <a:chOff x="0" y="0"/>
+          <a:chExt cx="0" cy="0"/>
+        </a:xfrm>
+      </p:grpSpPr>
       <p:sp>
         <p:nvSpPr>
           <p:cNvPr id="2" name="Title 1"/>
@@ -8957,8 +13545,8 @@
 </p:sld>
 </file>
 
-<file path=ppt/slides/slide17.xml><?xml version="1.0" encoding="utf-8"?>
-<p:sld xmlns:a="http://schemas.openxmlformats.org/drawingml/2006/main" xmlns:p="http://schemas.openxmlformats.org/presentationml/2006/main" xmlns:r="http://schemas.openxmlformats.org/officeDocument/2006/relationships">
+<file path=ppt/slides/slide29.xml><?xml version="1.0" encoding="utf-8"?>
+<p:sld xmlns:a="http://schemas.openxmlformats.org/drawingml/2006/main" xmlns:r="http://schemas.openxmlformats.org/officeDocument/2006/relationships" xmlns:p="http://schemas.openxmlformats.org/presentationml/2006/main">
   <p:cSld>
     <p:spTree>
       <p:nvGrpSpPr>
@@ -8966,7 +13554,14 @@
         <p:cNvGrpSpPr/>
         <p:nvPr/>
       </p:nvGrpSpPr>
-      <p:grpSpPr/>
+      <p:grpSpPr>
+        <a:xfrm>
+          <a:off x="0" y="0"/>
+          <a:ext cx="0" cy="0"/>
+          <a:chOff x="0" y="0"/>
+          <a:chExt cx="0" cy="0"/>
+        </a:xfrm>
+      </p:grpSpPr>
       <p:sp>
         <p:nvSpPr>
           <p:cNvPr id="2" name="Title 1"/>
@@ -9017,8 +13612,8 @@
 </p:sld>
 </file>
 
-<file path=ppt/slides/slide18.xml><?xml version="1.0" encoding="utf-8"?>
-<p:sld xmlns:a="http://schemas.openxmlformats.org/drawingml/2006/main" xmlns:p="http://schemas.openxmlformats.org/presentationml/2006/main" xmlns:r="http://schemas.openxmlformats.org/officeDocument/2006/relationships">
+<file path=ppt/slides/slide3.xml><?xml version="1.0" encoding="utf-8"?>
+<p:sld xmlns:a="http://schemas.openxmlformats.org/drawingml/2006/main" xmlns:r="http://schemas.openxmlformats.org/officeDocument/2006/relationships" xmlns:p="http://schemas.openxmlformats.org/presentationml/2006/main">
   <p:cSld>
     <p:spTree>
       <p:nvGrpSpPr>
@@ -9026,7 +13621,81 @@
         <p:cNvGrpSpPr/>
         <p:nvPr/>
       </p:nvGrpSpPr>
-      <p:grpSpPr/>
+      <p:grpSpPr>
+        <a:xfrm>
+          <a:off x="0" y="0"/>
+          <a:ext cx="0" cy="0"/>
+          <a:chOff x="0" y="0"/>
+          <a:chExt cx="0" cy="0"/>
+        </a:xfrm>
+      </p:grpSpPr>
+      <p:sp>
+        <p:nvSpPr>
+          <p:cNvPr id="2" name="Title 1"/>
+          <p:cNvSpPr>
+            <a:spLocks noGrp="1"/>
+          </p:cNvSpPr>
+          <p:nvPr>
+            <p:ph type="title"/>
+          </p:nvPr>
+        </p:nvSpPr>
+        <p:spPr/>
+        <p:txBody>
+          <a:bodyPr/>
+          <a:lstStyle/>
+          <a:p>
+            <a:r>
+              <a:t>01 — Data Warehouse</a:t>
+            </a:r>
+          </a:p>
+        </p:txBody>
+      </p:sp>
+      <p:sp>
+        <p:nvSpPr>
+          <p:cNvPr id="3" name="Text Placeholder 2"/>
+          <p:cNvSpPr>
+            <a:spLocks noGrp="1"/>
+          </p:cNvSpPr>
+          <p:nvPr>
+            <p:ph type="body" idx="1"/>
+          </p:nvPr>
+        </p:nvSpPr>
+        <p:spPr/>
+        <p:txBody>
+          <a:bodyPr/>
+          <a:lstStyle/>
+          <a:p>
+            <a:r>
+              <a:t>El modelo tradicional de análisis de datos</a:t>
+            </a:r>
+          </a:p>
+        </p:txBody>
+      </p:sp>
+    </p:spTree>
+  </p:cSld>
+  <p:clrMapOvr>
+    <a:masterClrMapping/>
+  </p:clrMapOvr>
+</p:sld>
+</file>
+
+<file path=ppt/slides/slide30.xml><?xml version="1.0" encoding="utf-8"?>
+<p:sld xmlns:a="http://schemas.openxmlformats.org/drawingml/2006/main" xmlns:r="http://schemas.openxmlformats.org/officeDocument/2006/relationships" xmlns:p="http://schemas.openxmlformats.org/presentationml/2006/main">
+  <p:cSld>
+    <p:spTree>
+      <p:nvGrpSpPr>
+        <p:cNvPr id="1" name=""/>
+        <p:cNvGrpSpPr/>
+        <p:nvPr/>
+      </p:nvGrpSpPr>
+      <p:grpSpPr>
+        <a:xfrm>
+          <a:off x="0" y="0"/>
+          <a:ext cx="0" cy="0"/>
+          <a:chOff x="0" y="0"/>
+          <a:chExt cx="0" cy="0"/>
+        </a:xfrm>
+      </p:grpSpPr>
       <p:sp>
         <p:nvSpPr>
           <p:cNvPr id="2" name="Title 1"/>
@@ -9160,8 +13829,8 @@
 </p:sld>
 </file>
 
-<file path=ppt/slides/slide19.xml><?xml version="1.0" encoding="utf-8"?>
-<p:sld xmlns:a="http://schemas.openxmlformats.org/drawingml/2006/main" xmlns:p="http://schemas.openxmlformats.org/presentationml/2006/main" xmlns:r="http://schemas.openxmlformats.org/officeDocument/2006/relationships">
+<file path=ppt/slides/slide31.xml><?xml version="1.0" encoding="utf-8"?>
+<p:sld xmlns:a="http://schemas.openxmlformats.org/drawingml/2006/main" xmlns:r="http://schemas.openxmlformats.org/officeDocument/2006/relationships" xmlns:p="http://schemas.openxmlformats.org/presentationml/2006/main">
   <p:cSld>
     <p:spTree>
       <p:nvGrpSpPr>
@@ -9169,7 +13838,14 @@
         <p:cNvGrpSpPr/>
         <p:nvPr/>
       </p:nvGrpSpPr>
-      <p:grpSpPr/>
+      <p:grpSpPr>
+        <a:xfrm>
+          <a:off x="0" y="0"/>
+          <a:ext cx="0" cy="0"/>
+          <a:chOff x="0" y="0"/>
+          <a:chExt cx="0" cy="0"/>
+        </a:xfrm>
+      </p:grpSpPr>
       <p:sp>
         <p:nvSpPr>
           <p:cNvPr id="2" name="Title 1"/>
@@ -9287,8 +13963,8 @@
 </p:sld>
 </file>
 
-<file path=ppt/slides/slide2.xml><?xml version="1.0" encoding="utf-8"?>
-<p:sld xmlns:a="http://schemas.openxmlformats.org/drawingml/2006/main" xmlns:p="http://schemas.openxmlformats.org/presentationml/2006/main" xmlns:r="http://schemas.openxmlformats.org/officeDocument/2006/relationships">
+<file path=ppt/slides/slide32.xml><?xml version="1.0" encoding="utf-8"?>
+<p:sld xmlns:a="http://schemas.openxmlformats.org/drawingml/2006/main" xmlns:r="http://schemas.openxmlformats.org/officeDocument/2006/relationships" xmlns:p="http://schemas.openxmlformats.org/presentationml/2006/main">
   <p:cSld>
     <p:spTree>
       <p:nvGrpSpPr>
@@ -9296,7 +13972,14 @@
         <p:cNvGrpSpPr/>
         <p:nvPr/>
       </p:nvGrpSpPr>
-      <p:grpSpPr/>
+      <p:grpSpPr>
+        <a:xfrm>
+          <a:off x="0" y="0"/>
+          <a:ext cx="0" cy="0"/>
+          <a:chOff x="0" y="0"/>
+          <a:chExt cx="0" cy="0"/>
+        </a:xfrm>
+      </p:grpSpPr>
       <p:sp>
         <p:nvSpPr>
           <p:cNvPr id="2" name="Title 1"/>
@@ -9313,7 +13996,7 @@
           <a:lstStyle/>
           <a:p>
             <a:r>
-              <a:t>Agenda</a:t>
+              <a:t>¿Qué resuelve Medallion?</a:t>
             </a:r>
           </a:p>
         </p:txBody>
@@ -9337,7 +14020,15 @@
               <a:defRPr sz="1600"/>
             </a:pPr>
             <a:r>
-              <a:t>1. Data Warehouses: el punto de partida</a:t>
+              <a:t>1. Organización clara: cada dato tiene un lugar definido</a:t>
+            </a:r>
+          </a:p>
+          <a:p>
+            <a:pPr lvl="1">
+              <a:defRPr sz="1400"/>
+            </a:pPr>
+            <a:r>
+              <a:t>No más /datos/ventas_v2_final_FINAL.parquet</a:t>
             </a:r>
           </a:p>
           <a:p>
@@ -9345,7 +14036,15 @@
               <a:defRPr sz="1600"/>
             </a:pPr>
             <a:r>
-              <a:t>2. Data Lakes: la promesa del almacenamiento masivo</a:t>
+              <a:t>2. Reprocesamiento: si algo falla en Gold, reprocesas desde Bronze</a:t>
+            </a:r>
+          </a:p>
+          <a:p>
+            <a:pPr lvl="1">
+              <a:defRPr sz="1400"/>
+            </a:pPr>
+            <a:r>
+              <a:t>Bronze es inmutable — siempre puedes volver al dato original</a:t>
             </a:r>
           </a:p>
           <a:p>
@@ -9353,7 +14052,15 @@
               <a:defRPr sz="1600"/>
             </a:pPr>
             <a:r>
-              <a:t>3. Problemas del Data Lake: el Data Swamp</a:t>
+              <a:t>3. Confianza: los consumidores saben que Gold está limpio y validado</a:t>
+            </a:r>
+          </a:p>
+          <a:p>
+            <a:pPr lvl="1">
+              <a:defRPr sz="1400"/>
+            </a:pPr>
+            <a:r>
+              <a:t>No necesitan preguntarle al ingeniero '¿puedo confiar en esta tabla?'</a:t>
             </a:r>
           </a:p>
           <a:p>
@@ -9361,7 +14068,15 @@
               <a:defRPr sz="1600"/>
             </a:pPr>
             <a:r>
-              <a:t>4. Data Lakehouse: lo mejor de ambos mundos</a:t>
+              <a:t>4. Separación de responsabilidades:</a:t>
+            </a:r>
+          </a:p>
+          <a:p>
+            <a:pPr lvl="1">
+              <a:defRPr sz="1400"/>
+            </a:pPr>
+            <a:r>
+              <a:t>Ingenieros → Bronze y Silver | Analistas → Silver y Gold</a:t>
             </a:r>
           </a:p>
           <a:p>
@@ -9369,23 +14084,7 @@
               <a:defRPr sz="1600"/>
             </a:pPr>
             <a:r>
-              <a:t>5. Arquitectura Medallion (Bronze, Silver, Gold)</a:t>
-            </a:r>
-          </a:p>
-          <a:p>
-            <a:pPr>
-              <a:defRPr sz="1600"/>
-            </a:pPr>
-            <a:r>
-              <a:t>6. Catálogo y gobierno de datos (Unity Catalog)</a:t>
-            </a:r>
-          </a:p>
-          <a:p>
-            <a:pPr>
-              <a:defRPr sz="1600"/>
-            </a:pPr>
-            <a:r>
-              <a:t>7. Tecnologías, herramientas y evolución histórica</a:t>
+              <a:t>5. Linaje trazable: Bronze → Silver → Gold = origen claro de cada dato</a:t>
             </a:r>
           </a:p>
         </p:txBody>
@@ -9398,8 +14097,8 @@
 </p:sld>
 </file>
 
-<file path=ppt/slides/slide20.xml><?xml version="1.0" encoding="utf-8"?>
-<p:sld xmlns:a="http://schemas.openxmlformats.org/drawingml/2006/main" xmlns:p="http://schemas.openxmlformats.org/presentationml/2006/main" xmlns:r="http://schemas.openxmlformats.org/officeDocument/2006/relationships">
+<file path=ppt/slides/slide33.xml><?xml version="1.0" encoding="utf-8"?>
+<p:sld xmlns:a="http://schemas.openxmlformats.org/drawingml/2006/main" xmlns:r="http://schemas.openxmlformats.org/officeDocument/2006/relationships" xmlns:p="http://schemas.openxmlformats.org/presentationml/2006/main">
   <p:cSld>
     <p:spTree>
       <p:nvGrpSpPr>
@@ -9407,7 +14106,14 @@
         <p:cNvGrpSpPr/>
         <p:nvPr/>
       </p:nvGrpSpPr>
-      <p:grpSpPr/>
+      <p:grpSpPr>
+        <a:xfrm>
+          <a:off x="0" y="0"/>
+          <a:ext cx="0" cy="0"/>
+          <a:chOff x="0" y="0"/>
+          <a:chExt cx="0" cy="0"/>
+        </a:xfrm>
+      </p:grpSpPr>
       <p:sp>
         <p:nvSpPr>
           <p:cNvPr id="2" name="Title 1"/>
@@ -9424,7 +14130,7 @@
           <a:lstStyle/>
           <a:p>
             <a:r>
-              <a:t>¿Qué resuelve Medallion?</a:t>
+              <a:t>Bronze — Capa de ingesta (Raw)</a:t>
             </a:r>
           </a:p>
         </p:txBody>
@@ -9448,7 +14154,15 @@
               <a:defRPr sz="1600"/>
             </a:pPr>
             <a:r>
-              <a:t>1. Organización clara: cada dato tiene un lugar definido</a:t>
+              <a:t>Ingesta directa sin transformar el CONTENIDO — los datos llegan tal cual</a:t>
+            </a:r>
+          </a:p>
+          <a:p>
+            <a:pPr>
+              <a:defRPr sz="1600"/>
+            </a:pPr>
+            <a:r>
+              <a:t>Las fuentes pueden ser cualquier formato: CSV, JSON, XML, APIs, JDBC...</a:t>
             </a:r>
           </a:p>
           <a:p>
@@ -9456,7 +14170,23 @@
               <a:defRPr sz="1400"/>
             </a:pPr>
             <a:r>
-              <a:t>No más /datos/ventas_v2_final_FINAL.parquet</a:t>
+              <a:t>Se LEEN en su formato original (spark.read.csv, .json, .jdbc, etc.)</a:t>
+            </a:r>
+          </a:p>
+          <a:p>
+            <a:pPr lvl="1">
+              <a:defRPr sz="1400"/>
+            </a:pPr>
+            <a:r>
+              <a:t>Se ESCRIBEN en formato Delta para tener ACID y time travel</a:t>
+            </a:r>
+          </a:p>
+          <a:p>
+            <a:pPr lvl="1">
+              <a:defRPr sz="1400"/>
+            </a:pPr>
+            <a:r>
+              <a:t>El contenido no se modifica — solo cambia el formato de almacenamiento</a:t>
             </a:r>
           </a:p>
           <a:p>
@@ -9464,15 +14194,7 @@
               <a:defRPr sz="1600"/>
             </a:pPr>
             <a:r>
-              <a:t>2. Reprocesamiento: si algo falla en Gold, reprocesas desde Bronze</a:t>
-            </a:r>
-          </a:p>
-          <a:p>
-            <a:pPr lvl="1">
-              <a:defRPr sz="1400"/>
-            </a:pPr>
-            <a:r>
-              <a:t>Bronze es inmutable — siempre puedes volver al dato original</a:t>
+              <a:t>Append-only, inmutable — nunca se borran ni sobrescriben datos de Bronze</a:t>
             </a:r>
           </a:p>
           <a:p>
@@ -9480,15 +14202,7 @@
               <a:defRPr sz="1600"/>
             </a:pPr>
             <a:r>
-              <a:t>3. Confianza: los consumidores saben que Gold está limpio y validado</a:t>
-            </a:r>
-          </a:p>
-          <a:p>
-            <a:pPr lvl="1">
-              <a:defRPr sz="1400"/>
-            </a:pPr>
-            <a:r>
-              <a:t>No necesitan preguntarle al ingeniero '¿puedo confiar en esta tabla?'</a:t>
+              <a:t>Fuente de verdad histórica — si algo falla, reprocesas desde aquí</a:t>
             </a:r>
           </a:p>
           <a:p>
@@ -9496,15 +14210,7 @@
               <a:defRPr sz="1600"/>
             </a:pPr>
             <a:r>
-              <a:t>4. Separación de responsabilidades:</a:t>
-            </a:r>
-          </a:p>
-          <a:p>
-            <a:pPr lvl="1">
-              <a:defRPr sz="1400"/>
-            </a:pPr>
-            <a:r>
-              <a:t>Ingenieros → Bronze y Silver | Analistas → Silver y Gold</a:t>
+              <a:t>Se agregan metadatos de ingesta: timestamp, archivo fuente, batch ID</a:t>
             </a:r>
           </a:p>
           <a:p>
@@ -9512,7 +14218,7 @@
               <a:defRPr sz="1600"/>
             </a:pPr>
             <a:r>
-              <a:t>5. Linaje trazable: Bronze → Silver → Gold = origen claro de cada dato</a:t>
+              <a:t>Tip: leer todo como STRING evita perder datos por errores de tipo</a:t>
             </a:r>
           </a:p>
         </p:txBody>
@@ -9525,8 +14231,8 @@
 </p:sld>
 </file>
 
-<file path=ppt/slides/slide21.xml><?xml version="1.0" encoding="utf-8"?>
-<p:sld xmlns:a="http://schemas.openxmlformats.org/drawingml/2006/main" xmlns:p="http://schemas.openxmlformats.org/presentationml/2006/main" xmlns:r="http://schemas.openxmlformats.org/officeDocument/2006/relationships">
+<file path=ppt/slides/slide34.xml><?xml version="1.0" encoding="utf-8"?>
+<p:sld xmlns:a="http://schemas.openxmlformats.org/drawingml/2006/main" xmlns:r="http://schemas.openxmlformats.org/officeDocument/2006/relationships" xmlns:p="http://schemas.openxmlformats.org/presentationml/2006/main">
   <p:cSld>
     <p:spTree>
       <p:nvGrpSpPr>
@@ -9534,7 +14240,14 @@
         <p:cNvGrpSpPr/>
         <p:nvPr/>
       </p:nvGrpSpPr>
-      <p:grpSpPr/>
+      <p:grpSpPr>
+        <a:xfrm>
+          <a:off x="0" y="0"/>
+          <a:ext cx="0" cy="0"/>
+          <a:chOff x="0" y="0"/>
+          <a:chExt cx="0" cy="0"/>
+        </a:xfrm>
+      </p:grpSpPr>
       <p:sp>
         <p:nvSpPr>
           <p:cNvPr id="2" name="Title 1"/>
@@ -9551,7 +14264,7 @@
           <a:lstStyle/>
           <a:p>
             <a:r>
-              <a:t>Bronze — Capa de ingesta (Raw)</a:t>
+              <a:t>Silver — Capa de limpieza (Cleaned)</a:t>
             </a:r>
           </a:p>
         </p:txBody>
@@ -9575,7 +14288,7 @@
               <a:defRPr sz="1600"/>
             </a:pPr>
             <a:r>
-              <a:t>Ingesta directa sin transformar el CONTENIDO — los datos llegan tal cual</a:t>
+              <a:t>Datos limpiados, validados y conformados</a:t>
             </a:r>
           </a:p>
           <a:p>
@@ -9583,31 +14296,7 @@
               <a:defRPr sz="1600"/>
             </a:pPr>
             <a:r>
-              <a:t>Las fuentes pueden ser cualquier formato: CSV, JSON, XML, APIs, JDBC...</a:t>
-            </a:r>
-          </a:p>
-          <a:p>
-            <a:pPr lvl="1">
-              <a:defRPr sz="1400"/>
-            </a:pPr>
-            <a:r>
-              <a:t>Se LEEN en su formato original (spark.read.csv, .json, .jdbc, etc.)</a:t>
-            </a:r>
-          </a:p>
-          <a:p>
-            <a:pPr lvl="1">
-              <a:defRPr sz="1400"/>
-            </a:pPr>
-            <a:r>
-              <a:t>Se ESCRIBEN en formato Delta para tener ACID y time travel</a:t>
-            </a:r>
-          </a:p>
-          <a:p>
-            <a:pPr lvl="1">
-              <a:defRPr sz="1400"/>
-            </a:pPr>
-            <a:r>
-              <a:t>El contenido no se modifica — solo cambia el formato de almacenamiento</a:t>
+              <a:t>Deduplicación: eliminar registros duplicados</a:t>
             </a:r>
           </a:p>
           <a:p>
@@ -9615,7 +14304,7 @@
               <a:defRPr sz="1600"/>
             </a:pPr>
             <a:r>
-              <a:t>Append-only, inmutable — nunca se borran ni sobrescriben datos de Bronze</a:t>
+              <a:t>Validación de tipos: strings a fechas, enteros, etc.</a:t>
             </a:r>
           </a:p>
           <a:p>
@@ -9623,7 +14312,7 @@
               <a:defRPr sz="1600"/>
             </a:pPr>
             <a:r>
-              <a:t>Fuente de verdad histórica — si algo falla, reprocesas desde aquí</a:t>
+              <a:t>Filtrado: remover registros inválidos o corruptos</a:t>
             </a:r>
           </a:p>
           <a:p>
@@ -9631,7 +14320,7 @@
               <a:defRPr sz="1600"/>
             </a:pPr>
             <a:r>
-              <a:t>Se agregan metadatos de ingesta: timestamp, archivo fuente, batch ID</a:t>
+              <a:t>Joins entre fuentes: combinar datos de diferentes orígenes</a:t>
             </a:r>
           </a:p>
           <a:p>
@@ -9639,7 +14328,23 @@
               <a:defRPr sz="1600"/>
             </a:pPr>
             <a:r>
-              <a:t>Tip: leer todo como STRING evita perder datos por errores de tipo</a:t>
+              <a:t>Schema enforcement: si un campo no cumple el tipo → tabla de errores</a:t>
+            </a:r>
+          </a:p>
+          <a:p>
+            <a:pPr>
+              <a:defRPr sz="1600"/>
+            </a:pPr>
+            <a:r>
+              <a:t>Los datos de Silver son confiables para análisis y data science</a:t>
+            </a:r>
+          </a:p>
+          <a:p>
+            <a:pPr>
+              <a:defRPr sz="1600"/>
+            </a:pPr>
+            <a:r>
+              <a:t>Ejemplo: users_cleaned, transactions_validated</a:t>
             </a:r>
           </a:p>
         </p:txBody>
@@ -9652,8 +14357,8 @@
 </p:sld>
 </file>
 
-<file path=ppt/slides/slide22.xml><?xml version="1.0" encoding="utf-8"?>
-<p:sld xmlns:a="http://schemas.openxmlformats.org/drawingml/2006/main" xmlns:p="http://schemas.openxmlformats.org/presentationml/2006/main" xmlns:r="http://schemas.openxmlformats.org/officeDocument/2006/relationships">
+<file path=ppt/slides/slide35.xml><?xml version="1.0" encoding="utf-8"?>
+<p:sld xmlns:a="http://schemas.openxmlformats.org/drawingml/2006/main" xmlns:r="http://schemas.openxmlformats.org/officeDocument/2006/relationships" xmlns:p="http://schemas.openxmlformats.org/presentationml/2006/main">
   <p:cSld>
     <p:spTree>
       <p:nvGrpSpPr>
@@ -9661,7 +14366,14 @@
         <p:cNvGrpSpPr/>
         <p:nvPr/>
       </p:nvGrpSpPr>
-      <p:grpSpPr/>
+      <p:grpSpPr>
+        <a:xfrm>
+          <a:off x="0" y="0"/>
+          <a:ext cx="0" cy="0"/>
+          <a:chOff x="0" y="0"/>
+          <a:chExt cx="0" cy="0"/>
+        </a:xfrm>
+      </p:grpSpPr>
       <p:sp>
         <p:nvSpPr>
           <p:cNvPr id="2" name="Title 1"/>
@@ -9678,7 +14390,7 @@
           <a:lstStyle/>
           <a:p>
             <a:r>
-              <a:t>Silver — Capa de limpieza (Cleaned)</a:t>
+              <a:t>Gold — Capa de negocio (Business)</a:t>
             </a:r>
           </a:p>
         </p:txBody>
@@ -9702,7 +14414,7 @@
               <a:defRPr sz="1600"/>
             </a:pPr>
             <a:r>
-              <a:t>Datos limpiados, validados y conformados</a:t>
+              <a:t>Agregaciones de negocio: revenue mensual, usuarios activos, conversión</a:t>
             </a:r>
           </a:p>
           <a:p>
@@ -9710,7 +14422,7 @@
               <a:defRPr sz="1600"/>
             </a:pPr>
             <a:r>
-              <a:t>Deduplicación: eliminar registros duplicados</a:t>
+              <a:t>KPIs y métricas calculadas según reglas del negocio</a:t>
             </a:r>
           </a:p>
           <a:p>
@@ -9718,7 +14430,7 @@
               <a:defRPr sz="1600"/>
             </a:pPr>
             <a:r>
-              <a:t>Validación de tipos: strings a fechas, enteros, etc.</a:t>
+              <a:t>Tablas dimensionales en star schema (hechos + dimensiones)</a:t>
             </a:r>
           </a:p>
           <a:p>
@@ -9726,7 +14438,7 @@
               <a:defRPr sz="1600"/>
             </a:pPr>
             <a:r>
-              <a:t>Filtrado: remover registros inválidos o corruptos</a:t>
+              <a:t>Optimizado para dashboards de BI y consumo por ejecutivos</a:t>
             </a:r>
           </a:p>
           <a:p>
@@ -9734,7 +14446,7 @@
               <a:defRPr sz="1600"/>
             </a:pPr>
             <a:r>
-              <a:t>Joins entre fuentes: combinar datos de diferentes orígenes</a:t>
+              <a:t>Feature stores: variables calculadas para modelos de ML</a:t>
             </a:r>
           </a:p>
           <a:p>
@@ -9742,7 +14454,7 @@
               <a:defRPr sz="1600"/>
             </a:pPr>
             <a:r>
-              <a:t>Schema enforcement: si un campo no cumple el tipo → tabla de errores</a:t>
+              <a:t>Acceso vía SQL, APIs, o herramientas de BI (Power BI, Tableau)</a:t>
             </a:r>
           </a:p>
           <a:p>
@@ -9750,15 +14462,7 @@
               <a:defRPr sz="1600"/>
             </a:pPr>
             <a:r>
-              <a:t>Los datos de Silver son confiables para análisis y data science</a:t>
-            </a:r>
-          </a:p>
-          <a:p>
-            <a:pPr>
-              <a:defRPr sz="1600"/>
-            </a:pPr>
-            <a:r>
-              <a:t>Ejemplo: users_cleaned, transactions_validated</a:t>
+              <a:t>Ejemplo: revenue_monthly, active_users_daily, churn_features</a:t>
             </a:r>
           </a:p>
         </p:txBody>
@@ -9771,8 +14475,8 @@
 </p:sld>
 </file>
 
-<file path=ppt/slides/slide23.xml><?xml version="1.0" encoding="utf-8"?>
-<p:sld xmlns:a="http://schemas.openxmlformats.org/drawingml/2006/main" xmlns:p="http://schemas.openxmlformats.org/presentationml/2006/main" xmlns:r="http://schemas.openxmlformats.org/officeDocument/2006/relationships">
+<file path=ppt/slides/slide36.xml><?xml version="1.0" encoding="utf-8"?>
+<p:sld xmlns:a="http://schemas.openxmlformats.org/drawingml/2006/main" xmlns:r="http://schemas.openxmlformats.org/officeDocument/2006/relationships" xmlns:p="http://schemas.openxmlformats.org/presentationml/2006/main">
   <p:cSld>
     <p:spTree>
       <p:nvGrpSpPr>
@@ -9780,7 +14484,14 @@
         <p:cNvGrpSpPr/>
         <p:nvPr/>
       </p:nvGrpSpPr>
-      <p:grpSpPr/>
+      <p:grpSpPr>
+        <a:xfrm>
+          <a:off x="0" y="0"/>
+          <a:ext cx="0" cy="0"/>
+          <a:chOff x="0" y="0"/>
+          <a:chExt cx="0" cy="0"/>
+        </a:xfrm>
+      </p:grpSpPr>
       <p:sp>
         <p:nvSpPr>
           <p:cNvPr id="2" name="Title 1"/>
@@ -9797,7 +14508,7 @@
           <a:lstStyle/>
           <a:p>
             <a:r>
-              <a:t>Gold — Capa de negocio (Business)</a:t>
+              <a:t>Medallion — Comparación por capa</a:t>
             </a:r>
           </a:p>
         </p:txBody>
@@ -9821,7 +14532,15 @@
               <a:defRPr sz="1600"/>
             </a:pPr>
             <a:r>
-              <a:t>Agregaciones de negocio: revenue mensual, usuarios activos, conversión</a:t>
+              <a:t>Bronze | Calidad: cruda | Esquema: flexible | Usuarios: ingenieros</a:t>
+            </a:r>
+          </a:p>
+          <a:p>
+            <a:pPr lvl="1">
+              <a:defRPr sz="1400"/>
+            </a:pPr>
+            <a:r>
+              <a:t>Actualización: append | Formato: Parquet/JSON | Ej: logs_raw</a:t>
             </a:r>
           </a:p>
           <a:p>
@@ -9829,7 +14548,15 @@
               <a:defRPr sz="1600"/>
             </a:pPr>
             <a:r>
-              <a:t>KPIs y métricas calculadas según reglas del negocio</a:t>
+              <a:t>Silver | Calidad: limpia | Esquema: enforced | Usuarios: analistas/DS</a:t>
+            </a:r>
+          </a:p>
+          <a:p>
+            <a:pPr lvl="1">
+              <a:defRPr sz="1400"/>
+            </a:pPr>
+            <a:r>
+              <a:t>Actualización: merge/upsert | Formato: Delta/Iceberg | Ej: users_cleaned</a:t>
             </a:r>
           </a:p>
           <a:p>
@@ -9837,39 +14564,15 @@
               <a:defRPr sz="1600"/>
             </a:pPr>
             <a:r>
-              <a:t>Tablas dimensionales en star schema (hechos + dimensiones)</a:t>
-            </a:r>
-          </a:p>
-          <a:p>
-            <a:pPr>
-              <a:defRPr sz="1600"/>
-            </a:pPr>
-            <a:r>
-              <a:t>Optimizado para dashboards de BI y consumo por ejecutivos</a:t>
-            </a:r>
-          </a:p>
-          <a:p>
-            <a:pPr>
-              <a:defRPr sz="1600"/>
-            </a:pPr>
-            <a:r>
-              <a:t>Feature stores: variables calculadas para modelos de ML</a:t>
-            </a:r>
-          </a:p>
-          <a:p>
-            <a:pPr>
-              <a:defRPr sz="1600"/>
-            </a:pPr>
-            <a:r>
-              <a:t>Acceso vía SQL, APIs, o herramientas de BI (Power BI, Tableau)</a:t>
-            </a:r>
-          </a:p>
-          <a:p>
-            <a:pPr>
-              <a:defRPr sz="1600"/>
-            </a:pPr>
-            <a:r>
-              <a:t>Ejemplo: revenue_monthly, active_users_daily, churn_features</a:t>
+              <a:t>Gold | Calidad: agregada | Esquema: star schema | Usuarios: BI/ejecutivos</a:t>
+            </a:r>
+          </a:p>
+          <a:p>
+            <a:pPr lvl="1">
+              <a:defRPr sz="1400"/>
+            </a:pPr>
+            <a:r>
+              <a:t>Actualización: scheduled | Formato: Delta/Iceberg | Ej: revenue_monthly</a:t>
             </a:r>
           </a:p>
         </p:txBody>
@@ -9882,8 +14585,8 @@
 </p:sld>
 </file>
 
-<file path=ppt/slides/slide24.xml><?xml version="1.0" encoding="utf-8"?>
-<p:sld xmlns:a="http://schemas.openxmlformats.org/drawingml/2006/main" xmlns:p="http://schemas.openxmlformats.org/presentationml/2006/main" xmlns:r="http://schemas.openxmlformats.org/officeDocument/2006/relationships">
+<file path=ppt/slides/slide37.xml><?xml version="1.0" encoding="utf-8"?>
+<p:sld xmlns:a="http://schemas.openxmlformats.org/drawingml/2006/main" xmlns:r="http://schemas.openxmlformats.org/officeDocument/2006/relationships" xmlns:p="http://schemas.openxmlformats.org/presentationml/2006/main">
   <p:cSld>
     <p:spTree>
       <p:nvGrpSpPr>
@@ -9891,7 +14594,14 @@
         <p:cNvGrpSpPr/>
         <p:nvPr/>
       </p:nvGrpSpPr>
-      <p:grpSpPr/>
+      <p:grpSpPr>
+        <a:xfrm>
+          <a:off x="0" y="0"/>
+          <a:ext cx="0" cy="0"/>
+          <a:chOff x="0" y="0"/>
+          <a:chExt cx="0" cy="0"/>
+        </a:xfrm>
+      </p:grpSpPr>
       <p:sp>
         <p:nvSpPr>
           <p:cNvPr id="2" name="Title 1"/>
@@ -9908,7 +14618,7 @@
           <a:lstStyle/>
           <a:p>
             <a:r>
-              <a:t>Medallion — Comparación por capa</a:t>
+              <a:t>Beneficios de Medallion + Lakehouse</a:t>
             </a:r>
           </a:p>
         </p:txBody>
@@ -9932,7 +14642,7 @@
               <a:defRPr sz="1600"/>
             </a:pPr>
             <a:r>
-              <a:t>Bronze | Calidad: cruda | Esquema: flexible | Usuarios: ingenieros</a:t>
+              <a:t>Para el equipo de datos:</a:t>
             </a:r>
           </a:p>
           <a:p>
@@ -9940,7 +14650,31 @@
               <a:defRPr sz="1400"/>
             </a:pPr>
             <a:r>
-              <a:t>Actualización: append | Formato: Parquet/JSON | Ej: logs_raw</a:t>
+              <a:t>Organización clara del pipeline de datos</a:t>
+            </a:r>
+          </a:p>
+          <a:p>
+            <a:pPr lvl="1">
+              <a:defRPr sz="1400"/>
+            </a:pPr>
+            <a:r>
+              <a:t>Reprocesamiento fácil desde Bronze si algo falla</a:t>
+            </a:r>
+          </a:p>
+          <a:p>
+            <a:pPr lvl="1">
+              <a:defRPr sz="1400"/>
+            </a:pPr>
+            <a:r>
+              <a:t>Linaje de datos trazable — sabes de dónde viene cada dato</a:t>
+            </a:r>
+          </a:p>
+          <a:p>
+            <a:pPr lvl="1">
+              <a:defRPr sz="1400"/>
+            </a:pPr>
+            <a:r>
+              <a:t>Testing entre capas, separación de responsabilidades</a:t>
             </a:r>
           </a:p>
           <a:p>
@@ -9948,7 +14682,7 @@
               <a:defRPr sz="1600"/>
             </a:pPr>
             <a:r>
-              <a:t>Silver | Calidad: limpia | Esquema: enforced | Usuarios: analistas/DS</a:t>
+              <a:t>Para el negocio:</a:t>
             </a:r>
           </a:p>
           <a:p>
@@ -9956,15 +14690,7 @@
               <a:defRPr sz="1400"/>
             </a:pPr>
             <a:r>
-              <a:t>Actualización: merge/upsert | Formato: Delta/Iceberg | Ej: users_cleaned</a:t>
-            </a:r>
-          </a:p>
-          <a:p>
-            <a:pPr>
-              <a:defRPr sz="1600"/>
-            </a:pPr>
-            <a:r>
-              <a:t>Gold | Calidad: agregada | Esquema: star schema | Usuarios: BI/ejecutivos</a:t>
+              <a:t>Datos confiables y auditables</a:t>
             </a:r>
           </a:p>
           <a:p>
@@ -9972,7 +14698,23 @@
               <a:defRPr sz="1400"/>
             </a:pPr>
             <a:r>
-              <a:t>Actualización: scheduled | Formato: Delta/Iceberg | Ej: revenue_monthly</a:t>
+              <a:t>Menor time-to-insight (sin copiar entre sistemas)</a:t>
+            </a:r>
+          </a:p>
+          <a:p>
+            <a:pPr lvl="1">
+              <a:defRPr sz="1400"/>
+            </a:pPr>
+            <a:r>
+              <a:t>Un solo sistema para BI + ML</a:t>
+            </a:r>
+          </a:p>
+          <a:p>
+            <a:pPr lvl="1">
+              <a:defRPr sz="1400"/>
+            </a:pPr>
+            <a:r>
+              <a:t>Costos reducidos vs warehouse separado</a:t>
             </a:r>
           </a:p>
         </p:txBody>
@@ -9985,8 +14727,8 @@
 </p:sld>
 </file>
 
-<file path=ppt/slides/slide25.xml><?xml version="1.0" encoding="utf-8"?>
-<p:sld xmlns:a="http://schemas.openxmlformats.org/drawingml/2006/main" xmlns:p="http://schemas.openxmlformats.org/presentationml/2006/main" xmlns:r="http://schemas.openxmlformats.org/officeDocument/2006/relationships">
+<file path=ppt/slides/slide38.xml><?xml version="1.0" encoding="utf-8"?>
+<p:sld xmlns:a="http://schemas.openxmlformats.org/drawingml/2006/main" xmlns:r="http://schemas.openxmlformats.org/officeDocument/2006/relationships" xmlns:p="http://schemas.openxmlformats.org/presentationml/2006/main">
   <p:cSld>
     <p:spTree>
       <p:nvGrpSpPr>
@@ -9994,7 +14736,14 @@
         <p:cNvGrpSpPr/>
         <p:nvPr/>
       </p:nvGrpSpPr>
-      <p:grpSpPr/>
+      <p:grpSpPr>
+        <a:xfrm>
+          <a:off x="0" y="0"/>
+          <a:ext cx="0" cy="0"/>
+          <a:chOff x="0" y="0"/>
+          <a:chExt cx="0" cy="0"/>
+        </a:xfrm>
+      </p:grpSpPr>
       <p:sp>
         <p:nvSpPr>
           <p:cNvPr id="2" name="Title 1"/>
@@ -10011,7 +14760,7 @@
           <a:lstStyle/>
           <a:p>
             <a:r>
-              <a:t>Beneficios de Medallion + Lakehouse</a:t>
+              <a:t>Medallion — Limitaciones y críticas</a:t>
             </a:r>
           </a:p>
         </p:txBody>
@@ -10035,7 +14784,7 @@
               <a:defRPr sz="1600"/>
             </a:pPr>
             <a:r>
-              <a:t>Para el equipo de datos:</a:t>
+              <a:t>Duplicación de datos: Bronze + Silver + Gold = 3 copias del dato</a:t>
             </a:r>
           </a:p>
           <a:p>
@@ -10043,7 +14792,15 @@
               <a:defRPr sz="1400"/>
             </a:pPr>
             <a:r>
-              <a:t>Organización clara del pipeline de datos</a:t>
+              <a:t>En datasets masivos, el costo de storage se multiplica</a:t>
+            </a:r>
+          </a:p>
+          <a:p>
+            <a:pPr>
+              <a:defRPr sz="1600"/>
+            </a:pPr>
+            <a:r>
+              <a:t>Latencia: flujo secuencial Bronze→Silver→Gold agrega delay</a:t>
             </a:r>
           </a:p>
           <a:p>
@@ -10051,7 +14808,15 @@
               <a:defRPr sz="1400"/>
             </a:pPr>
             <a:r>
-              <a:t>Reprocesamiento fácil desde Bronze si algo falla</a:t>
+              <a:t>Complicado para casos de uso real-time / streaming</a:t>
+            </a:r>
+          </a:p>
+          <a:p>
+            <a:pPr>
+              <a:defRPr sz="1600"/>
+            </a:pPr>
+            <a:r>
+              <a:t>Ingeniería pesada en Silver: deduplicar, limpiar, conformar</a:t>
             </a:r>
           </a:p>
           <a:p>
@@ -10059,7 +14824,15 @@
               <a:defRPr sz="1400"/>
             </a:pPr>
             <a:r>
-              <a:t>Linaje de datos trazable — sabes de dónde viene cada dato</a:t>
+              <a:t>Requiere ingenieros especializados y mucho mantenimiento</a:t>
+            </a:r>
+          </a:p>
+          <a:p>
+            <a:pPr>
+              <a:defRPr sz="1600"/>
+            </a:pPr>
+            <a:r>
+              <a:t>Falta de contexto de negocio en capas tempranas:</a:t>
             </a:r>
           </a:p>
           <a:p>
@@ -10067,7 +14840,15 @@
               <a:defRPr sz="1400"/>
             </a:pPr>
             <a:r>
-              <a:t>Testing entre capas, separación de responsabilidades</a:t>
+              <a:t>Bronze y Silver son técnicas — el negocio solo aparece en Gold</a:t>
+            </a:r>
+          </a:p>
+          <a:p>
+            <a:pPr lvl="1">
+              <a:defRPr sz="1400"/>
+            </a:pPr>
+            <a:r>
+              <a:t>Los consumidores deben esperar a que Gold esté listo</a:t>
             </a:r>
           </a:p>
           <a:p>
@@ -10075,39 +14856,7 @@
               <a:defRPr sz="1600"/>
             </a:pPr>
             <a:r>
-              <a:t>Para el negocio:</a:t>
-            </a:r>
-          </a:p>
-          <a:p>
-            <a:pPr lvl="1">
-              <a:defRPr sz="1400"/>
-            </a:pPr>
-            <a:r>
-              <a:t>Datos confiables y auditables</a:t>
-            </a:r>
-          </a:p>
-          <a:p>
-            <a:pPr lvl="1">
-              <a:defRPr sz="1400"/>
-            </a:pPr>
-            <a:r>
-              <a:t>Menor time-to-insight (sin copiar entre sistemas)</a:t>
-            </a:r>
-          </a:p>
-          <a:p>
-            <a:pPr lvl="1">
-              <a:defRPr sz="1400"/>
-            </a:pPr>
-            <a:r>
-              <a:t>Un solo sistema para BI + ML</a:t>
-            </a:r>
-          </a:p>
-          <a:p>
-            <a:pPr lvl="1">
-              <a:defRPr sz="1400"/>
-            </a:pPr>
-            <a:r>
-              <a:t>Costos reducidos vs warehouse separado</a:t>
+              <a:t>Medallion no es perfecto — es un punto de partida sólido</a:t>
             </a:r>
           </a:p>
         </p:txBody>
@@ -10120,8 +14869,8 @@
 </p:sld>
 </file>
 
-<file path=ppt/slides/slide26.xml><?xml version="1.0" encoding="utf-8"?>
-<p:sld xmlns:a="http://schemas.openxmlformats.org/drawingml/2006/main" xmlns:p="http://schemas.openxmlformats.org/presentationml/2006/main" xmlns:r="http://schemas.openxmlformats.org/officeDocument/2006/relationships">
+<file path=ppt/slides/slide39.xml><?xml version="1.0" encoding="utf-8"?>
+<p:sld xmlns:a="http://schemas.openxmlformats.org/drawingml/2006/main" xmlns:r="http://schemas.openxmlformats.org/officeDocument/2006/relationships" xmlns:p="http://schemas.openxmlformats.org/presentationml/2006/main">
   <p:cSld>
     <p:spTree>
       <p:nvGrpSpPr>
@@ -10129,7 +14878,14 @@
         <p:cNvGrpSpPr/>
         <p:nvPr/>
       </p:nvGrpSpPr>
-      <p:grpSpPr/>
+      <p:grpSpPr>
+        <a:xfrm>
+          <a:off x="0" y="0"/>
+          <a:ext cx="0" cy="0"/>
+          <a:chOff x="0" y="0"/>
+          <a:chExt cx="0" cy="0"/>
+        </a:xfrm>
+      </p:grpSpPr>
       <p:sp>
         <p:nvSpPr>
           <p:cNvPr id="2" name="Title 1"/>
@@ -10146,7 +14902,7 @@
           <a:lstStyle/>
           <a:p>
             <a:r>
-              <a:t>Medallion — Limitaciones y críticas</a:t>
+              <a:t>Más allá de Medallion — Enfoques complementarios</a:t>
             </a:r>
           </a:p>
         </p:txBody>
@@ -10170,7 +14926,7 @@
               <a:defRPr sz="1600"/>
             </a:pPr>
             <a:r>
-              <a:t>Duplicación de datos: Bronze + Silver + Gold = 3 copias del dato</a:t>
+              <a:t>Data Mesh (Zhamak Dehghani, 2019):</a:t>
             </a:r>
           </a:p>
           <a:p>
@@ -10178,7 +14934,23 @@
               <a:defRPr sz="1400"/>
             </a:pPr>
             <a:r>
-              <a:t>En datasets masivos, el costo de storage se multiplica</a:t>
+              <a:t>Propiedad descentralizada — cada dominio es dueño de sus datos</a:t>
+            </a:r>
+          </a:p>
+          <a:p>
+            <a:pPr lvl="1">
+              <a:defRPr sz="1400"/>
+            </a:pPr>
+            <a:r>
+              <a:t>No reemplaza Medallion, opera a otro nivel (organización, no pipeline)</a:t>
+            </a:r>
+          </a:p>
+          <a:p>
+            <a:pPr lvl="1">
+              <a:defRPr sz="1400"/>
+            </a:pPr>
+            <a:r>
+              <a:t>Puedes tener Medallion DENTRO de cada dominio de un Data Mesh</a:t>
             </a:r>
           </a:p>
           <a:p>
@@ -10186,7 +14958,7 @@
               <a:defRPr sz="1600"/>
             </a:pPr>
             <a:r>
-              <a:t>Latencia: flujo secuencial Bronze→Silver→Gold agrega delay</a:t>
+              <a:t>Data Vault (Dan Linstedt):</a:t>
             </a:r>
           </a:p>
           <a:p>
@@ -10194,7 +14966,15 @@
               <a:defRPr sz="1400"/>
             </a:pPr>
             <a:r>
-              <a:t>Complicado para casos de uso real-time / streaming</a:t>
+              <a:t>Modelado para warehouses con foco en historicidad y auditoría</a:t>
+            </a:r>
+          </a:p>
+          <a:p>
+            <a:pPr lvl="1">
+              <a:defRPr sz="1400"/>
+            </a:pPr>
+            <a:r>
+              <a:t>Se puede usar dentro de Silver como técnica de modelado</a:t>
             </a:r>
           </a:p>
           <a:p>
@@ -10202,7 +14982,7 @@
               <a:defRPr sz="1600"/>
             </a:pPr>
             <a:r>
-              <a:t>Ingeniería pesada en Silver: deduplicar, limpiar, conformar</a:t>
+              <a:t>Data Fabric (Gartner):</a:t>
             </a:r>
           </a:p>
           <a:p>
@@ -10210,7 +14990,15 @@
               <a:defRPr sz="1400"/>
             </a:pPr>
             <a:r>
-              <a:t>Requiere ingenieros especializados y mucho mantenimiento</a:t>
+              <a:t>Capa de integración con metadata activa y AI para conectar fuentes</a:t>
+            </a:r>
+          </a:p>
+          <a:p>
+            <a:pPr lvl="1">
+              <a:defRPr sz="1400"/>
+            </a:pPr>
+            <a:r>
+              <a:t>Más un concepto de conectividad que de organización de capas</a:t>
             </a:r>
           </a:p>
           <a:p>
@@ -10218,31 +15006,7 @@
               <a:defRPr sz="1600"/>
             </a:pPr>
             <a:r>
-              <a:t>Falta de contexto de negocio en capas tempranas:</a:t>
-            </a:r>
-          </a:p>
-          <a:p>
-            <a:pPr lvl="1">
-              <a:defRPr sz="1400"/>
-            </a:pPr>
-            <a:r>
-              <a:t>Bronze y Silver son técnicas — el negocio solo aparece en Gold</a:t>
-            </a:r>
-          </a:p>
-          <a:p>
-            <a:pPr lvl="1">
-              <a:defRPr sz="1400"/>
-            </a:pPr>
-            <a:r>
-              <a:t>Los consumidores deben esperar a que Gold esté listo</a:t>
-            </a:r>
-          </a:p>
-          <a:p>
-            <a:pPr>
-              <a:defRPr sz="1600"/>
-            </a:pPr>
-            <a:r>
-              <a:t>Medallion no es perfecto — es un punto de partida sólido</a:t>
+              <a:t>Capa Platinum: extensión de Medallion para real-time y AI/ML</a:t>
             </a:r>
           </a:p>
         </p:txBody>
@@ -10255,8 +15019,8 @@
 </p:sld>
 </file>
 
-<file path=ppt/slides/slide27.xml><?xml version="1.0" encoding="utf-8"?>
-<p:sld xmlns:a="http://schemas.openxmlformats.org/drawingml/2006/main" xmlns:p="http://schemas.openxmlformats.org/presentationml/2006/main" xmlns:r="http://schemas.openxmlformats.org/officeDocument/2006/relationships">
+<file path=ppt/slides/slide4.xml><?xml version="1.0" encoding="utf-8"?>
+<p:sld xmlns:a="http://schemas.openxmlformats.org/drawingml/2006/main" xmlns:r="http://schemas.openxmlformats.org/officeDocument/2006/relationships" xmlns:p="http://schemas.openxmlformats.org/presentationml/2006/main">
   <p:cSld>
     <p:spTree>
       <p:nvGrpSpPr>
@@ -10264,7 +15028,14 @@
         <p:cNvGrpSpPr/>
         <p:nvPr/>
       </p:nvGrpSpPr>
-      <p:grpSpPr/>
+      <p:grpSpPr>
+        <a:xfrm>
+          <a:off x="0" y="0"/>
+          <a:ext cx="0" cy="0"/>
+          <a:chOff x="0" y="0"/>
+          <a:chExt cx="0" cy="0"/>
+        </a:xfrm>
+      </p:grpSpPr>
       <p:sp>
         <p:nvSpPr>
           <p:cNvPr id="2" name="Title 1"/>
@@ -10281,7 +15052,7 @@
           <a:lstStyle/>
           <a:p>
             <a:r>
-              <a:t>Más allá de Medallion — Enfoques complementarios</a:t>
+              <a:t>Data Warehouse — ¿Qué es?</a:t>
             </a:r>
           </a:p>
         </p:txBody>
@@ -10305,31 +15076,7 @@
               <a:defRPr sz="1600"/>
             </a:pPr>
             <a:r>
-              <a:t>Data Mesh (Zhamak Dehghani, 2019):</a:t>
-            </a:r>
-          </a:p>
-          <a:p>
-            <a:pPr lvl="1">
-              <a:defRPr sz="1400"/>
-            </a:pPr>
-            <a:r>
-              <a:t>Propiedad descentralizada — cada dominio es dueño de sus datos</a:t>
-            </a:r>
-          </a:p>
-          <a:p>
-            <a:pPr lvl="1">
-              <a:defRPr sz="1400"/>
-            </a:pPr>
-            <a:r>
-              <a:t>No reemplaza Medallion, opera a otro nivel (organización, no pipeline)</a:t>
-            </a:r>
-          </a:p>
-          <a:p>
-            <a:pPr lvl="1">
-              <a:defRPr sz="1400"/>
-            </a:pPr>
-            <a:r>
-              <a:t>Puedes tener Medallion DENTRO de cada dominio de un Data Mesh</a:t>
+              <a:t>Repositorio centralizado de datos estructurados</a:t>
             </a:r>
           </a:p>
           <a:p>
@@ -10337,23 +15084,7 @@
               <a:defRPr sz="1600"/>
             </a:pPr>
             <a:r>
-              <a:t>Data Vault (Dan Linstedt):</a:t>
-            </a:r>
-          </a:p>
-          <a:p>
-            <a:pPr lvl="1">
-              <a:defRPr sz="1400"/>
-            </a:pPr>
-            <a:r>
-              <a:t>Modelado para warehouses con foco en historicidad y auditoría</a:t>
-            </a:r>
-          </a:p>
-          <a:p>
-            <a:pPr lvl="1">
-              <a:defRPr sz="1400"/>
-            </a:pPr>
-            <a:r>
-              <a:t>Se puede usar dentro de Silver como técnica de modelado</a:t>
+              <a:t>Esquema definido antes de cargar → Schema-on-Write</a:t>
             </a:r>
           </a:p>
           <a:p>
@@ -10361,23 +15092,7 @@
               <a:defRPr sz="1600"/>
             </a:pPr>
             <a:r>
-              <a:t>Data Fabric (Gartner):</a:t>
-            </a:r>
-          </a:p>
-          <a:p>
-            <a:pPr lvl="1">
-              <a:defRPr sz="1400"/>
-            </a:pPr>
-            <a:r>
-              <a:t>Capa de integración con metadata activa y AI para conectar fuentes</a:t>
-            </a:r>
-          </a:p>
-          <a:p>
-            <a:pPr lvl="1">
-              <a:defRPr sz="1400"/>
-            </a:pPr>
-            <a:r>
-              <a:t>Más un concepto de conectividad que de organización de capas</a:t>
+              <a:t>Optimizado para consultas analíticas (OLAP)</a:t>
             </a:r>
           </a:p>
           <a:p>
@@ -10385,7 +15100,23 @@
               <a:defRPr sz="1600"/>
             </a:pPr>
             <a:r>
-              <a:t>Capa Platinum: extensión de Medallion para real-time y AI/ML</a:t>
+              <a:t>Datos limpios, transformados y confiables</a:t>
+            </a:r>
+          </a:p>
+          <a:p>
+            <a:pPr>
+              <a:defRPr sz="1600"/>
+            </a:pPr>
+            <a:r>
+              <a:t>SQL como lenguaje principal de consulta</a:t>
+            </a:r>
+          </a:p>
+          <a:p>
+            <a:pPr>
+              <a:defRPr sz="1600"/>
+            </a:pPr>
+            <a:r>
+              <a:t>Ejemplos: Teradata, Oracle DW, Amazon Redshift, Snowflake (modo clásico)</a:t>
             </a:r>
           </a:p>
         </p:txBody>
@@ -10398,8 +15129,8 @@
 </p:sld>
 </file>
 
-<file path=ppt/slides/slide28.xml><?xml version="1.0" encoding="utf-8"?>
-<p:sld xmlns:a="http://schemas.openxmlformats.org/drawingml/2006/main" xmlns:p="http://schemas.openxmlformats.org/presentationml/2006/main" xmlns:r="http://schemas.openxmlformats.org/officeDocument/2006/relationships">
+<file path=ppt/slides/slide40.xml><?xml version="1.0" encoding="utf-8"?>
+<p:sld xmlns:a="http://schemas.openxmlformats.org/drawingml/2006/main" xmlns:r="http://schemas.openxmlformats.org/officeDocument/2006/relationships" xmlns:p="http://schemas.openxmlformats.org/presentationml/2006/main">
   <p:cSld>
     <p:spTree>
       <p:nvGrpSpPr>
@@ -10407,7 +15138,14 @@
         <p:cNvGrpSpPr/>
         <p:nvPr/>
       </p:nvGrpSpPr>
-      <p:grpSpPr/>
+      <p:grpSpPr>
+        <a:xfrm>
+          <a:off x="0" y="0"/>
+          <a:ext cx="0" cy="0"/>
+          <a:chOff x="0" y="0"/>
+          <a:chExt cx="0" cy="0"/>
+        </a:xfrm>
+      </p:grpSpPr>
       <p:sp>
         <p:nvSpPr>
           <p:cNvPr id="2" name="Title 1"/>
@@ -10533,8 +15271,8 @@
 </p:sld>
 </file>
 
-<file path=ppt/slides/slide29.xml><?xml version="1.0" encoding="utf-8"?>
-<p:sld xmlns:a="http://schemas.openxmlformats.org/drawingml/2006/main" xmlns:p="http://schemas.openxmlformats.org/presentationml/2006/main" xmlns:r="http://schemas.openxmlformats.org/officeDocument/2006/relationships">
+<file path=ppt/slides/slide41.xml><?xml version="1.0" encoding="utf-8"?>
+<p:sld xmlns:a="http://schemas.openxmlformats.org/drawingml/2006/main" xmlns:r="http://schemas.openxmlformats.org/officeDocument/2006/relationships" xmlns:p="http://schemas.openxmlformats.org/presentationml/2006/main">
   <p:cSld>
     <p:spTree>
       <p:nvGrpSpPr>
@@ -10542,7 +15280,14 @@
         <p:cNvGrpSpPr/>
         <p:nvPr/>
       </p:nvGrpSpPr>
-      <p:grpSpPr/>
+      <p:grpSpPr>
+        <a:xfrm>
+          <a:off x="0" y="0"/>
+          <a:ext cx="0" cy="0"/>
+          <a:chOff x="0" y="0"/>
+          <a:chExt cx="0" cy="0"/>
+        </a:xfrm>
+      </p:grpSpPr>
       <p:sp>
         <p:nvSpPr>
           <p:cNvPr id="2" name="Title 1"/>
@@ -10593,8 +15338,8 @@
 </p:sld>
 </file>
 
-<file path=ppt/slides/slide3.xml><?xml version="1.0" encoding="utf-8"?>
-<p:sld xmlns:a="http://schemas.openxmlformats.org/drawingml/2006/main" xmlns:p="http://schemas.openxmlformats.org/presentationml/2006/main" xmlns:r="http://schemas.openxmlformats.org/officeDocument/2006/relationships">
+<file path=ppt/slides/slide42.xml><?xml version="1.0" encoding="utf-8"?>
+<p:sld xmlns:a="http://schemas.openxmlformats.org/drawingml/2006/main" xmlns:r="http://schemas.openxmlformats.org/officeDocument/2006/relationships" xmlns:p="http://schemas.openxmlformats.org/presentationml/2006/main">
   <p:cSld>
     <p:spTree>
       <p:nvGrpSpPr>
@@ -10602,7 +15347,14 @@
         <p:cNvGrpSpPr/>
         <p:nvPr/>
       </p:nvGrpSpPr>
-      <p:grpSpPr/>
+      <p:grpSpPr>
+        <a:xfrm>
+          <a:off x="0" y="0"/>
+          <a:ext cx="0" cy="0"/>
+          <a:chOff x="0" y="0"/>
+          <a:chExt cx="0" cy="0"/>
+        </a:xfrm>
+      </p:grpSpPr>
       <p:sp>
         <p:nvSpPr>
           <p:cNvPr id="2" name="Title 1"/>
@@ -10619,7 +15371,1464 @@
           <a:lstStyle/>
           <a:p>
             <a:r>
-              <a:t>01 — Data Warehouse</a:t>
+              <a:t>El mundo ANTES de Unity Catalog</a:t>
+            </a:r>
+          </a:p>
+        </p:txBody>
+      </p:sp>
+      <p:sp>
+        <p:nvSpPr>
+          <p:cNvPr id="3" name="Content Placeholder 2"/>
+          <p:cNvSpPr>
+            <a:spLocks noGrp="1"/>
+          </p:cNvSpPr>
+          <p:nvPr>
+            <p:ph idx="1"/>
+          </p:nvPr>
+        </p:nvSpPr>
+        <p:spPr/>
+        <p:txBody>
+          <a:bodyPr/>
+          <a:lstStyle/>
+          <a:p>
+            <a:pPr>
+              <a:defRPr sz="1600"/>
+            </a:pPr>
+            <a:r>
+              <a:t>Databricks usaba Hive Metastore — un catálogo por workspace</a:t>
+            </a:r>
+          </a:p>
+          <a:p>
+            <a:pPr>
+              <a:defRPr sz="1600"/>
+            </a:pPr>
+            <a:r>
+              <a:t>Problema 1 — Silos: cada workspace tenía su propio metastore</a:t>
+            </a:r>
+          </a:p>
+          <a:p>
+            <a:pPr lvl="1">
+              <a:defRPr sz="1400"/>
+            </a:pPr>
+            <a:r>
+              <a:t>Equipo A no podía ver las tablas del Equipo B</a:t>
+            </a:r>
+          </a:p>
+          <a:p>
+            <a:pPr lvl="1">
+              <a:defRPr sz="1400"/>
+            </a:pPr>
+            <a:r>
+              <a:t>Para compartir datos → copiar archivos o dar acceso al storage</a:t>
+            </a:r>
+          </a:p>
+          <a:p>
+            <a:pPr>
+              <a:defRPr sz="1600"/>
+            </a:pPr>
+            <a:r>
+              <a:t>Problema 2 — Seguridad débil: permisos se manejaban a nivel de storage</a:t>
+            </a:r>
+          </a:p>
+          <a:p>
+            <a:pPr lvl="1">
+              <a:defRPr sz="1400"/>
+            </a:pPr>
+            <a:r>
+              <a:t>No había GRANT/REVOKE sobre tablas. Todo o nada.</a:t>
+            </a:r>
+          </a:p>
+          <a:p>
+            <a:pPr>
+              <a:defRPr sz="1600"/>
+            </a:pPr>
+            <a:r>
+              <a:t>Problema 3 — Sin linaje ni auditoría: nadie sabía quién accedía a qué</a:t>
+            </a:r>
+          </a:p>
+          <a:p>
+            <a:pPr>
+              <a:defRPr sz="1600"/>
+            </a:pPr>
+            <a:r>
+              <a:t>Problema 4 — Namespace de 2 niveles: schema.tabla (sin catálogo)</a:t>
+            </a:r>
+          </a:p>
+          <a:p>
+            <a:pPr lvl="1">
+              <a:defRPr sz="1400"/>
+            </a:pPr>
+            <a:r>
+              <a:t>Difícil separar dev/prod o dominios de negocio</a:t>
+            </a:r>
+          </a:p>
+        </p:txBody>
+      </p:sp>
+    </p:spTree>
+  </p:cSld>
+  <p:clrMapOvr>
+    <a:masterClrMapping/>
+  </p:clrMapOvr>
+</p:sld>
+</file>
+
+<file path=ppt/slides/slide43.xml><?xml version="1.0" encoding="utf-8"?>
+<p:sld xmlns:a="http://schemas.openxmlformats.org/drawingml/2006/main" xmlns:r="http://schemas.openxmlformats.org/officeDocument/2006/relationships" xmlns:p="http://schemas.openxmlformats.org/presentationml/2006/main">
+  <p:cSld>
+    <p:spTree>
+      <p:nvGrpSpPr>
+        <p:cNvPr id="1" name=""/>
+        <p:cNvGrpSpPr/>
+        <p:nvPr/>
+      </p:nvGrpSpPr>
+      <p:grpSpPr>
+        <a:xfrm>
+          <a:off x="0" y="0"/>
+          <a:ext cx="0" cy="0"/>
+          <a:chOff x="0" y="0"/>
+          <a:chExt cx="0" cy="0"/>
+        </a:xfrm>
+      </p:grpSpPr>
+      <p:sp>
+        <p:nvSpPr>
+          <p:cNvPr id="2" name="Title 1"/>
+          <p:cNvSpPr>
+            <a:spLocks noGrp="1"/>
+          </p:cNvSpPr>
+          <p:nvPr>
+            <p:ph type="title"/>
+          </p:nvPr>
+        </p:nvSpPr>
+        <p:spPr/>
+        <p:txBody>
+          <a:bodyPr/>
+          <a:lstStyle/>
+          <a:p>
+            <a:r>
+              <a:t>¿Qué es Unity Catalog?</a:t>
+            </a:r>
+          </a:p>
+        </p:txBody>
+      </p:sp>
+      <p:sp>
+        <p:nvSpPr>
+          <p:cNvPr id="3" name="Content Placeholder 2"/>
+          <p:cNvSpPr>
+            <a:spLocks noGrp="1"/>
+          </p:cNvSpPr>
+          <p:nvPr>
+            <p:ph idx="1"/>
+          </p:nvPr>
+        </p:nvSpPr>
+        <p:spPr/>
+        <p:txBody>
+          <a:bodyPr/>
+          <a:lstStyle/>
+          <a:p>
+            <a:pPr>
+              <a:defRPr sz="1600"/>
+            </a:pPr>
+            <a:r>
+              <a:t>Capa de gobernanza centralizada de Databricks (2022, open source 2024)</a:t>
+            </a:r>
+          </a:p>
+          <a:p>
+            <a:pPr>
+              <a:defRPr sz="1600"/>
+            </a:pPr>
+            <a:r>
+              <a:t>UN solo metastore compartido por TODOS los workspaces de la región</a:t>
+            </a:r>
+          </a:p>
+          <a:p>
+            <a:pPr lvl="1">
+              <a:defRPr sz="1400"/>
+            </a:pPr>
+            <a:r>
+              <a:t>→ Se acabaron los silos. Todos ven el mismo catálogo de datos.</a:t>
+            </a:r>
+          </a:p>
+          <a:p>
+            <a:pPr>
+              <a:defRPr sz="1600"/>
+            </a:pPr>
+            <a:r>
+              <a:t>Gobierna no solo tablas, sino TODOS los activos:</a:t>
+            </a:r>
+          </a:p>
+          <a:p>
+            <a:pPr lvl="1">
+              <a:defRPr sz="1400"/>
+            </a:pPr>
+            <a:r>
+              <a:t>Tablas, vistas, volúmenes (archivos), modelos de ML, funciones</a:t>
+            </a:r>
+          </a:p>
+          <a:p>
+            <a:pPr>
+              <a:defRPr sz="1600"/>
+            </a:pPr>
+            <a:r>
+              <a:t>Namespace de 3 niveles: catálogo.esquema.tabla</a:t>
+            </a:r>
+          </a:p>
+          <a:p>
+            <a:pPr lvl="1">
+              <a:defRPr sz="1400"/>
+            </a:pPr>
+            <a:r>
+              <a:t>Antes: schema.tabla → Ahora: medallion.silver.travel_times</a:t>
+            </a:r>
+          </a:p>
+          <a:p>
+            <a:pPr lvl="1">
+              <a:defRPr sz="1400"/>
+            </a:pPr>
+            <a:r>
+              <a:t>El nivel extra permite separar dominios, ambientes, proyectos</a:t>
+            </a:r>
+          </a:p>
+          <a:p>
+            <a:pPr>
+              <a:defRPr sz="1600"/>
+            </a:pPr>
+            <a:r>
+              <a:t>Analogía: Hive Metastore era una biblioteca por piso.</a:t>
+            </a:r>
+          </a:p>
+          <a:p>
+            <a:pPr lvl="1">
+              <a:defRPr sz="1400"/>
+            </a:pPr>
+            <a:r>
+              <a:t>Unity Catalog es UNA biblioteca central con catálogo unificado.</a:t>
+            </a:r>
+          </a:p>
+        </p:txBody>
+      </p:sp>
+    </p:spTree>
+  </p:cSld>
+  <p:clrMapOvr>
+    <a:masterClrMapping/>
+  </p:clrMapOvr>
+</p:sld>
+</file>
+
+<file path=ppt/slides/slide44.xml><?xml version="1.0" encoding="utf-8"?>
+<p:sld xmlns:a="http://schemas.openxmlformats.org/drawingml/2006/main" xmlns:r="http://schemas.openxmlformats.org/officeDocument/2006/relationships" xmlns:p="http://schemas.openxmlformats.org/presentationml/2006/main">
+  <p:cSld>
+    <p:spTree>
+      <p:nvGrpSpPr>
+        <p:cNvPr id="1" name=""/>
+        <p:cNvGrpSpPr/>
+        <p:nvPr/>
+      </p:nvGrpSpPr>
+      <p:grpSpPr>
+        <a:xfrm>
+          <a:off x="0" y="0"/>
+          <a:ext cx="0" cy="0"/>
+          <a:chOff x="0" y="0"/>
+          <a:chExt cx="0" cy="0"/>
+        </a:xfrm>
+      </p:grpSpPr>
+      <p:sp>
+        <p:nvSpPr>
+          <p:cNvPr id="2" name="Title 1"/>
+          <p:cNvSpPr>
+            <a:spLocks noGrp="1"/>
+          </p:cNvSpPr>
+          <p:nvPr>
+            <p:ph type="title"/>
+          </p:nvPr>
+        </p:nvSpPr>
+        <p:spPr/>
+        <p:txBody>
+          <a:bodyPr/>
+          <a:lstStyle/>
+          <a:p>
+            <a:r>
+              <a:t>¿Qué resuelve Unity Catalog?</a:t>
+            </a:r>
+          </a:p>
+        </p:txBody>
+      </p:sp>
+      <p:sp>
+        <p:nvSpPr>
+          <p:cNvPr id="3" name="Content Placeholder 2"/>
+          <p:cNvSpPr>
+            <a:spLocks noGrp="1"/>
+          </p:cNvSpPr>
+          <p:nvPr>
+            <p:ph idx="1"/>
+          </p:nvPr>
+        </p:nvSpPr>
+        <p:spPr/>
+        <p:txBody>
+          <a:bodyPr/>
+          <a:lstStyle/>
+          <a:p>
+            <a:pPr>
+              <a:defRPr sz="1600"/>
+            </a:pPr>
+            <a:r>
+              <a:t>1. Descubrimiento: buscar tablas, ver esquemas, explorar datos</a:t>
+            </a:r>
+          </a:p>
+          <a:p>
+            <a:pPr lvl="1">
+              <a:defRPr sz="1400"/>
+            </a:pPr>
+            <a:r>
+              <a:t>'¿Existe una tabla de clientes?' → búsqueda en el catálogo</a:t>
+            </a:r>
+          </a:p>
+          <a:p>
+            <a:pPr>
+              <a:defRPr sz="1600"/>
+            </a:pPr>
+            <a:r>
+              <a:t>2. Control de acceso: GRANT/REVOKE con SQL estándar (ANSI SQL)</a:t>
+            </a:r>
+          </a:p>
+          <a:p>
+            <a:pPr lvl="1">
+              <a:defRPr sz="1400"/>
+            </a:pPr>
+            <a:r>
+              <a:t>GRANT SELECT ON TABLE medallion.gold.metrics TO analistas</a:t>
+            </a:r>
+          </a:p>
+          <a:p>
+            <a:pPr lvl="1">
+              <a:defRPr sz="1400"/>
+            </a:pPr>
+            <a:r>
+              <a:t>Herencia: permisos en catálogo → esquemas → tablas</a:t>
+            </a:r>
+          </a:p>
+          <a:p>
+            <a:pPr>
+              <a:defRPr sz="1600"/>
+            </a:pPr>
+            <a:r>
+              <a:t>3. Linaje automático: de dónde viene cada tabla, quién la consume</a:t>
+            </a:r>
+          </a:p>
+          <a:p>
+            <a:pPr lvl="1">
+              <a:defRPr sz="1400"/>
+            </a:pPr>
+            <a:r>
+              <a:t>gold.city_metrics ← silver.travel_times ← bronze.raw</a:t>
+            </a:r>
+          </a:p>
+          <a:p>
+            <a:pPr>
+              <a:defRPr sz="1600"/>
+            </a:pPr>
+            <a:r>
+              <a:t>4. Auditoría: log completo de quién accedió a qué y cuándo</a:t>
+            </a:r>
+          </a:p>
+          <a:p>
+            <a:pPr lvl="1">
+              <a:defRPr sz="1400"/>
+            </a:pPr>
+            <a:r>
+              <a:t>Cumplimiento regulatorio: GDPR, HIPAA, Habeas Data</a:t>
+            </a:r>
+          </a:p>
+        </p:txBody>
+      </p:sp>
+    </p:spTree>
+  </p:cSld>
+  <p:clrMapOvr>
+    <a:masterClrMapping/>
+  </p:clrMapOvr>
+</p:sld>
+</file>
+
+<file path=ppt/slides/slide45.xml><?xml version="1.0" encoding="utf-8"?>
+<p:sld xmlns:a="http://schemas.openxmlformats.org/drawingml/2006/main" xmlns:r="http://schemas.openxmlformats.org/officeDocument/2006/relationships" xmlns:p="http://schemas.openxmlformats.org/presentationml/2006/main">
+  <p:cSld>
+    <p:spTree>
+      <p:nvGrpSpPr>
+        <p:cNvPr id="1" name=""/>
+        <p:cNvGrpSpPr/>
+        <p:nvPr/>
+      </p:nvGrpSpPr>
+      <p:grpSpPr>
+        <a:xfrm>
+          <a:off x="0" y="0"/>
+          <a:ext cx="0" cy="0"/>
+          <a:chOff x="0" y="0"/>
+          <a:chExt cx="0" cy="0"/>
+        </a:xfrm>
+      </p:grpSpPr>
+      <p:sp>
+        <p:nvSpPr>
+          <p:cNvPr id="2" name="Title 1"/>
+          <p:cNvSpPr>
+            <a:spLocks noGrp="1"/>
+          </p:cNvSpPr>
+          <p:nvPr>
+            <p:ph type="title"/>
+          </p:nvPr>
+        </p:nvSpPr>
+        <p:spPr/>
+        <p:txBody>
+          <a:bodyPr/>
+          <a:lstStyle/>
+          <a:p>
+            <a:r>
+              <a:t>Unity Catalog — Control de acceso en Medallion</a:t>
+            </a:r>
+          </a:p>
+        </p:txBody>
+      </p:sp>
+      <p:sp>
+        <p:nvSpPr>
+          <p:cNvPr id="3" name="Content Placeholder 2"/>
+          <p:cNvSpPr>
+            <a:spLocks noGrp="1"/>
+          </p:cNvSpPr>
+          <p:nvPr>
+            <p:ph idx="1"/>
+          </p:nvPr>
+        </p:nvSpPr>
+        <p:spPr/>
+        <p:txBody>
+          <a:bodyPr/>
+          <a:lstStyle/>
+          <a:p>
+            <a:pPr>
+              <a:defRPr sz="1600"/>
+            </a:pPr>
+            <a:r>
+              <a:t>Principio de mínimo privilegio por capa:</a:t>
+            </a:r>
+          </a:p>
+          <a:p>
+            <a:pPr lvl="1">
+              <a:defRPr sz="1400"/>
+            </a:pPr>
+            <a:r>
+              <a:t>Ingenieros de datos → Bronze + Silver + Gold (lectura y escritura)</a:t>
+            </a:r>
+          </a:p>
+          <a:p>
+            <a:pPr lvl="1">
+              <a:defRPr sz="1400"/>
+            </a:pPr>
+            <a:r>
+              <a:t>Científicos de datos → Silver + Gold (lectura)</a:t>
+            </a:r>
+          </a:p>
+          <a:p>
+            <a:pPr lvl="1">
+              <a:defRPr sz="1400"/>
+            </a:pPr>
+            <a:r>
+              <a:t>Analistas de BI → Solo Gold (lectura)</a:t>
+            </a:r>
+          </a:p>
+          <a:p>
+            <a:pPr lvl="1">
+              <a:defRPr sz="1400"/>
+            </a:pPr>
+            <a:r>
+              <a:t>Ejecutivos → Solo Gold vía dashboards (ni siquiera SQL directo)</a:t>
+            </a:r>
+          </a:p>
+          <a:p>
+            <a:pPr>
+              <a:defRPr sz="1600"/>
+            </a:pPr>
+            <a:r>
+              <a:t>Ejemplo en SQL:</a:t>
+            </a:r>
+          </a:p>
+          <a:p>
+            <a:pPr lvl="1">
+              <a:defRPr sz="1400"/>
+            </a:pPr>
+            <a:r>
+              <a:t>GRANT USE CATALOG ON CATALOG medallion TO ingenieros</a:t>
+            </a:r>
+          </a:p>
+          <a:p>
+            <a:pPr lvl="1">
+              <a:defRPr sz="1400"/>
+            </a:pPr>
+            <a:r>
+              <a:t>GRANT SELECT ON SCHEMA medallion.gold TO analistas</a:t>
+            </a:r>
+          </a:p>
+          <a:p>
+            <a:pPr lvl="1">
+              <a:defRPr sz="1400"/>
+            </a:pPr>
+            <a:r>
+              <a:t>REVOKE ALL ON SCHEMA medallion.bronze FROM analistas</a:t>
+            </a:r>
+          </a:p>
+          <a:p>
+            <a:pPr>
+              <a:defRPr sz="1600"/>
+            </a:pPr>
+            <a:r>
+              <a:t>Los permisos viajan con los datos — no dependen del workspace</a:t>
+            </a:r>
+          </a:p>
+        </p:txBody>
+      </p:sp>
+    </p:spTree>
+  </p:cSld>
+  <p:clrMapOvr>
+    <a:masterClrMapping/>
+  </p:clrMapOvr>
+</p:sld>
+</file>
+
+<file path=ppt/slides/slide46.xml><?xml version="1.0" encoding="utf-8"?>
+<p:sld xmlns:a="http://schemas.openxmlformats.org/drawingml/2006/main" xmlns:r="http://schemas.openxmlformats.org/officeDocument/2006/relationships" xmlns:p="http://schemas.openxmlformats.org/presentationml/2006/main">
+  <p:cSld>
+    <p:spTree>
+      <p:nvGrpSpPr>
+        <p:cNvPr id="1" name=""/>
+        <p:cNvGrpSpPr/>
+        <p:nvPr/>
+      </p:nvGrpSpPr>
+      <p:grpSpPr>
+        <a:xfrm>
+          <a:off x="0" y="0"/>
+          <a:ext cx="0" cy="0"/>
+          <a:chOff x="0" y="0"/>
+          <a:chExt cx="0" cy="0"/>
+        </a:xfrm>
+      </p:grpSpPr>
+      <p:sp>
+        <p:nvSpPr>
+          <p:cNvPr id="2" name="Title 1"/>
+          <p:cNvSpPr>
+            <a:spLocks noGrp="1"/>
+          </p:cNvSpPr>
+          <p:nvPr>
+            <p:ph type="title"/>
+          </p:nvPr>
+        </p:nvSpPr>
+        <p:spPr/>
+        <p:txBody>
+          <a:bodyPr/>
+          <a:lstStyle/>
+          <a:p>
+            <a:r>
+              <a:t>Unity Catalog — Linaje, tags y auditoría</a:t>
+            </a:r>
+          </a:p>
+        </p:txBody>
+      </p:sp>
+      <p:sp>
+        <p:nvSpPr>
+          <p:cNvPr id="3" name="Content Placeholder 2"/>
+          <p:cNvSpPr>
+            <a:spLocks noGrp="1"/>
+          </p:cNvSpPr>
+          <p:nvPr>
+            <p:ph idx="1"/>
+          </p:nvPr>
+        </p:nvSpPr>
+        <p:spPr/>
+        <p:txBody>
+          <a:bodyPr/>
+          <a:lstStyle/>
+          <a:p>
+            <a:pPr>
+              <a:defRPr sz="1600"/>
+            </a:pPr>
+            <a:r>
+              <a:t>Data Lineage (automático, sin código):</a:t>
+            </a:r>
+          </a:p>
+          <a:p>
+            <a:pPr lvl="1">
+              <a:defRPr sz="1400"/>
+            </a:pPr>
+            <a:r>
+              <a:t>Visualización gráfica: tabla origen → transformaciones → tabla destino</a:t>
+            </a:r>
+          </a:p>
+          <a:p>
+            <a:pPr lvl="1">
+              <a:defRPr sz="1400"/>
+            </a:pPr>
+            <a:r>
+              <a:t>¿Un dashboard muestra datos raros? → seguir el linaje hasta Bronze</a:t>
+            </a:r>
+          </a:p>
+          <a:p>
+            <a:pPr>
+              <a:defRPr sz="1600"/>
+            </a:pPr>
+            <a:r>
+              <a:t>Tags y clasificación de datos:</a:t>
+            </a:r>
+          </a:p>
+          <a:p>
+            <a:pPr lvl="1">
+              <a:defRPr sz="1400"/>
+            </a:pPr>
+            <a:r>
+              <a:t>Marcar columnas sensibles: email → PII, salario → CONFIDENCIAL</a:t>
+            </a:r>
+          </a:p>
+          <a:p>
+            <a:pPr lvl="1">
+              <a:defRPr sz="1400"/>
+            </a:pPr>
+            <a:r>
+              <a:t>Políticas automáticas: si tiene tag PII → solo acceso con aprobación</a:t>
+            </a:r>
+          </a:p>
+          <a:p>
+            <a:pPr>
+              <a:defRPr sz="1600"/>
+            </a:pPr>
+            <a:r>
+              <a:t>Auditoría completa:</a:t>
+            </a:r>
+          </a:p>
+          <a:p>
+            <a:pPr lvl="1">
+              <a:defRPr sz="1400"/>
+            </a:pPr>
+            <a:r>
+              <a:t>Cada SELECT, INSERT, UPDATE queda registrado</a:t>
+            </a:r>
+          </a:p>
+          <a:p>
+            <a:pPr lvl="1">
+              <a:defRPr sz="1400"/>
+            </a:pPr>
+            <a:r>
+              <a:t>¿Quién consultó la tabla de salarios el viernes a las 11pm?</a:t>
+            </a:r>
+          </a:p>
+          <a:p>
+            <a:pPr lvl="1">
+              <a:defRPr sz="1400"/>
+            </a:pPr>
+            <a:r>
+              <a:t>Esencial para compliance y respuesta a incidentes</a:t>
+            </a:r>
+          </a:p>
+        </p:txBody>
+      </p:sp>
+    </p:spTree>
+  </p:cSld>
+  <p:clrMapOvr>
+    <a:masterClrMapping/>
+  </p:clrMapOvr>
+</p:sld>
+</file>
+
+<file path=ppt/slides/slide47.xml><?xml version="1.0" encoding="utf-8"?>
+<p:sld xmlns:a="http://schemas.openxmlformats.org/drawingml/2006/main" xmlns:r="http://schemas.openxmlformats.org/officeDocument/2006/relationships" xmlns:p="http://schemas.openxmlformats.org/presentationml/2006/main">
+  <p:cSld>
+    <p:spTree>
+      <p:nvGrpSpPr>
+        <p:cNvPr id="1" name=""/>
+        <p:cNvGrpSpPr/>
+        <p:nvPr/>
+      </p:nvGrpSpPr>
+      <p:grpSpPr>
+        <a:xfrm>
+          <a:off x="0" y="0"/>
+          <a:ext cx="0" cy="0"/>
+          <a:chOff x="0" y="0"/>
+          <a:chExt cx="0" cy="0"/>
+        </a:xfrm>
+      </p:grpSpPr>
+      <p:sp>
+        <p:nvSpPr>
+          <p:cNvPr id="2" name="Title 1"/>
+          <p:cNvSpPr>
+            <a:spLocks noGrp="1"/>
+          </p:cNvSpPr>
+          <p:nvPr>
+            <p:ph type="title"/>
+          </p:nvPr>
+        </p:nvSpPr>
+        <p:spPr/>
+        <p:txBody>
+          <a:bodyPr/>
+          <a:lstStyle/>
+          <a:p>
+            <a:r>
+              <a:t>Unity Catalog — Estructura recomendada</a:t>
+            </a:r>
+          </a:p>
+        </p:txBody>
+      </p:sp>
+      <p:sp>
+        <p:nvSpPr>
+          <p:cNvPr id="3" name="Content Placeholder 2"/>
+          <p:cNvSpPr>
+            <a:spLocks noGrp="1"/>
+          </p:cNvSpPr>
+          <p:nvPr>
+            <p:ph idx="1"/>
+          </p:nvPr>
+        </p:nvSpPr>
+        <p:spPr/>
+        <p:txBody>
+          <a:bodyPr/>
+          <a:lstStyle/>
+          <a:p>
+            <a:pPr>
+              <a:defRPr sz="1600"/>
+            </a:pPr>
+            <a:r>
+              <a:t>Organización con Medallion + Unity Catalog:</a:t>
+            </a:r>
+          </a:p>
+          <a:p>
+            <a:pPr lvl="1">
+              <a:defRPr sz="1400"/>
+            </a:pPr>
+            <a:r>
+              <a:t>Catálogo: medallion (o nombre del proyecto/dominio)</a:t>
+            </a:r>
+          </a:p>
+          <a:p>
+            <a:pPr lvl="1">
+              <a:defRPr sz="1400"/>
+            </a:pPr>
+            <a:r>
+              <a:t>Esquemas: bronze, silver, gold</a:t>
+            </a:r>
+          </a:p>
+          <a:p>
+            <a:pPr lvl="1">
+              <a:defRPr sz="1400"/>
+            </a:pPr>
+            <a:r>
+              <a:t>Tablas: medallion.bronze.travel_times_raw</a:t>
+            </a:r>
+          </a:p>
+          <a:p>
+            <a:pPr lvl="1">
+              <a:defRPr sz="1400"/>
+            </a:pPr>
+            <a:r>
+              <a:t>medallion.silver.travel_times_clean</a:t>
+            </a:r>
+          </a:p>
+          <a:p>
+            <a:pPr lvl="1">
+              <a:defRPr sz="1400"/>
+            </a:pPr>
+            <a:r>
+              <a:t>medallion.gold.city_metrics</a:t>
+            </a:r>
+          </a:p>
+          <a:p>
+            <a:pPr>
+              <a:defRPr sz="1600"/>
+            </a:pPr>
+            <a:r>
+              <a:t>Volúmenes para archivos no tabulares:</a:t>
+            </a:r>
+          </a:p>
+          <a:p>
+            <a:pPr lvl="1">
+              <a:defRPr sz="1400"/>
+            </a:pPr>
+            <a:r>
+              <a:t>CREATE VOLUME medallion.bronze.landing_files</a:t>
+            </a:r>
+          </a:p>
+          <a:p>
+            <a:pPr lvl="1">
+              <a:defRPr sz="1400"/>
+            </a:pPr>
+            <a:r>
+              <a:t>Subir CSVs, PDFs, imágenes al volumen (reemplaza DBFS)</a:t>
+            </a:r>
+          </a:p>
+          <a:p>
+            <a:pPr>
+              <a:defRPr sz="1600"/>
+            </a:pPr>
+            <a:r>
+              <a:t>Cada capa con permisos diferenciados por rol</a:t>
+            </a:r>
+          </a:p>
+          <a:p>
+            <a:pPr>
+              <a:defRPr sz="1600"/>
+            </a:pPr>
+            <a:r>
+              <a:t>Esto es lo que van a ver en su workspace de Databricks</a:t>
+            </a:r>
+          </a:p>
+        </p:txBody>
+      </p:sp>
+    </p:spTree>
+  </p:cSld>
+  <p:clrMapOvr>
+    <a:masterClrMapping/>
+  </p:clrMapOvr>
+</p:sld>
+</file>
+
+<file path=ppt/slides/slide48.xml><?xml version="1.0" encoding="utf-8"?>
+<p:sld xmlns:a="http://schemas.openxmlformats.org/drawingml/2006/main" xmlns:r="http://schemas.openxmlformats.org/officeDocument/2006/relationships" xmlns:p="http://schemas.openxmlformats.org/presentationml/2006/main">
+  <p:cSld>
+    <p:spTree>
+      <p:nvGrpSpPr>
+        <p:cNvPr id="1" name=""/>
+        <p:cNvGrpSpPr/>
+        <p:nvPr/>
+      </p:nvGrpSpPr>
+      <p:grpSpPr>
+        <a:xfrm>
+          <a:off x="0" y="0"/>
+          <a:ext cx="0" cy="0"/>
+          <a:chOff x="0" y="0"/>
+          <a:chExt cx="0" cy="0"/>
+        </a:xfrm>
+      </p:grpSpPr>
+      <p:sp>
+        <p:nvSpPr>
+          <p:cNvPr id="2" name="Title 1"/>
+          <p:cNvSpPr>
+            <a:spLocks noGrp="1"/>
+          </p:cNvSpPr>
+          <p:nvPr>
+            <p:ph type="title"/>
+          </p:nvPr>
+        </p:nvSpPr>
+        <p:spPr/>
+        <p:txBody>
+          <a:bodyPr/>
+          <a:lstStyle/>
+          <a:p>
+            <a:r>
+              <a:t>Evolución histórica de las arquitecturas de datos</a:t>
+            </a:r>
+          </a:p>
+        </p:txBody>
+      </p:sp>
+      <p:sp>
+        <p:nvSpPr>
+          <p:cNvPr id="3" name="Content Placeholder 2"/>
+          <p:cNvSpPr>
+            <a:spLocks noGrp="1"/>
+          </p:cNvSpPr>
+          <p:nvPr>
+            <p:ph idx="1"/>
+          </p:nvPr>
+        </p:nvSpPr>
+        <p:spPr/>
+        <p:txBody>
+          <a:bodyPr/>
+          <a:lstStyle/>
+          <a:p>
+            <a:pPr>
+              <a:defRPr sz="1600"/>
+            </a:pPr>
+            <a:r>
+              <a:t>1990s — Data Warehouses (Teradata, Oracle, DB2)</a:t>
+            </a:r>
+          </a:p>
+          <a:p>
+            <a:pPr lvl="1">
+              <a:defRPr sz="1400"/>
+            </a:pPr>
+            <a:r>
+              <a:t>Caros pero confiables. Solo datos estructurados.</a:t>
+            </a:r>
+          </a:p>
+          <a:p>
+            <a:pPr>
+              <a:defRPr sz="1600"/>
+            </a:pPr>
+            <a:r>
+              <a:t>2006 — Hadoop y el nacimiento del Data Lake</a:t>
+            </a:r>
+          </a:p>
+          <a:p>
+            <a:pPr lvl="1">
+              <a:defRPr sz="1400"/>
+            </a:pPr>
+            <a:r>
+              <a:t>Google publica MapReduce/GFS. Almacenamiento masivo en commodity HW.</a:t>
+            </a:r>
+          </a:p>
+          <a:p>
+            <a:pPr>
+              <a:defRPr sz="1600"/>
+            </a:pPr>
+            <a:r>
+              <a:t>2010s — Cloud Lakes + Spark</a:t>
+            </a:r>
+          </a:p>
+          <a:p>
+            <a:pPr lvl="1">
+              <a:defRPr sz="1400"/>
+            </a:pPr>
+            <a:r>
+              <a:t>S3/ADLS reemplazan HDFS. Spark reemplaza MapReduce.</a:t>
+            </a:r>
+          </a:p>
+          <a:p>
+            <a:pPr>
+              <a:defRPr sz="1600"/>
+            </a:pPr>
+            <a:r>
+              <a:t>2020+ — Era del Lakehouse</a:t>
+            </a:r>
+          </a:p>
+          <a:p>
+            <a:pPr lvl="1">
+              <a:defRPr sz="1400"/>
+            </a:pPr>
+            <a:r>
+              <a:t>Delta Lake, Iceberg, Hudi agregan la capa transaccional.</a:t>
+            </a:r>
+          </a:p>
+          <a:p>
+            <a:pPr lvl="1">
+              <a:defRPr sz="1400"/>
+            </a:pPr>
+            <a:r>
+              <a:t>Medallion se convierte en el estándar de organización.</a:t>
+            </a:r>
+          </a:p>
+          <a:p>
+            <a:pPr>
+              <a:defRPr sz="1600"/>
+            </a:pPr>
+            <a:r>
+              <a:t>Cada generación aprende de los errores de la anterior.</a:t>
+            </a:r>
+          </a:p>
+        </p:txBody>
+      </p:sp>
+    </p:spTree>
+  </p:cSld>
+  <p:clrMapOvr>
+    <a:masterClrMapping/>
+  </p:clrMapOvr>
+</p:sld>
+</file>
+
+<file path=ppt/slides/slide49.xml><?xml version="1.0" encoding="utf-8"?>
+<p:sld xmlns:a="http://schemas.openxmlformats.org/drawingml/2006/main" xmlns:r="http://schemas.openxmlformats.org/officeDocument/2006/relationships" xmlns:p="http://schemas.openxmlformats.org/presentationml/2006/main">
+  <p:cSld>
+    <p:spTree>
+      <p:nvGrpSpPr>
+        <p:cNvPr id="1" name=""/>
+        <p:cNvGrpSpPr/>
+        <p:nvPr/>
+      </p:nvGrpSpPr>
+      <p:grpSpPr>
+        <a:xfrm>
+          <a:off x="0" y="0"/>
+          <a:ext cx="0" cy="0"/>
+          <a:chOff x="0" y="0"/>
+          <a:chExt cx="0" cy="0"/>
+        </a:xfrm>
+      </p:grpSpPr>
+      <p:sp>
+        <p:nvSpPr>
+          <p:cNvPr id="2" name="Title 1"/>
+          <p:cNvSpPr>
+            <a:spLocks noGrp="1"/>
+          </p:cNvSpPr>
+          <p:nvPr>
+            <p:ph type="title"/>
+          </p:nvPr>
+        </p:nvSpPr>
+        <p:spPr/>
+        <p:txBody>
+          <a:bodyPr/>
+          <a:lstStyle/>
+          <a:p>
+            <a:r>
+              <a:t>Resumen</a:t>
+            </a:r>
+          </a:p>
+        </p:txBody>
+      </p:sp>
+      <p:sp>
+        <p:nvSpPr>
+          <p:cNvPr id="3" name="Content Placeholder 2"/>
+          <p:cNvSpPr>
+            <a:spLocks noGrp="1"/>
+          </p:cNvSpPr>
+          <p:nvPr>
+            <p:ph idx="1"/>
+          </p:nvPr>
+        </p:nvSpPr>
+        <p:spPr/>
+        <p:txBody>
+          <a:bodyPr/>
+          <a:lstStyle/>
+          <a:p>
+            <a:pPr>
+              <a:defRPr sz="1600"/>
+            </a:pPr>
+            <a:r>
+              <a:rPr dirty="0"/>
+              <a:t>1. Data Warehouse: </a:t>
+            </a:r>
+            <a:r>
+              <a:rPr dirty="0" err="1"/>
+              <a:t>confiable</a:t>
+            </a:r>
+            <a:r>
+              <a:rPr dirty="0"/>
+              <a:t> </a:t>
+            </a:r>
+            <a:r>
+              <a:rPr dirty="0" err="1"/>
+              <a:t>pero</a:t>
+            </a:r>
+            <a:r>
+              <a:rPr dirty="0"/>
+              <a:t> </a:t>
+            </a:r>
+            <a:r>
+              <a:rPr dirty="0" err="1"/>
+              <a:t>rígido</a:t>
+            </a:r>
+            <a:r>
+              <a:rPr dirty="0"/>
+              <a:t> y </a:t>
+            </a:r>
+            <a:r>
+              <a:rPr dirty="0" err="1"/>
+              <a:t>costoso</a:t>
+            </a:r>
+            <a:endParaRPr dirty="0"/>
+          </a:p>
+          <a:p>
+            <a:pPr>
+              <a:defRPr sz="1600"/>
+            </a:pPr>
+            <a:r>
+              <a:rPr dirty="0"/>
+              <a:t>2. Data Lake: flexible y </a:t>
+            </a:r>
+            <a:r>
+              <a:rPr dirty="0" err="1"/>
+              <a:t>barato</a:t>
+            </a:r>
+            <a:r>
+              <a:rPr dirty="0"/>
+              <a:t> </a:t>
+            </a:r>
+            <a:r>
+              <a:rPr dirty="0" err="1"/>
+              <a:t>pero</a:t>
+            </a:r>
+            <a:r>
+              <a:rPr dirty="0"/>
+              <a:t> </a:t>
+            </a:r>
+            <a:r>
+              <a:rPr dirty="0" err="1"/>
+              <a:t>caótico</a:t>
+            </a:r>
+            <a:r>
+              <a:rPr dirty="0"/>
+              <a:t> sin </a:t>
+            </a:r>
+            <a:r>
+              <a:rPr dirty="0" err="1"/>
+              <a:t>gobernanza</a:t>
+            </a:r>
+            <a:endParaRPr dirty="0"/>
+          </a:p>
+          <a:p>
+            <a:pPr>
+              <a:defRPr sz="1600"/>
+            </a:pPr>
+            <a:r>
+              <a:rPr dirty="0"/>
+              <a:t>3. Data Swamp: </a:t>
+            </a:r>
+            <a:r>
+              <a:rPr dirty="0" err="1"/>
+              <a:t>el</a:t>
+            </a:r>
+            <a:r>
+              <a:rPr dirty="0"/>
+              <a:t> </a:t>
+            </a:r>
+            <a:r>
+              <a:rPr dirty="0" err="1"/>
+              <a:t>fracaso</a:t>
+            </a:r>
+            <a:r>
+              <a:rPr dirty="0"/>
+              <a:t> del lake sin </a:t>
+            </a:r>
+            <a:r>
+              <a:rPr dirty="0" err="1"/>
+              <a:t>estructura</a:t>
+            </a:r>
+            <a:endParaRPr dirty="0"/>
+          </a:p>
+          <a:p>
+            <a:pPr>
+              <a:defRPr sz="1600"/>
+            </a:pPr>
+            <a:r>
+              <a:rPr dirty="0"/>
+              <a:t>4. Lakehouse: ACID + schema + SQL + ML </a:t>
+            </a:r>
+            <a:r>
+              <a:rPr dirty="0" err="1"/>
+              <a:t>sobre</a:t>
+            </a:r>
+            <a:r>
+              <a:rPr dirty="0"/>
+              <a:t> </a:t>
+            </a:r>
+            <a:r>
+              <a:rPr dirty="0" err="1"/>
+              <a:t>almacenamiento</a:t>
+            </a:r>
+            <a:r>
+              <a:rPr dirty="0"/>
+              <a:t> </a:t>
+            </a:r>
+            <a:r>
+              <a:rPr dirty="0" err="1"/>
+              <a:t>abierto</a:t>
+            </a:r>
+            <a:endParaRPr dirty="0"/>
+          </a:p>
+          <a:p>
+            <a:pPr>
+              <a:defRPr sz="1600"/>
+            </a:pPr>
+            <a:r>
+              <a:rPr dirty="0"/>
+              <a:t>5. Medallion: Bronze (raw) → Silver (clean) → Gold (business)</a:t>
+            </a:r>
+          </a:p>
+          <a:p>
+            <a:pPr>
+              <a:defRPr sz="1600"/>
+            </a:pPr>
+            <a:r>
+              <a:rPr dirty="0"/>
+              <a:t>6. Unity Catalog: </a:t>
+            </a:r>
+            <a:r>
+              <a:rPr dirty="0" err="1"/>
+              <a:t>gobernanza</a:t>
+            </a:r>
+            <a:r>
+              <a:rPr dirty="0"/>
+              <a:t>, </a:t>
+            </a:r>
+            <a:r>
+              <a:rPr dirty="0" err="1"/>
+              <a:t>linaje</a:t>
+            </a:r>
+            <a:r>
+              <a:rPr dirty="0"/>
+              <a:t>, control de </a:t>
+            </a:r>
+            <a:r>
+              <a:rPr dirty="0" err="1"/>
+              <a:t>acceso</a:t>
+            </a:r>
+            <a:r>
+              <a:rPr dirty="0"/>
+              <a:t> </a:t>
+            </a:r>
+            <a:r>
+              <a:rPr dirty="0" err="1"/>
+              <a:t>centralizado</a:t>
+            </a:r>
+            <a:endParaRPr dirty="0"/>
+          </a:p>
+          <a:p>
+            <a:pPr>
+              <a:defRPr sz="1600"/>
+            </a:pPr>
+            <a:r>
+              <a:rPr dirty="0"/>
+              <a:t>7. </a:t>
+            </a:r>
+            <a:r>
+              <a:rPr dirty="0" err="1"/>
+              <a:t>Tecnologías</a:t>
+            </a:r>
+            <a:r>
+              <a:rPr dirty="0"/>
+              <a:t>: Delta Lake, Iceberg, Hudi </a:t>
+            </a:r>
+            <a:r>
+              <a:rPr dirty="0" err="1"/>
+              <a:t>sobre</a:t>
+            </a:r>
+            <a:r>
+              <a:rPr dirty="0"/>
+              <a:t> Parquet</a:t>
+            </a:r>
+          </a:p>
+          <a:p>
+            <a:pPr>
+              <a:defRPr sz="1600"/>
+            </a:pPr>
+            <a:r>
+              <a:rPr dirty="0"/>
+              <a:t>El Lakehouse no es </a:t>
+            </a:r>
+            <a:r>
+              <a:rPr dirty="0" err="1"/>
+              <a:t>magia</a:t>
+            </a:r>
+            <a:r>
+              <a:rPr dirty="0"/>
+              <a:t> — es </a:t>
+            </a:r>
+            <a:r>
+              <a:rPr dirty="0" err="1"/>
+              <a:t>almacenamiento</a:t>
+            </a:r>
+            <a:r>
+              <a:rPr dirty="0"/>
+              <a:t> </a:t>
+            </a:r>
+            <a:r>
+              <a:rPr dirty="0" err="1"/>
+              <a:t>barato</a:t>
+            </a:r>
+            <a:r>
+              <a:rPr dirty="0"/>
+              <a:t> +</a:t>
+            </a:r>
+          </a:p>
+          <a:p>
+            <a:pPr lvl="1">
+              <a:defRPr sz="1400"/>
+            </a:pPr>
+            <a:r>
+              <a:rPr dirty="0" err="1"/>
+              <a:t>formatos</a:t>
+            </a:r>
+            <a:r>
+              <a:rPr dirty="0"/>
+              <a:t> </a:t>
+            </a:r>
+            <a:r>
+              <a:rPr dirty="0" err="1"/>
+              <a:t>abiertos</a:t>
+            </a:r>
+            <a:r>
+              <a:rPr dirty="0"/>
+              <a:t> + </a:t>
+            </a:r>
+            <a:r>
+              <a:rPr dirty="0" err="1"/>
+              <a:t>metadatos</a:t>
+            </a:r>
+            <a:r>
+              <a:rPr dirty="0"/>
+              <a:t> </a:t>
+            </a:r>
+            <a:r>
+              <a:rPr dirty="0" err="1"/>
+              <a:t>transaccionales</a:t>
+            </a:r>
+            <a:r>
+              <a:rPr dirty="0"/>
+              <a:t> + </a:t>
+            </a:r>
+            <a:r>
+              <a:rPr dirty="0" err="1"/>
+              <a:t>gobernanza</a:t>
+            </a:r>
+            <a:endParaRPr dirty="0"/>
+          </a:p>
+        </p:txBody>
+      </p:sp>
+    </p:spTree>
+  </p:cSld>
+  <p:clrMapOvr>
+    <a:masterClrMapping/>
+  </p:clrMapOvr>
+</p:sld>
+</file>
+
+<file path=ppt/slides/slide5.xml><?xml version="1.0" encoding="utf-8"?>
+<p:sld xmlns:a="http://schemas.openxmlformats.org/drawingml/2006/main" xmlns:r="http://schemas.openxmlformats.org/officeDocument/2006/relationships" xmlns:p="http://schemas.openxmlformats.org/presentationml/2006/main">
+  <p:cSld>
+    <p:spTree>
+      <p:nvGrpSpPr>
+        <p:cNvPr id="1" name=""/>
+        <p:cNvGrpSpPr/>
+        <p:nvPr/>
+      </p:nvGrpSpPr>
+      <p:grpSpPr>
+        <a:xfrm>
+          <a:off x="0" y="0"/>
+          <a:ext cx="0" cy="0"/>
+          <a:chOff x="0" y="0"/>
+          <a:chExt cx="0" cy="0"/>
+        </a:xfrm>
+      </p:grpSpPr>
+      <p:sp>
+        <p:nvSpPr>
+          <p:cNvPr id="2" name="Title 1"/>
+          <p:cNvSpPr>
+            <a:spLocks noGrp="1"/>
+          </p:cNvSpPr>
+          <p:nvPr>
+            <p:ph type="title"/>
+          </p:nvPr>
+        </p:nvSpPr>
+        <p:spPr/>
+        <p:txBody>
+          <a:bodyPr/>
+          <a:lstStyle/>
+          <a:p>
+            <a:r>
+              <a:t>Data Warehouse — Limitaciones</a:t>
+            </a:r>
+          </a:p>
+        </p:txBody>
+      </p:sp>
+      <p:sp>
+        <p:nvSpPr>
+          <p:cNvPr id="3" name="Content Placeholder 2"/>
+          <p:cNvSpPr>
+            <a:spLocks noGrp="1"/>
+          </p:cNvSpPr>
+          <p:nvPr>
+            <p:ph idx="1"/>
+          </p:nvPr>
+        </p:nvSpPr>
+        <p:spPr/>
+        <p:txBody>
+          <a:bodyPr/>
+          <a:lstStyle/>
+          <a:p>
+            <a:pPr>
+              <a:defRPr sz="1600"/>
+            </a:pPr>
+            <a:r>
+              <a:t>Solo datos estructurados (tablas relacionales)</a:t>
+            </a:r>
+          </a:p>
+          <a:p>
+            <a:pPr>
+              <a:defRPr sz="1600"/>
+            </a:pPr>
+            <a:r>
+              <a:t>Costoso de escalar — almacenamiento propietario</a:t>
+            </a:r>
+          </a:p>
+          <a:p>
+            <a:pPr>
+              <a:defRPr sz="1600"/>
+            </a:pPr>
+            <a:r>
+              <a:t>ETL rígido y lento ante cambios de esquema</a:t>
+            </a:r>
+          </a:p>
+          <a:p>
+            <a:pPr>
+              <a:defRPr sz="1600"/>
+            </a:pPr>
+            <a:r>
+              <a:t>No soporta datos semi-estructurados ni no-estructurados</a:t>
+            </a:r>
+          </a:p>
+          <a:p>
+            <a:pPr lvl="1">
+              <a:defRPr sz="1400"/>
+            </a:pPr>
+            <a:r>
+              <a:t>JSON anidado, logs, imágenes, audio → no caben</a:t>
+            </a:r>
+          </a:p>
+          <a:p>
+            <a:pPr>
+              <a:defRPr sz="1600"/>
+            </a:pPr>
+            <a:r>
+              <a:t>Difícil integrar Machine Learning y Data Science</a:t>
+            </a:r>
+          </a:p>
+          <a:p>
+            <a:pPr lvl="1">
+              <a:defRPr sz="1400"/>
+            </a:pPr>
+            <a:r>
+              <a:t>Los científicos de datos necesitan acceso a datos crudos</a:t>
+            </a:r>
+          </a:p>
+          <a:p>
+            <a:pPr>
+              <a:defRPr sz="1600"/>
+            </a:pPr>
+            <a:r>
+              <a:t>Resultado: un sistema confiable pero limitado y caro</a:t>
+            </a:r>
+          </a:p>
+        </p:txBody>
+      </p:sp>
+    </p:spTree>
+  </p:cSld>
+  <p:clrMapOvr>
+    <a:masterClrMapping/>
+  </p:clrMapOvr>
+</p:sld>
+</file>
+
+<file path=ppt/slides/slide50.xml><?xml version="1.0" encoding="utf-8"?>
+<p:sld xmlns:a="http://schemas.openxmlformats.org/drawingml/2006/main" xmlns:r="http://schemas.openxmlformats.org/officeDocument/2006/relationships" xmlns:p="http://schemas.openxmlformats.org/presentationml/2006/main">
+  <p:cSld>
+    <p:spTree>
+      <p:nvGrpSpPr>
+        <p:cNvPr id="1" name=""/>
+        <p:cNvGrpSpPr/>
+        <p:nvPr/>
+      </p:nvGrpSpPr>
+      <p:grpSpPr>
+        <a:xfrm>
+          <a:off x="0" y="0"/>
+          <a:ext cx="0" cy="0"/>
+          <a:chOff x="0" y="0"/>
+          <a:chExt cx="0" cy="0"/>
+        </a:xfrm>
+      </p:grpSpPr>
+      <p:sp>
+        <p:nvSpPr>
+          <p:cNvPr id="2" name="Title 1"/>
+          <p:cNvSpPr>
+            <a:spLocks noGrp="1"/>
+          </p:cNvSpPr>
+          <p:nvPr>
+            <p:ph type="title"/>
+          </p:nvPr>
+        </p:nvSpPr>
+        <p:spPr/>
+        <p:txBody>
+          <a:bodyPr/>
+          <a:lstStyle/>
+          <a:p>
+            <a:r>
+              <a:t>¿Preguntas?</a:t>
             </a:r>
           </a:p>
         </p:txBody>
@@ -10640,7 +16849,17 @@
           <a:lstStyle/>
           <a:p>
             <a:r>
-              <a:t>El modelo tradicional de análisis de datos</a:t>
+              <a:t>Camilo Soto, MSc</a:t>
+            </a:r>
+          </a:p>
+          <a:p>
+            <a:r>
+              <a:t>Ingeniería en Ciencia de Datos — UPB</a:t>
+            </a:r>
+          </a:p>
+          <a:p>
+            <a:r>
+              <a:t>Cátedra de Big Data</a:t>
             </a:r>
           </a:p>
         </p:txBody>
@@ -10653,8 +16872,8 @@
 </p:sld>
 </file>
 
-<file path=ppt/slides/slide30.xml><?xml version="1.0" encoding="utf-8"?>
-<p:sld xmlns:a="http://schemas.openxmlformats.org/drawingml/2006/main" xmlns:p="http://schemas.openxmlformats.org/presentationml/2006/main" xmlns:r="http://schemas.openxmlformats.org/officeDocument/2006/relationships">
+<file path=ppt/slides/slide6.xml><?xml version="1.0" encoding="utf-8"?>
+<p:sld xmlns:a="http://schemas.openxmlformats.org/drawingml/2006/main" xmlns:r="http://schemas.openxmlformats.org/officeDocument/2006/relationships" xmlns:p="http://schemas.openxmlformats.org/presentationml/2006/main">
   <p:cSld>
     <p:spTree>
       <p:nvGrpSpPr>
@@ -10662,7 +16881,14 @@
         <p:cNvGrpSpPr/>
         <p:nvPr/>
       </p:nvGrpSpPr>
-      <p:grpSpPr/>
+      <p:grpSpPr>
+        <a:xfrm>
+          <a:off x="0" y="0"/>
+          <a:ext cx="0" cy="0"/>
+          <a:chOff x="0" y="0"/>
+          <a:chExt cx="0" cy="0"/>
+        </a:xfrm>
+      </p:grpSpPr>
       <p:sp>
         <p:nvSpPr>
           <p:cNvPr id="2" name="Title 1"/>
@@ -10679,7 +16905,74 @@
           <a:lstStyle/>
           <a:p>
             <a:r>
-              <a:t>El mundo ANTES de Unity Catalog</a:t>
+              <a:t>02 — Data Lake</a:t>
+            </a:r>
+          </a:p>
+        </p:txBody>
+      </p:sp>
+      <p:sp>
+        <p:nvSpPr>
+          <p:cNvPr id="3" name="Text Placeholder 2"/>
+          <p:cNvSpPr>
+            <a:spLocks noGrp="1"/>
+          </p:cNvSpPr>
+          <p:nvPr>
+            <p:ph type="body" idx="1"/>
+          </p:nvPr>
+        </p:nvSpPr>
+        <p:spPr/>
+        <p:txBody>
+          <a:bodyPr/>
+          <a:lstStyle/>
+          <a:p>
+            <a:r>
+              <a:t>Almacenamiento masivo y flexible</a:t>
+            </a:r>
+          </a:p>
+        </p:txBody>
+      </p:sp>
+    </p:spTree>
+  </p:cSld>
+  <p:clrMapOvr>
+    <a:masterClrMapping/>
+  </p:clrMapOvr>
+</p:sld>
+</file>
+
+<file path=ppt/slides/slide7.xml><?xml version="1.0" encoding="utf-8"?>
+<p:sld xmlns:a="http://schemas.openxmlformats.org/drawingml/2006/main" xmlns:r="http://schemas.openxmlformats.org/officeDocument/2006/relationships" xmlns:p="http://schemas.openxmlformats.org/presentationml/2006/main">
+  <p:cSld>
+    <p:spTree>
+      <p:nvGrpSpPr>
+        <p:cNvPr id="1" name=""/>
+        <p:cNvGrpSpPr/>
+        <p:nvPr/>
+      </p:nvGrpSpPr>
+      <p:grpSpPr>
+        <a:xfrm>
+          <a:off x="0" y="0"/>
+          <a:ext cx="0" cy="0"/>
+          <a:chOff x="0" y="0"/>
+          <a:chExt cx="0" cy="0"/>
+        </a:xfrm>
+      </p:grpSpPr>
+      <p:sp>
+        <p:nvSpPr>
+          <p:cNvPr id="2" name="Title 1"/>
+          <p:cNvSpPr>
+            <a:spLocks noGrp="1"/>
+          </p:cNvSpPr>
+          <p:nvPr>
+            <p:ph type="title"/>
+          </p:nvPr>
+        </p:nvSpPr>
+        <p:spPr/>
+        <p:txBody>
+          <a:bodyPr/>
+          <a:lstStyle/>
+          <a:p>
+            <a:r>
+              <a:t>Data Lake — ¿Qué es?</a:t>
             </a:r>
           </a:p>
         </p:txBody>
@@ -10703,7 +16996,7 @@
               <a:defRPr sz="1600"/>
             </a:pPr>
             <a:r>
-              <a:t>Databricks usaba Hive Metastore — un catálogo por workspace</a:t>
+              <a:t>Almacén de datos en formato crudo (raw), sin transformar</a:t>
             </a:r>
           </a:p>
           <a:p>
@@ -10711,7 +17004,15 @@
               <a:defRPr sz="1600"/>
             </a:pPr>
             <a:r>
-              <a:t>Problema 1 — Silos: cada workspace tenía su propio metastore</a:t>
+              <a:t>Esquema al leer → Schema-on-Read</a:t>
+            </a:r>
+          </a:p>
+          <a:p>
+            <a:pPr>
+              <a:defRPr sz="1600"/>
+            </a:pPr>
+            <a:r>
+              <a:t>Soporta cualquier tipo de dato:</a:t>
             </a:r>
           </a:p>
           <a:p>
@@ -10719,7 +17020,15 @@
               <a:defRPr sz="1400"/>
             </a:pPr>
             <a:r>
-              <a:t>Equipo A no podía ver las tablas del Equipo B</a:t>
+              <a:t>CSV, JSON, Parquet, imágenes, audio, logs, video</a:t>
+            </a:r>
+          </a:p>
+          <a:p>
+            <a:pPr>
+              <a:defRPr sz="1600"/>
+            </a:pPr>
+            <a:r>
+              <a:t>Almacenamiento barato y escalable:</a:t>
             </a:r>
           </a:p>
           <a:p>
@@ -10727,7 +17036,7 @@
               <a:defRPr sz="1400"/>
             </a:pPr>
             <a:r>
-              <a:t>Para compartir datos → copiar archivos o dar acceso al storage</a:t>
+              <a:t>Amazon S3, Azure Data Lake Storage (ADLS), HDFS</a:t>
             </a:r>
           </a:p>
           <a:p>
@@ -10735,15 +17044,7 @@
               <a:defRPr sz="1600"/>
             </a:pPr>
             <a:r>
-              <a:t>Problema 2 — Seguridad débil: permisos se manejaban a nivel de storage</a:t>
-            </a:r>
-          </a:p>
-          <a:p>
-            <a:pPr lvl="1">
-              <a:defRPr sz="1400"/>
-            </a:pPr>
-            <a:r>
-              <a:t>No había GRANT/REVOKE sobre tablas. Todo o nada.</a:t>
+              <a:t>Base para pipelines de Machine Learning y Big Data</a:t>
             </a:r>
           </a:p>
           <a:p>
@@ -10751,23 +17052,7 @@
               <a:defRPr sz="1600"/>
             </a:pPr>
             <a:r>
-              <a:t>Problema 3 — Sin linaje ni auditoría: nadie sabía quién accedía a qué</a:t>
-            </a:r>
-          </a:p>
-          <a:p>
-            <a:pPr>
-              <a:defRPr sz="1600"/>
-            </a:pPr>
-            <a:r>
-              <a:t>Problema 4 — Namespace de 2 niveles: schema.tabla (sin catálogo)</a:t>
-            </a:r>
-          </a:p>
-          <a:p>
-            <a:pPr lvl="1">
-              <a:defRPr sz="1400"/>
-            </a:pPr>
-            <a:r>
-              <a:t>Difícil separar dev/prod o dominios de negocio</a:t>
+              <a:t>Idea: guardemos TODO, ya después vemos qué hacemos</a:t>
             </a:r>
           </a:p>
         </p:txBody>
@@ -10780,8 +17065,8 @@
 </p:sld>
 </file>
 
-<file path=ppt/slides/slide31.xml><?xml version="1.0" encoding="utf-8"?>
-<p:sld xmlns:a="http://schemas.openxmlformats.org/drawingml/2006/main" xmlns:p="http://schemas.openxmlformats.org/presentationml/2006/main" xmlns:r="http://schemas.openxmlformats.org/officeDocument/2006/relationships">
+<file path=ppt/slides/slide8.xml><?xml version="1.0" encoding="utf-8"?>
+<p:sld xmlns:a="http://schemas.openxmlformats.org/drawingml/2006/main" xmlns:r="http://schemas.openxmlformats.org/officeDocument/2006/relationships" xmlns:p="http://schemas.openxmlformats.org/presentationml/2006/main">
   <p:cSld>
     <p:spTree>
       <p:nvGrpSpPr>
@@ -10789,7 +17074,14 @@
         <p:cNvGrpSpPr/>
         <p:nvPr/>
       </p:nvGrpSpPr>
-      <p:grpSpPr/>
+      <p:grpSpPr>
+        <a:xfrm>
+          <a:off x="0" y="0"/>
+          <a:ext cx="0" cy="0"/>
+          <a:chOff x="0" y="0"/>
+          <a:chExt cx="0" cy="0"/>
+        </a:xfrm>
+      </p:grpSpPr>
       <p:sp>
         <p:nvSpPr>
           <p:cNvPr id="2" name="Title 1"/>
@@ -10806,7 +17098,7 @@
           <a:lstStyle/>
           <a:p>
             <a:r>
-              <a:t>¿Qué es Unity Catalog?</a:t>
+              <a:t>Data Lake — Tecnologías clave</a:t>
             </a:r>
           </a:p>
         </p:txBody>
@@ -10830,7 +17122,7 @@
               <a:defRPr sz="1600"/>
             </a:pPr>
             <a:r>
-              <a:t>Capa de gobernanza centralizada de Databricks (2022, open source 2024)</a:t>
+              <a:t>Almacenamiento: HDFS, Amazon S3, Azure ADLS, Google Cloud Storage</a:t>
             </a:r>
           </a:p>
           <a:p>
@@ -10838,7 +17130,15 @@
               <a:defRPr sz="1600"/>
             </a:pPr>
             <a:r>
-              <a:t>UN solo metastore compartido por TODOS los workspaces de la región</a:t>
+              <a:t>Procesamiento: Apache Spark, Apache Flink, Presto, Trino</a:t>
+            </a:r>
+          </a:p>
+          <a:p>
+            <a:pPr>
+              <a:defRPr sz="1600"/>
+            </a:pPr>
+            <a:r>
+              <a:t>Formatos de archivo:</a:t>
             </a:r>
           </a:p>
           <a:p>
@@ -10846,7 +17146,31 @@
               <a:defRPr sz="1400"/>
             </a:pPr>
             <a:r>
-              <a:t>→ Se acabaron los silos. Todos ven el mismo catálogo de datos.</a:t>
+              <a:t>Parquet — columnar, comprimido, estándar de facto</a:t>
+            </a:r>
+          </a:p>
+          <a:p>
+            <a:pPr lvl="1">
+              <a:defRPr sz="1400"/>
+            </a:pPr>
+            <a:r>
+              <a:t>ORC — optimizado para Hive</a:t>
+            </a:r>
+          </a:p>
+          <a:p>
+            <a:pPr lvl="1">
+              <a:defRPr sz="1400"/>
+            </a:pPr>
+            <a:r>
+              <a:t>Avro — orientado a filas, bueno para streaming</a:t>
+            </a:r>
+          </a:p>
+          <a:p>
+            <a:pPr lvl="1">
+              <a:defRPr sz="1400"/>
+            </a:pPr>
+            <a:r>
+              <a:t>Delta, Iceberg, Hudi — formatos de tabla (veremos más adelante)</a:t>
             </a:r>
           </a:p>
           <a:p>
@@ -10854,15 +17178,7 @@
               <a:defRPr sz="1600"/>
             </a:pPr>
             <a:r>
-              <a:t>Gobierna no solo tablas, sino TODOS los activos:</a:t>
-            </a:r>
-          </a:p>
-          <a:p>
-            <a:pPr lvl="1">
-              <a:defRPr sz="1400"/>
-            </a:pPr>
-            <a:r>
-              <a:t>Tablas, vistas, volúmenes (archivos), modelos de ML, funciones</a:t>
+              <a:t>Catálogo: Apache Hive Metastore, AWS Glue Catalog</a:t>
             </a:r>
           </a:p>
           <a:p>
@@ -10870,39 +17186,7 @@
               <a:defRPr sz="1600"/>
             </a:pPr>
             <a:r>
-              <a:t>Namespace de 3 niveles: catálogo.esquema.tabla</a:t>
-            </a:r>
-          </a:p>
-          <a:p>
-            <a:pPr lvl="1">
-              <a:defRPr sz="1400"/>
-            </a:pPr>
-            <a:r>
-              <a:t>Antes: schema.tabla → Ahora: medallion.silver.travel_times</a:t>
-            </a:r>
-          </a:p>
-          <a:p>
-            <a:pPr lvl="1">
-              <a:defRPr sz="1400"/>
-            </a:pPr>
-            <a:r>
-              <a:t>El nivel extra permite separar dominios, ambientes, proyectos</a:t>
-            </a:r>
-          </a:p>
-          <a:p>
-            <a:pPr>
-              <a:defRPr sz="1600"/>
-            </a:pPr>
-            <a:r>
-              <a:t>Analogía: Hive Metastore era una biblioteca por piso.</a:t>
-            </a:r>
-          </a:p>
-          <a:p>
-            <a:pPr lvl="1">
-              <a:defRPr sz="1400"/>
-            </a:pPr>
-            <a:r>
-              <a:t>Unity Catalog es UNA biblioteca central con catálogo unificado.</a:t>
+              <a:t>Consulta: Athena, Presto, Spark SQL, Hive</a:t>
             </a:r>
           </a:p>
         </p:txBody>
@@ -10915,8 +17199,8 @@
 </p:sld>
 </file>
 
-<file path=ppt/slides/slide32.xml><?xml version="1.0" encoding="utf-8"?>
-<p:sld xmlns:a="http://schemas.openxmlformats.org/drawingml/2006/main" xmlns:p="http://schemas.openxmlformats.org/presentationml/2006/main" xmlns:r="http://schemas.openxmlformats.org/officeDocument/2006/relationships">
+<file path=ppt/slides/slide9.xml><?xml version="1.0" encoding="utf-8"?>
+<p:sld xmlns:a="http://schemas.openxmlformats.org/drawingml/2006/main" xmlns:r="http://schemas.openxmlformats.org/officeDocument/2006/relationships" xmlns:p="http://schemas.openxmlformats.org/presentationml/2006/main">
   <p:cSld>
     <p:spTree>
       <p:nvGrpSpPr>
@@ -10924,7 +17208,14 @@
         <p:cNvGrpSpPr/>
         <p:nvPr/>
       </p:nvGrpSpPr>
-      <p:grpSpPr/>
+      <p:grpSpPr>
+        <a:xfrm>
+          <a:off x="0" y="0"/>
+          <a:ext cx="0" cy="0"/>
+          <a:chOff x="0" y="0"/>
+          <a:chExt cx="0" cy="0"/>
+        </a:xfrm>
+      </p:grpSpPr>
       <p:sp>
         <p:nvSpPr>
           <p:cNvPr id="2" name="Title 1"/>
@@ -10941,809 +17232,7 @@
           <a:lstStyle/>
           <a:p>
             <a:r>
-              <a:t>¿Qué resuelve Unity Catalog?</a:t>
-            </a:r>
-          </a:p>
-        </p:txBody>
-      </p:sp>
-      <p:sp>
-        <p:nvSpPr>
-          <p:cNvPr id="3" name="Content Placeholder 2"/>
-          <p:cNvSpPr>
-            <a:spLocks noGrp="1"/>
-          </p:cNvSpPr>
-          <p:nvPr>
-            <p:ph idx="1"/>
-          </p:nvPr>
-        </p:nvSpPr>
-        <p:spPr/>
-        <p:txBody>
-          <a:bodyPr/>
-          <a:lstStyle/>
-          <a:p>
-            <a:pPr>
-              <a:defRPr sz="1600"/>
-            </a:pPr>
-            <a:r>
-              <a:t>1. Descubrimiento: buscar tablas, ver esquemas, explorar datos</a:t>
-            </a:r>
-          </a:p>
-          <a:p>
-            <a:pPr lvl="1">
-              <a:defRPr sz="1400"/>
-            </a:pPr>
-            <a:r>
-              <a:t>'¿Existe una tabla de clientes?' → búsqueda en el catálogo</a:t>
-            </a:r>
-          </a:p>
-          <a:p>
-            <a:pPr>
-              <a:defRPr sz="1600"/>
-            </a:pPr>
-            <a:r>
-              <a:t>2. Control de acceso: GRANT/REVOKE con SQL estándar (ANSI SQL)</a:t>
-            </a:r>
-          </a:p>
-          <a:p>
-            <a:pPr lvl="1">
-              <a:defRPr sz="1400"/>
-            </a:pPr>
-            <a:r>
-              <a:t>GRANT SELECT ON TABLE medallion.gold.metrics TO analistas</a:t>
-            </a:r>
-          </a:p>
-          <a:p>
-            <a:pPr lvl="1">
-              <a:defRPr sz="1400"/>
-            </a:pPr>
-            <a:r>
-              <a:t>Herencia: permisos en catálogo → esquemas → tablas</a:t>
-            </a:r>
-          </a:p>
-          <a:p>
-            <a:pPr>
-              <a:defRPr sz="1600"/>
-            </a:pPr>
-            <a:r>
-              <a:t>3. Linaje automático: de dónde viene cada tabla, quién la consume</a:t>
-            </a:r>
-          </a:p>
-          <a:p>
-            <a:pPr lvl="1">
-              <a:defRPr sz="1400"/>
-            </a:pPr>
-            <a:r>
-              <a:t>gold.city_metrics ← silver.travel_times ← bronze.raw</a:t>
-            </a:r>
-          </a:p>
-          <a:p>
-            <a:pPr>
-              <a:defRPr sz="1600"/>
-            </a:pPr>
-            <a:r>
-              <a:t>4. Auditoría: log completo de quién accedió a qué y cuándo</a:t>
-            </a:r>
-          </a:p>
-          <a:p>
-            <a:pPr lvl="1">
-              <a:defRPr sz="1400"/>
-            </a:pPr>
-            <a:r>
-              <a:t>Cumplimiento regulatorio: GDPR, HIPAA, Habeas Data</a:t>
-            </a:r>
-          </a:p>
-        </p:txBody>
-      </p:sp>
-    </p:spTree>
-  </p:cSld>
-  <p:clrMapOvr>
-    <a:masterClrMapping/>
-  </p:clrMapOvr>
-</p:sld>
-</file>
-
-<file path=ppt/slides/slide33.xml><?xml version="1.0" encoding="utf-8"?>
-<p:sld xmlns:a="http://schemas.openxmlformats.org/drawingml/2006/main" xmlns:p="http://schemas.openxmlformats.org/presentationml/2006/main" xmlns:r="http://schemas.openxmlformats.org/officeDocument/2006/relationships">
-  <p:cSld>
-    <p:spTree>
-      <p:nvGrpSpPr>
-        <p:cNvPr id="1" name=""/>
-        <p:cNvGrpSpPr/>
-        <p:nvPr/>
-      </p:nvGrpSpPr>
-      <p:grpSpPr/>
-      <p:sp>
-        <p:nvSpPr>
-          <p:cNvPr id="2" name="Title 1"/>
-          <p:cNvSpPr>
-            <a:spLocks noGrp="1"/>
-          </p:cNvSpPr>
-          <p:nvPr>
-            <p:ph type="title"/>
-          </p:nvPr>
-        </p:nvSpPr>
-        <p:spPr/>
-        <p:txBody>
-          <a:bodyPr/>
-          <a:lstStyle/>
-          <a:p>
-            <a:r>
-              <a:t>Unity Catalog — Control de acceso en Medallion</a:t>
-            </a:r>
-          </a:p>
-        </p:txBody>
-      </p:sp>
-      <p:sp>
-        <p:nvSpPr>
-          <p:cNvPr id="3" name="Content Placeholder 2"/>
-          <p:cNvSpPr>
-            <a:spLocks noGrp="1"/>
-          </p:cNvSpPr>
-          <p:nvPr>
-            <p:ph idx="1"/>
-          </p:nvPr>
-        </p:nvSpPr>
-        <p:spPr/>
-        <p:txBody>
-          <a:bodyPr/>
-          <a:lstStyle/>
-          <a:p>
-            <a:pPr>
-              <a:defRPr sz="1600"/>
-            </a:pPr>
-            <a:r>
-              <a:t>Principio de mínimo privilegio por capa:</a:t>
-            </a:r>
-          </a:p>
-          <a:p>
-            <a:pPr lvl="1">
-              <a:defRPr sz="1400"/>
-            </a:pPr>
-            <a:r>
-              <a:t>Ingenieros de datos → Bronze + Silver + Gold (lectura y escritura)</a:t>
-            </a:r>
-          </a:p>
-          <a:p>
-            <a:pPr lvl="1">
-              <a:defRPr sz="1400"/>
-            </a:pPr>
-            <a:r>
-              <a:t>Científicos de datos → Silver + Gold (lectura)</a:t>
-            </a:r>
-          </a:p>
-          <a:p>
-            <a:pPr lvl="1">
-              <a:defRPr sz="1400"/>
-            </a:pPr>
-            <a:r>
-              <a:t>Analistas de BI → Solo Gold (lectura)</a:t>
-            </a:r>
-          </a:p>
-          <a:p>
-            <a:pPr lvl="1">
-              <a:defRPr sz="1400"/>
-            </a:pPr>
-            <a:r>
-              <a:t>Ejecutivos → Solo Gold vía dashboards (ni siquiera SQL directo)</a:t>
-            </a:r>
-          </a:p>
-          <a:p>
-            <a:pPr>
-              <a:defRPr sz="1600"/>
-            </a:pPr>
-            <a:r>
-              <a:t>Ejemplo en SQL:</a:t>
-            </a:r>
-          </a:p>
-          <a:p>
-            <a:pPr lvl="1">
-              <a:defRPr sz="1400"/>
-            </a:pPr>
-            <a:r>
-              <a:t>GRANT USE CATALOG ON CATALOG medallion TO ingenieros</a:t>
-            </a:r>
-          </a:p>
-          <a:p>
-            <a:pPr lvl="1">
-              <a:defRPr sz="1400"/>
-            </a:pPr>
-            <a:r>
-              <a:t>GRANT SELECT ON SCHEMA medallion.gold TO analistas</a:t>
-            </a:r>
-          </a:p>
-          <a:p>
-            <a:pPr lvl="1">
-              <a:defRPr sz="1400"/>
-            </a:pPr>
-            <a:r>
-              <a:t>REVOKE ALL ON SCHEMA medallion.bronze FROM analistas</a:t>
-            </a:r>
-          </a:p>
-          <a:p>
-            <a:pPr>
-              <a:defRPr sz="1600"/>
-            </a:pPr>
-            <a:r>
-              <a:t>Los permisos viajan con los datos — no dependen del workspace</a:t>
-            </a:r>
-          </a:p>
-        </p:txBody>
-      </p:sp>
-    </p:spTree>
-  </p:cSld>
-  <p:clrMapOvr>
-    <a:masterClrMapping/>
-  </p:clrMapOvr>
-</p:sld>
-</file>
-
-<file path=ppt/slides/slide34.xml><?xml version="1.0" encoding="utf-8"?>
-<p:sld xmlns:a="http://schemas.openxmlformats.org/drawingml/2006/main" xmlns:p="http://schemas.openxmlformats.org/presentationml/2006/main" xmlns:r="http://schemas.openxmlformats.org/officeDocument/2006/relationships">
-  <p:cSld>
-    <p:spTree>
-      <p:nvGrpSpPr>
-        <p:cNvPr id="1" name=""/>
-        <p:cNvGrpSpPr/>
-        <p:nvPr/>
-      </p:nvGrpSpPr>
-      <p:grpSpPr/>
-      <p:sp>
-        <p:nvSpPr>
-          <p:cNvPr id="2" name="Title 1"/>
-          <p:cNvSpPr>
-            <a:spLocks noGrp="1"/>
-          </p:cNvSpPr>
-          <p:nvPr>
-            <p:ph type="title"/>
-          </p:nvPr>
-        </p:nvSpPr>
-        <p:spPr/>
-        <p:txBody>
-          <a:bodyPr/>
-          <a:lstStyle/>
-          <a:p>
-            <a:r>
-              <a:t>Unity Catalog — Linaje, tags y auditoría</a:t>
-            </a:r>
-          </a:p>
-        </p:txBody>
-      </p:sp>
-      <p:sp>
-        <p:nvSpPr>
-          <p:cNvPr id="3" name="Content Placeholder 2"/>
-          <p:cNvSpPr>
-            <a:spLocks noGrp="1"/>
-          </p:cNvSpPr>
-          <p:nvPr>
-            <p:ph idx="1"/>
-          </p:nvPr>
-        </p:nvSpPr>
-        <p:spPr/>
-        <p:txBody>
-          <a:bodyPr/>
-          <a:lstStyle/>
-          <a:p>
-            <a:pPr>
-              <a:defRPr sz="1600"/>
-            </a:pPr>
-            <a:r>
-              <a:t>Data Lineage (automático, sin código):</a:t>
-            </a:r>
-          </a:p>
-          <a:p>
-            <a:pPr lvl="1">
-              <a:defRPr sz="1400"/>
-            </a:pPr>
-            <a:r>
-              <a:t>Visualización gráfica: tabla origen → transformaciones → tabla destino</a:t>
-            </a:r>
-          </a:p>
-          <a:p>
-            <a:pPr lvl="1">
-              <a:defRPr sz="1400"/>
-            </a:pPr>
-            <a:r>
-              <a:t>¿Un dashboard muestra datos raros? → seguir el linaje hasta Bronze</a:t>
-            </a:r>
-          </a:p>
-          <a:p>
-            <a:pPr>
-              <a:defRPr sz="1600"/>
-            </a:pPr>
-            <a:r>
-              <a:t>Tags y clasificación de datos:</a:t>
-            </a:r>
-          </a:p>
-          <a:p>
-            <a:pPr lvl="1">
-              <a:defRPr sz="1400"/>
-            </a:pPr>
-            <a:r>
-              <a:t>Marcar columnas sensibles: email → PII, salario → CONFIDENCIAL</a:t>
-            </a:r>
-          </a:p>
-          <a:p>
-            <a:pPr lvl="1">
-              <a:defRPr sz="1400"/>
-            </a:pPr>
-            <a:r>
-              <a:t>Políticas automáticas: si tiene tag PII → solo acceso con aprobación</a:t>
-            </a:r>
-          </a:p>
-          <a:p>
-            <a:pPr>
-              <a:defRPr sz="1600"/>
-            </a:pPr>
-            <a:r>
-              <a:t>Auditoría completa:</a:t>
-            </a:r>
-          </a:p>
-          <a:p>
-            <a:pPr lvl="1">
-              <a:defRPr sz="1400"/>
-            </a:pPr>
-            <a:r>
-              <a:t>Cada SELECT, INSERT, UPDATE queda registrado</a:t>
-            </a:r>
-          </a:p>
-          <a:p>
-            <a:pPr lvl="1">
-              <a:defRPr sz="1400"/>
-            </a:pPr>
-            <a:r>
-              <a:t>¿Quién consultó la tabla de salarios el viernes a las 11pm?</a:t>
-            </a:r>
-          </a:p>
-          <a:p>
-            <a:pPr lvl="1">
-              <a:defRPr sz="1400"/>
-            </a:pPr>
-            <a:r>
-              <a:t>Esencial para compliance y respuesta a incidentes</a:t>
-            </a:r>
-          </a:p>
-        </p:txBody>
-      </p:sp>
-    </p:spTree>
-  </p:cSld>
-  <p:clrMapOvr>
-    <a:masterClrMapping/>
-  </p:clrMapOvr>
-</p:sld>
-</file>
-
-<file path=ppt/slides/slide35.xml><?xml version="1.0" encoding="utf-8"?>
-<p:sld xmlns:a="http://schemas.openxmlformats.org/drawingml/2006/main" xmlns:p="http://schemas.openxmlformats.org/presentationml/2006/main" xmlns:r="http://schemas.openxmlformats.org/officeDocument/2006/relationships">
-  <p:cSld>
-    <p:spTree>
-      <p:nvGrpSpPr>
-        <p:cNvPr id="1" name=""/>
-        <p:cNvGrpSpPr/>
-        <p:nvPr/>
-      </p:nvGrpSpPr>
-      <p:grpSpPr/>
-      <p:sp>
-        <p:nvSpPr>
-          <p:cNvPr id="2" name="Title 1"/>
-          <p:cNvSpPr>
-            <a:spLocks noGrp="1"/>
-          </p:cNvSpPr>
-          <p:nvPr>
-            <p:ph type="title"/>
-          </p:nvPr>
-        </p:nvSpPr>
-        <p:spPr/>
-        <p:txBody>
-          <a:bodyPr/>
-          <a:lstStyle/>
-          <a:p>
-            <a:r>
-              <a:t>Unity Catalog — Estructura recomendada</a:t>
-            </a:r>
-          </a:p>
-        </p:txBody>
-      </p:sp>
-      <p:sp>
-        <p:nvSpPr>
-          <p:cNvPr id="3" name="Content Placeholder 2"/>
-          <p:cNvSpPr>
-            <a:spLocks noGrp="1"/>
-          </p:cNvSpPr>
-          <p:nvPr>
-            <p:ph idx="1"/>
-          </p:nvPr>
-        </p:nvSpPr>
-        <p:spPr/>
-        <p:txBody>
-          <a:bodyPr/>
-          <a:lstStyle/>
-          <a:p>
-            <a:pPr>
-              <a:defRPr sz="1600"/>
-            </a:pPr>
-            <a:r>
-              <a:t>Organización con Medallion + Unity Catalog:</a:t>
-            </a:r>
-          </a:p>
-          <a:p>
-            <a:pPr lvl="1">
-              <a:defRPr sz="1400"/>
-            </a:pPr>
-            <a:r>
-              <a:t>Catálogo: medallion (o nombre del proyecto/dominio)</a:t>
-            </a:r>
-          </a:p>
-          <a:p>
-            <a:pPr lvl="1">
-              <a:defRPr sz="1400"/>
-            </a:pPr>
-            <a:r>
-              <a:t>Esquemas: bronze, silver, gold</a:t>
-            </a:r>
-          </a:p>
-          <a:p>
-            <a:pPr lvl="1">
-              <a:defRPr sz="1400"/>
-            </a:pPr>
-            <a:r>
-              <a:t>Tablas: medallion.bronze.travel_times_raw</a:t>
-            </a:r>
-          </a:p>
-          <a:p>
-            <a:pPr lvl="1">
-              <a:defRPr sz="1400"/>
-            </a:pPr>
-            <a:r>
-              <a:t>medallion.silver.travel_times_clean</a:t>
-            </a:r>
-          </a:p>
-          <a:p>
-            <a:pPr lvl="1">
-              <a:defRPr sz="1400"/>
-            </a:pPr>
-            <a:r>
-              <a:t>medallion.gold.city_metrics</a:t>
-            </a:r>
-          </a:p>
-          <a:p>
-            <a:pPr>
-              <a:defRPr sz="1600"/>
-            </a:pPr>
-            <a:r>
-              <a:t>Volúmenes para archivos no tabulares:</a:t>
-            </a:r>
-          </a:p>
-          <a:p>
-            <a:pPr lvl="1">
-              <a:defRPr sz="1400"/>
-            </a:pPr>
-            <a:r>
-              <a:t>CREATE VOLUME medallion.bronze.landing_files</a:t>
-            </a:r>
-          </a:p>
-          <a:p>
-            <a:pPr lvl="1">
-              <a:defRPr sz="1400"/>
-            </a:pPr>
-            <a:r>
-              <a:t>Subir CSVs, PDFs, imágenes al volumen (reemplaza DBFS)</a:t>
-            </a:r>
-          </a:p>
-          <a:p>
-            <a:pPr>
-              <a:defRPr sz="1600"/>
-            </a:pPr>
-            <a:r>
-              <a:t>Cada capa con permisos diferenciados por rol</a:t>
-            </a:r>
-          </a:p>
-          <a:p>
-            <a:pPr>
-              <a:defRPr sz="1600"/>
-            </a:pPr>
-            <a:r>
-              <a:t>Esto es lo que van a ver en su workspace de Databricks</a:t>
-            </a:r>
-          </a:p>
-        </p:txBody>
-      </p:sp>
-    </p:spTree>
-  </p:cSld>
-  <p:clrMapOvr>
-    <a:masterClrMapping/>
-  </p:clrMapOvr>
-</p:sld>
-</file>
-
-<file path=ppt/slides/slide36.xml><?xml version="1.0" encoding="utf-8"?>
-<p:sld xmlns:a="http://schemas.openxmlformats.org/drawingml/2006/main" xmlns:p="http://schemas.openxmlformats.org/presentationml/2006/main" xmlns:r="http://schemas.openxmlformats.org/officeDocument/2006/relationships">
-  <p:cSld>
-    <p:spTree>
-      <p:nvGrpSpPr>
-        <p:cNvPr id="1" name=""/>
-        <p:cNvGrpSpPr/>
-        <p:nvPr/>
-      </p:nvGrpSpPr>
-      <p:grpSpPr/>
-      <p:sp>
-        <p:nvSpPr>
-          <p:cNvPr id="2" name="Title 1"/>
-          <p:cNvSpPr>
-            <a:spLocks noGrp="1"/>
-          </p:cNvSpPr>
-          <p:nvPr>
-            <p:ph type="title"/>
-          </p:nvPr>
-        </p:nvSpPr>
-        <p:spPr/>
-        <p:txBody>
-          <a:bodyPr/>
-          <a:lstStyle/>
-          <a:p>
-            <a:r>
-              <a:t>Evolución histórica de las arquitecturas de datos</a:t>
-            </a:r>
-          </a:p>
-        </p:txBody>
-      </p:sp>
-      <p:sp>
-        <p:nvSpPr>
-          <p:cNvPr id="3" name="Content Placeholder 2"/>
-          <p:cNvSpPr>
-            <a:spLocks noGrp="1"/>
-          </p:cNvSpPr>
-          <p:nvPr>
-            <p:ph idx="1"/>
-          </p:nvPr>
-        </p:nvSpPr>
-        <p:spPr/>
-        <p:txBody>
-          <a:bodyPr/>
-          <a:lstStyle/>
-          <a:p>
-            <a:pPr>
-              <a:defRPr sz="1600"/>
-            </a:pPr>
-            <a:r>
-              <a:t>1990s — Data Warehouses (Teradata, Oracle, DB2)</a:t>
-            </a:r>
-          </a:p>
-          <a:p>
-            <a:pPr lvl="1">
-              <a:defRPr sz="1400"/>
-            </a:pPr>
-            <a:r>
-              <a:t>Caros pero confiables. Solo datos estructurados.</a:t>
-            </a:r>
-          </a:p>
-          <a:p>
-            <a:pPr>
-              <a:defRPr sz="1600"/>
-            </a:pPr>
-            <a:r>
-              <a:t>2006 — Hadoop y el nacimiento del Data Lake</a:t>
-            </a:r>
-          </a:p>
-          <a:p>
-            <a:pPr lvl="1">
-              <a:defRPr sz="1400"/>
-            </a:pPr>
-            <a:r>
-              <a:t>Google publica MapReduce/GFS. Almacenamiento masivo en commodity HW.</a:t>
-            </a:r>
-          </a:p>
-          <a:p>
-            <a:pPr>
-              <a:defRPr sz="1600"/>
-            </a:pPr>
-            <a:r>
-              <a:t>2010s — Cloud Lakes + Spark</a:t>
-            </a:r>
-          </a:p>
-          <a:p>
-            <a:pPr lvl="1">
-              <a:defRPr sz="1400"/>
-            </a:pPr>
-            <a:r>
-              <a:t>S3/ADLS reemplazan HDFS. Spark reemplaza MapReduce.</a:t>
-            </a:r>
-          </a:p>
-          <a:p>
-            <a:pPr>
-              <a:defRPr sz="1600"/>
-            </a:pPr>
-            <a:r>
-              <a:t>2020+ — Era del Lakehouse</a:t>
-            </a:r>
-          </a:p>
-          <a:p>
-            <a:pPr lvl="1">
-              <a:defRPr sz="1400"/>
-            </a:pPr>
-            <a:r>
-              <a:t>Delta Lake, Iceberg, Hudi agregan la capa transaccional.</a:t>
-            </a:r>
-          </a:p>
-          <a:p>
-            <a:pPr lvl="1">
-              <a:defRPr sz="1400"/>
-            </a:pPr>
-            <a:r>
-              <a:t>Medallion se convierte en el estándar de organización.</a:t>
-            </a:r>
-          </a:p>
-          <a:p>
-            <a:pPr>
-              <a:defRPr sz="1600"/>
-            </a:pPr>
-            <a:r>
-              <a:t>Cada generación aprende de los errores de la anterior.</a:t>
-            </a:r>
-          </a:p>
-        </p:txBody>
-      </p:sp>
-    </p:spTree>
-  </p:cSld>
-  <p:clrMapOvr>
-    <a:masterClrMapping/>
-  </p:clrMapOvr>
-</p:sld>
-</file>
-
-<file path=ppt/slides/slide37.xml><?xml version="1.0" encoding="utf-8"?>
-<p:sld xmlns:a="http://schemas.openxmlformats.org/drawingml/2006/main" xmlns:p="http://schemas.openxmlformats.org/presentationml/2006/main" xmlns:r="http://schemas.openxmlformats.org/officeDocument/2006/relationships">
-  <p:cSld>
-    <p:spTree>
-      <p:nvGrpSpPr>
-        <p:cNvPr id="1" name=""/>
-        <p:cNvGrpSpPr/>
-        <p:nvPr/>
-      </p:nvGrpSpPr>
-      <p:grpSpPr/>
-      <p:sp>
-        <p:nvSpPr>
-          <p:cNvPr id="2" name="Title 1"/>
-          <p:cNvSpPr>
-            <a:spLocks noGrp="1"/>
-          </p:cNvSpPr>
-          <p:nvPr>
-            <p:ph type="title"/>
-          </p:nvPr>
-        </p:nvSpPr>
-        <p:spPr/>
-        <p:txBody>
-          <a:bodyPr/>
-          <a:lstStyle/>
-          <a:p>
-            <a:r>
-              <a:t>Resumen</a:t>
-            </a:r>
-          </a:p>
-        </p:txBody>
-      </p:sp>
-      <p:sp>
-        <p:nvSpPr>
-          <p:cNvPr id="3" name="Content Placeholder 2"/>
-          <p:cNvSpPr>
-            <a:spLocks noGrp="1"/>
-          </p:cNvSpPr>
-          <p:nvPr>
-            <p:ph idx="1"/>
-          </p:nvPr>
-        </p:nvSpPr>
-        <p:spPr/>
-        <p:txBody>
-          <a:bodyPr/>
-          <a:lstStyle/>
-          <a:p>
-            <a:pPr>
-              <a:defRPr sz="1600"/>
-            </a:pPr>
-            <a:r>
-              <a:t>1. Data Warehouse: confiable pero rígido y costoso</a:t>
-            </a:r>
-          </a:p>
-          <a:p>
-            <a:pPr>
-              <a:defRPr sz="1600"/>
-            </a:pPr>
-            <a:r>
-              <a:t>2. Data Lake: flexible y barato pero caótico sin gobernanza</a:t>
-            </a:r>
-          </a:p>
-          <a:p>
-            <a:pPr>
-              <a:defRPr sz="1600"/>
-            </a:pPr>
-            <a:r>
-              <a:t>3. Data Swamp: el fracaso del lake sin estructura</a:t>
-            </a:r>
-          </a:p>
-          <a:p>
-            <a:pPr>
-              <a:defRPr sz="1600"/>
-            </a:pPr>
-            <a:r>
-              <a:t>4. Lakehouse: ACID + schema + SQL + ML sobre almacenamiento abierto</a:t>
-            </a:r>
-          </a:p>
-          <a:p>
-            <a:pPr>
-              <a:defRPr sz="1600"/>
-            </a:pPr>
-            <a:r>
-              <a:t>5. Medallion: Bronze (raw) → Silver (clean) → Gold (business)</a:t>
-            </a:r>
-          </a:p>
-          <a:p>
-            <a:pPr>
-              <a:defRPr sz="1600"/>
-            </a:pPr>
-            <a:r>
-              <a:t>6. Unity Catalog: gobernanza, linaje, control de acceso centralizado</a:t>
-            </a:r>
-          </a:p>
-          <a:p>
-            <a:pPr>
-              <a:defRPr sz="1600"/>
-            </a:pPr>
-            <a:r>
-              <a:t>7. Tecnologías: Delta Lake, Iceberg, Hudi sobre Parquet</a:t>
-            </a:r>
-          </a:p>
-          <a:p>
-            <a:pPr>
-              <a:defRPr sz="1600"/>
-            </a:pPr>
-            <a:r>
-              <a:t>El Lakehouse no es magia — es almacenamiento barato +</a:t>
-            </a:r>
-          </a:p>
-          <a:p>
-            <a:pPr lvl="1">
-              <a:defRPr sz="1400"/>
-            </a:pPr>
-            <a:r>
-              <a:t>formatos abiertos + metadatos transaccionales + gobernanza</a:t>
-            </a:r>
-          </a:p>
-        </p:txBody>
-      </p:sp>
-    </p:spTree>
-  </p:cSld>
-  <p:clrMapOvr>
-    <a:masterClrMapping/>
-  </p:clrMapOvr>
-</p:sld>
-</file>
-
-<file path=ppt/slides/slide38.xml><?xml version="1.0" encoding="utf-8"?>
-<p:sld xmlns:a="http://schemas.openxmlformats.org/drawingml/2006/main" xmlns:p="http://schemas.openxmlformats.org/presentationml/2006/main" xmlns:r="http://schemas.openxmlformats.org/officeDocument/2006/relationships">
-  <p:cSld>
-    <p:spTree>
-      <p:nvGrpSpPr>
-        <p:cNvPr id="1" name=""/>
-        <p:cNvGrpSpPr/>
-        <p:nvPr/>
-      </p:nvGrpSpPr>
-      <p:grpSpPr/>
-      <p:sp>
-        <p:nvSpPr>
-          <p:cNvPr id="2" name="Title 1"/>
-          <p:cNvSpPr>
-            <a:spLocks noGrp="1"/>
-          </p:cNvSpPr>
-          <p:nvPr>
-            <p:ph type="title"/>
-          </p:nvPr>
-        </p:nvSpPr>
-        <p:spPr/>
-        <p:txBody>
-          <a:bodyPr/>
-          <a:lstStyle/>
-          <a:p>
-            <a:r>
-              <a:t>¿Preguntas?</a:t>
+              <a:t>Formatos de archivo en Big Data</a:t>
             </a:r>
           </a:p>
         </p:txBody>
@@ -11764,610 +17253,17 @@
           <a:lstStyle/>
           <a:p>
             <a:r>
-              <a:t>Camilo Soto, MSc</a:t>
-            </a:r>
-          </a:p>
-          <a:p>
-            <a:r>
-              <a:t>Ingeniería en Ciencia de Datos — UPB</a:t>
-            </a:r>
-          </a:p>
-          <a:p>
-            <a:r>
-              <a:t>Cátedra de Big Data</a:t>
+              <a:t>Parquet, Avro y ORC — cómo funcionan y cuándo usar cada uno</a:t>
             </a:r>
           </a:p>
         </p:txBody>
       </p:sp>
     </p:spTree>
-  </p:cSld>
-  <p:clrMapOvr>
-    <a:masterClrMapping/>
-  </p:clrMapOvr>
-</p:sld>
-</file>
-
-<file path=ppt/slides/slide4.xml><?xml version="1.0" encoding="utf-8"?>
-<p:sld xmlns:a="http://schemas.openxmlformats.org/drawingml/2006/main" xmlns:p="http://schemas.openxmlformats.org/presentationml/2006/main" xmlns:r="http://schemas.openxmlformats.org/officeDocument/2006/relationships">
-  <p:cSld>
-    <p:spTree>
-      <p:nvGrpSpPr>
-        <p:cNvPr id="1" name=""/>
-        <p:cNvGrpSpPr/>
-        <p:nvPr/>
-      </p:nvGrpSpPr>
-      <p:grpSpPr/>
-      <p:sp>
-        <p:nvSpPr>
-          <p:cNvPr id="2" name="Title 1"/>
-          <p:cNvSpPr>
-            <a:spLocks noGrp="1"/>
-          </p:cNvSpPr>
-          <p:nvPr>
-            <p:ph type="title"/>
-          </p:nvPr>
-        </p:nvSpPr>
-        <p:spPr/>
-        <p:txBody>
-          <a:bodyPr/>
-          <a:lstStyle/>
-          <a:p>
-            <a:r>
-              <a:t>Data Warehouse — ¿Qué es?</a:t>
-            </a:r>
-          </a:p>
-        </p:txBody>
-      </p:sp>
-      <p:sp>
-        <p:nvSpPr>
-          <p:cNvPr id="3" name="Content Placeholder 2"/>
-          <p:cNvSpPr>
-            <a:spLocks noGrp="1"/>
-          </p:cNvSpPr>
-          <p:nvPr>
-            <p:ph idx="1"/>
-          </p:nvPr>
-        </p:nvSpPr>
-        <p:spPr/>
-        <p:txBody>
-          <a:bodyPr/>
-          <a:lstStyle/>
-          <a:p>
-            <a:pPr>
-              <a:defRPr sz="1600"/>
-            </a:pPr>
-            <a:r>
-              <a:t>Repositorio centralizado de datos estructurados</a:t>
-            </a:r>
-          </a:p>
-          <a:p>
-            <a:pPr>
-              <a:defRPr sz="1600"/>
-            </a:pPr>
-            <a:r>
-              <a:t>Esquema definido antes de cargar → Schema-on-Write</a:t>
-            </a:r>
-          </a:p>
-          <a:p>
-            <a:pPr>
-              <a:defRPr sz="1600"/>
-            </a:pPr>
-            <a:r>
-              <a:t>Optimizado para consultas analíticas (OLAP)</a:t>
-            </a:r>
-          </a:p>
-          <a:p>
-            <a:pPr>
-              <a:defRPr sz="1600"/>
-            </a:pPr>
-            <a:r>
-              <a:t>Datos limpios, transformados y confiables</a:t>
-            </a:r>
-          </a:p>
-          <a:p>
-            <a:pPr>
-              <a:defRPr sz="1600"/>
-            </a:pPr>
-            <a:r>
-              <a:t>SQL como lenguaje principal de consulta</a:t>
-            </a:r>
-          </a:p>
-          <a:p>
-            <a:pPr>
-              <a:defRPr sz="1600"/>
-            </a:pPr>
-            <a:r>
-              <a:t>Ejemplos: Teradata, Oracle DW, Amazon Redshift, Snowflake (modo clásico)</a:t>
-            </a:r>
-          </a:p>
-        </p:txBody>
-      </p:sp>
-    </p:spTree>
-  </p:cSld>
-  <p:clrMapOvr>
-    <a:masterClrMapping/>
-  </p:clrMapOvr>
-</p:sld>
-</file>
-
-<file path=ppt/slides/slide5.xml><?xml version="1.0" encoding="utf-8"?>
-<p:sld xmlns:a="http://schemas.openxmlformats.org/drawingml/2006/main" xmlns:p="http://schemas.openxmlformats.org/presentationml/2006/main" xmlns:r="http://schemas.openxmlformats.org/officeDocument/2006/relationships">
-  <p:cSld>
-    <p:spTree>
-      <p:nvGrpSpPr>
-        <p:cNvPr id="1" name=""/>
-        <p:cNvGrpSpPr/>
-        <p:nvPr/>
-      </p:nvGrpSpPr>
-      <p:grpSpPr/>
-      <p:sp>
-        <p:nvSpPr>
-          <p:cNvPr id="2" name="Title 1"/>
-          <p:cNvSpPr>
-            <a:spLocks noGrp="1"/>
-          </p:cNvSpPr>
-          <p:nvPr>
-            <p:ph type="title"/>
-          </p:nvPr>
-        </p:nvSpPr>
-        <p:spPr/>
-        <p:txBody>
-          <a:bodyPr/>
-          <a:lstStyle/>
-          <a:p>
-            <a:r>
-              <a:t>Data Warehouse — Limitaciones</a:t>
-            </a:r>
-          </a:p>
-        </p:txBody>
-      </p:sp>
-      <p:sp>
-        <p:nvSpPr>
-          <p:cNvPr id="3" name="Content Placeholder 2"/>
-          <p:cNvSpPr>
-            <a:spLocks noGrp="1"/>
-          </p:cNvSpPr>
-          <p:nvPr>
-            <p:ph idx="1"/>
-          </p:nvPr>
-        </p:nvSpPr>
-        <p:spPr/>
-        <p:txBody>
-          <a:bodyPr/>
-          <a:lstStyle/>
-          <a:p>
-            <a:pPr>
-              <a:defRPr sz="1600"/>
-            </a:pPr>
-            <a:r>
-              <a:t>Solo datos estructurados (tablas relacionales)</a:t>
-            </a:r>
-          </a:p>
-          <a:p>
-            <a:pPr>
-              <a:defRPr sz="1600"/>
-            </a:pPr>
-            <a:r>
-              <a:t>Costoso de escalar — almacenamiento propietario</a:t>
-            </a:r>
-          </a:p>
-          <a:p>
-            <a:pPr>
-              <a:defRPr sz="1600"/>
-            </a:pPr>
-            <a:r>
-              <a:t>ETL rígido y lento ante cambios de esquema</a:t>
-            </a:r>
-          </a:p>
-          <a:p>
-            <a:pPr>
-              <a:defRPr sz="1600"/>
-            </a:pPr>
-            <a:r>
-              <a:t>No soporta datos semi-estructurados ni no-estructurados</a:t>
-            </a:r>
-          </a:p>
-          <a:p>
-            <a:pPr lvl="1">
-              <a:defRPr sz="1400"/>
-            </a:pPr>
-            <a:r>
-              <a:t>JSON anidado, logs, imágenes, audio → no caben</a:t>
-            </a:r>
-          </a:p>
-          <a:p>
-            <a:pPr>
-              <a:defRPr sz="1600"/>
-            </a:pPr>
-            <a:r>
-              <a:t>Difícil integrar Machine Learning y Data Science</a:t>
-            </a:r>
-          </a:p>
-          <a:p>
-            <a:pPr lvl="1">
-              <a:defRPr sz="1400"/>
-            </a:pPr>
-            <a:r>
-              <a:t>Los científicos de datos necesitan acceso a datos crudos</a:t>
-            </a:r>
-          </a:p>
-          <a:p>
-            <a:pPr>
-              <a:defRPr sz="1600"/>
-            </a:pPr>
-            <a:r>
-              <a:t>Resultado: un sistema confiable pero limitado y caro</a:t>
-            </a:r>
-          </a:p>
-        </p:txBody>
-      </p:sp>
-    </p:spTree>
-  </p:cSld>
-  <p:clrMapOvr>
-    <a:masterClrMapping/>
-  </p:clrMapOvr>
-</p:sld>
-</file>
-
-<file path=ppt/slides/slide6.xml><?xml version="1.0" encoding="utf-8"?>
-<p:sld xmlns:a="http://schemas.openxmlformats.org/drawingml/2006/main" xmlns:p="http://schemas.openxmlformats.org/presentationml/2006/main" xmlns:r="http://schemas.openxmlformats.org/officeDocument/2006/relationships">
-  <p:cSld>
-    <p:spTree>
-      <p:nvGrpSpPr>
-        <p:cNvPr id="1" name=""/>
-        <p:cNvGrpSpPr/>
-        <p:nvPr/>
-      </p:nvGrpSpPr>
-      <p:grpSpPr/>
-      <p:sp>
-        <p:nvSpPr>
-          <p:cNvPr id="2" name="Title 1"/>
-          <p:cNvSpPr>
-            <a:spLocks noGrp="1"/>
-          </p:cNvSpPr>
-          <p:nvPr>
-            <p:ph type="title"/>
-          </p:nvPr>
-        </p:nvSpPr>
-        <p:spPr/>
-        <p:txBody>
-          <a:bodyPr/>
-          <a:lstStyle/>
-          <a:p>
-            <a:r>
-              <a:t>02 — Data Lake</a:t>
-            </a:r>
-          </a:p>
-        </p:txBody>
-      </p:sp>
-      <p:sp>
-        <p:nvSpPr>
-          <p:cNvPr id="3" name="Text Placeholder 2"/>
-          <p:cNvSpPr>
-            <a:spLocks noGrp="1"/>
-          </p:cNvSpPr>
-          <p:nvPr>
-            <p:ph type="body" idx="1"/>
-          </p:nvPr>
-        </p:nvSpPr>
-        <p:spPr/>
-        <p:txBody>
-          <a:bodyPr/>
-          <a:lstStyle/>
-          <a:p>
-            <a:r>
-              <a:t>Almacenamiento masivo y flexible</a:t>
-            </a:r>
-          </a:p>
-        </p:txBody>
-      </p:sp>
-    </p:spTree>
-  </p:cSld>
-  <p:clrMapOvr>
-    <a:masterClrMapping/>
-  </p:clrMapOvr>
-</p:sld>
-</file>
-
-<file path=ppt/slides/slide7.xml><?xml version="1.0" encoding="utf-8"?>
-<p:sld xmlns:a="http://schemas.openxmlformats.org/drawingml/2006/main" xmlns:p="http://schemas.openxmlformats.org/presentationml/2006/main" xmlns:r="http://schemas.openxmlformats.org/officeDocument/2006/relationships">
-  <p:cSld>
-    <p:spTree>
-      <p:nvGrpSpPr>
-        <p:cNvPr id="1" name=""/>
-        <p:cNvGrpSpPr/>
-        <p:nvPr/>
-      </p:nvGrpSpPr>
-      <p:grpSpPr/>
-      <p:sp>
-        <p:nvSpPr>
-          <p:cNvPr id="2" name="Title 1"/>
-          <p:cNvSpPr>
-            <a:spLocks noGrp="1"/>
-          </p:cNvSpPr>
-          <p:nvPr>
-            <p:ph type="title"/>
-          </p:nvPr>
-        </p:nvSpPr>
-        <p:spPr/>
-        <p:txBody>
-          <a:bodyPr/>
-          <a:lstStyle/>
-          <a:p>
-            <a:r>
-              <a:t>Data Lake — ¿Qué es?</a:t>
-            </a:r>
-          </a:p>
-        </p:txBody>
-      </p:sp>
-      <p:sp>
-        <p:nvSpPr>
-          <p:cNvPr id="3" name="Content Placeholder 2"/>
-          <p:cNvSpPr>
-            <a:spLocks noGrp="1"/>
-          </p:cNvSpPr>
-          <p:nvPr>
-            <p:ph idx="1"/>
-          </p:nvPr>
-        </p:nvSpPr>
-        <p:spPr/>
-        <p:txBody>
-          <a:bodyPr/>
-          <a:lstStyle/>
-          <a:p>
-            <a:pPr>
-              <a:defRPr sz="1600"/>
-            </a:pPr>
-            <a:r>
-              <a:t>Almacén de datos en formato crudo (raw), sin transformar</a:t>
-            </a:r>
-          </a:p>
-          <a:p>
-            <a:pPr>
-              <a:defRPr sz="1600"/>
-            </a:pPr>
-            <a:r>
-              <a:t>Esquema al leer → Schema-on-Read</a:t>
-            </a:r>
-          </a:p>
-          <a:p>
-            <a:pPr>
-              <a:defRPr sz="1600"/>
-            </a:pPr>
-            <a:r>
-              <a:t>Soporta cualquier tipo de dato:</a:t>
-            </a:r>
-          </a:p>
-          <a:p>
-            <a:pPr lvl="1">
-              <a:defRPr sz="1400"/>
-            </a:pPr>
-            <a:r>
-              <a:t>CSV, JSON, Parquet, imágenes, audio, logs, video</a:t>
-            </a:r>
-          </a:p>
-          <a:p>
-            <a:pPr>
-              <a:defRPr sz="1600"/>
-            </a:pPr>
-            <a:r>
-              <a:t>Almacenamiento barato y escalable:</a:t>
-            </a:r>
-          </a:p>
-          <a:p>
-            <a:pPr lvl="1">
-              <a:defRPr sz="1400"/>
-            </a:pPr>
-            <a:r>
-              <a:t>Amazon S3, Azure Data Lake Storage (ADLS), HDFS</a:t>
-            </a:r>
-          </a:p>
-          <a:p>
-            <a:pPr>
-              <a:defRPr sz="1600"/>
-            </a:pPr>
-            <a:r>
-              <a:t>Base para pipelines de Machine Learning y Big Data</a:t>
-            </a:r>
-          </a:p>
-          <a:p>
-            <a:pPr>
-              <a:defRPr sz="1600"/>
-            </a:pPr>
-            <a:r>
-              <a:t>Idea: guardemos TODO, ya después vemos qué hacemos</a:t>
-            </a:r>
-          </a:p>
-        </p:txBody>
-      </p:sp>
-    </p:spTree>
-  </p:cSld>
-  <p:clrMapOvr>
-    <a:masterClrMapping/>
-  </p:clrMapOvr>
-</p:sld>
-</file>
-
-<file path=ppt/slides/slide8.xml><?xml version="1.0" encoding="utf-8"?>
-<p:sld xmlns:a="http://schemas.openxmlformats.org/drawingml/2006/main" xmlns:p="http://schemas.openxmlformats.org/presentationml/2006/main" xmlns:r="http://schemas.openxmlformats.org/officeDocument/2006/relationships">
-  <p:cSld>
-    <p:spTree>
-      <p:nvGrpSpPr>
-        <p:cNvPr id="1" name=""/>
-        <p:cNvGrpSpPr/>
-        <p:nvPr/>
-      </p:nvGrpSpPr>
-      <p:grpSpPr/>
-      <p:sp>
-        <p:nvSpPr>
-          <p:cNvPr id="2" name="Title 1"/>
-          <p:cNvSpPr>
-            <a:spLocks noGrp="1"/>
-          </p:cNvSpPr>
-          <p:nvPr>
-            <p:ph type="title"/>
-          </p:nvPr>
-        </p:nvSpPr>
-        <p:spPr/>
-        <p:txBody>
-          <a:bodyPr/>
-          <a:lstStyle/>
-          <a:p>
-            <a:r>
-              <a:t>Data Lake — Tecnologías clave</a:t>
-            </a:r>
-          </a:p>
-        </p:txBody>
-      </p:sp>
-      <p:sp>
-        <p:nvSpPr>
-          <p:cNvPr id="3" name="Content Placeholder 2"/>
-          <p:cNvSpPr>
-            <a:spLocks noGrp="1"/>
-          </p:cNvSpPr>
-          <p:nvPr>
-            <p:ph idx="1"/>
-          </p:nvPr>
-        </p:nvSpPr>
-        <p:spPr/>
-        <p:txBody>
-          <a:bodyPr/>
-          <a:lstStyle/>
-          <a:p>
-            <a:pPr>
-              <a:defRPr sz="1600"/>
-            </a:pPr>
-            <a:r>
-              <a:t>Almacenamiento: HDFS, Amazon S3, Azure ADLS, Google Cloud Storage</a:t>
-            </a:r>
-          </a:p>
-          <a:p>
-            <a:pPr>
-              <a:defRPr sz="1600"/>
-            </a:pPr>
-            <a:r>
-              <a:t>Procesamiento: Apache Spark, Apache Flink, Presto, Trino</a:t>
-            </a:r>
-          </a:p>
-          <a:p>
-            <a:pPr>
-              <a:defRPr sz="1600"/>
-            </a:pPr>
-            <a:r>
-              <a:t>Formatos de archivo:</a:t>
-            </a:r>
-          </a:p>
-          <a:p>
-            <a:pPr lvl="1">
-              <a:defRPr sz="1400"/>
-            </a:pPr>
-            <a:r>
-              <a:t>Parquet — columnar, comprimido, estándar de facto</a:t>
-            </a:r>
-          </a:p>
-          <a:p>
-            <a:pPr lvl="1">
-              <a:defRPr sz="1400"/>
-            </a:pPr>
-            <a:r>
-              <a:t>ORC — optimizado para Hive</a:t>
-            </a:r>
-          </a:p>
-          <a:p>
-            <a:pPr lvl="1">
-              <a:defRPr sz="1400"/>
-            </a:pPr>
-            <a:r>
-              <a:t>Avro — orientado a filas, bueno para streaming</a:t>
-            </a:r>
-          </a:p>
-          <a:p>
-            <a:pPr lvl="1">
-              <a:defRPr sz="1400"/>
-            </a:pPr>
-            <a:r>
-              <a:t>Delta, Iceberg, Hudi — formatos de tabla (veremos más adelante)</a:t>
-            </a:r>
-          </a:p>
-          <a:p>
-            <a:pPr>
-              <a:defRPr sz="1600"/>
-            </a:pPr>
-            <a:r>
-              <a:t>Catálogo: Apache Hive Metastore, AWS Glue Catalog</a:t>
-            </a:r>
-          </a:p>
-          <a:p>
-            <a:pPr>
-              <a:defRPr sz="1600"/>
-            </a:pPr>
-            <a:r>
-              <a:t>Consulta: Athena, Presto, Spark SQL, Hive</a:t>
-            </a:r>
-          </a:p>
-        </p:txBody>
-      </p:sp>
-    </p:spTree>
-  </p:cSld>
-  <p:clrMapOvr>
-    <a:masterClrMapping/>
-  </p:clrMapOvr>
-</p:sld>
-</file>
-
-<file path=ppt/slides/slide9.xml><?xml version="1.0" encoding="utf-8"?>
-<p:sld xmlns:a="http://schemas.openxmlformats.org/drawingml/2006/main" xmlns:p="http://schemas.openxmlformats.org/presentationml/2006/main" xmlns:r="http://schemas.openxmlformats.org/officeDocument/2006/relationships">
-  <p:cSld>
-    <p:spTree>
-      <p:nvGrpSpPr>
-        <p:cNvPr id="1" name=""/>
-        <p:cNvGrpSpPr/>
-        <p:nvPr/>
-      </p:nvGrpSpPr>
-      <p:grpSpPr/>
-      <p:sp>
-        <p:nvSpPr>
-          <p:cNvPr id="2" name="Title 1"/>
-          <p:cNvSpPr>
-            <a:spLocks noGrp="1"/>
-          </p:cNvSpPr>
-          <p:nvPr>
-            <p:ph type="title"/>
-          </p:nvPr>
-        </p:nvSpPr>
-        <p:spPr/>
-        <p:txBody>
-          <a:bodyPr/>
-          <a:lstStyle/>
-          <a:p>
-            <a:r>
-              <a:t>03 — Data Swamp</a:t>
-            </a:r>
-          </a:p>
-        </p:txBody>
-      </p:sp>
-      <p:sp>
-        <p:nvSpPr>
-          <p:cNvPr id="3" name="Text Placeholder 2"/>
-          <p:cNvSpPr>
-            <a:spLocks noGrp="1"/>
-          </p:cNvSpPr>
-          <p:nvPr>
-            <p:ph type="body" idx="1"/>
-          </p:nvPr>
-        </p:nvSpPr>
-        <p:spPr/>
-        <p:txBody>
-          <a:bodyPr/>
-          <a:lstStyle/>
-          <a:p>
-            <a:r>
-              <a:t>Cuando el Data Lake se convierte en un pantano</a:t>
-            </a:r>
-          </a:p>
-        </p:txBody>
-      </p:sp>
-    </p:spTree>
+    <p:extLst>
+      <p:ext uri="{BB962C8B-B14F-4D97-AF65-F5344CB8AC3E}">
+        <p14:creationId xmlns:p14="http://schemas.microsoft.com/office/powerpoint/2010/main" val="3366487027"/>
+      </p:ext>
+    </p:extLst>
   </p:cSld>
   <p:clrMapOvr>
     <a:masterClrMapping/>
@@ -12966,26 +17862,6 @@
 </file>
 
 <file path=customXml/item1.xml><?xml version="1.0" encoding="utf-8"?>
-<p:properties xmlns:p="http://schemas.microsoft.com/office/2006/metadata/properties" xmlns:xsi="http://www.w3.org/2001/XMLSchema-instance" xmlns:pc="http://schemas.microsoft.com/office/infopath/2007/PartnerControls">
-  <documentManagement>
-    <_activity xmlns="645ae1ed-e6b3-44e5-a4c8-a24e7bdc788d" xsi:nil="true"/>
-    <_ip_UnifiedCompliancePolicyUIAction xmlns="http://schemas.microsoft.com/sharepoint/v3" xsi:nil="true"/>
-    <IMAddress xmlns="http://schemas.microsoft.com/sharepoint/v3" xsi:nil="true"/>
-    <_ip_UnifiedCompliancePolicyProperties xmlns="http://schemas.microsoft.com/sharepoint/v3" xsi:nil="true"/>
-  </documentManagement>
-</p:properties>
-</file>
-
-<file path=customXml/item2.xml><?xml version="1.0" encoding="utf-8"?>
-<?mso-contentType ?>
-<FormTemplates xmlns="http://schemas.microsoft.com/sharepoint/v3/contenttype/forms">
-  <Display>DocumentLibraryForm</Display>
-  <Edit>DocumentLibraryForm</Edit>
-  <New>DocumentLibraryForm</New>
-</FormTemplates>
-</file>
-
-<file path=customXml/item3.xml><?xml version="1.0" encoding="utf-8"?>
 <ct:contentTypeSchema xmlns:ct="http://schemas.microsoft.com/office/2006/metadata/contentType" xmlns:ma="http://schemas.microsoft.com/office/2006/metadata/properties/metaAttributes" ct:_="" ma:_="" ma:contentTypeName="Document" ma:contentTypeID="0x010100653DC2FCB227EA42B7B265435BD19DFC" ma:contentTypeVersion="21" ma:contentTypeDescription="Create a new document." ma:contentTypeScope="" ma:versionID="cb32a70cc5ea0fb74e920c17bfb67e81">
   <xsd:schema xmlns:xsd="http://www.w3.org/2001/XMLSchema" xmlns:xs="http://www.w3.org/2001/XMLSchema" xmlns:p="http://schemas.microsoft.com/office/2006/metadata/properties" xmlns:ns1="http://schemas.microsoft.com/sharepoint/v3" xmlns:ns3="0e0238ec-92e3-425a-acca-874cf401e5b6" xmlns:ns4="645ae1ed-e6b3-44e5-a4c8-a24e7bdc788d" targetNamespace="http://schemas.microsoft.com/office/2006/metadata/properties" ma:root="true" ma:fieldsID="54103e6dfc2d7663b215d6e0a564d535" ns1:_="" ns3:_="" ns4:_="">
     <xsd:import namespace="http://schemas.microsoft.com/sharepoint/v3"/>
@@ -13261,7 +18137,47 @@
 </ct:contentTypeSchema>
 </file>
 
+<file path=customXml/item2.xml><?xml version="1.0" encoding="utf-8"?>
+<p:properties xmlns:p="http://schemas.microsoft.com/office/2006/metadata/properties" xmlns:xsi="http://www.w3.org/2001/XMLSchema-instance" xmlns:pc="http://schemas.microsoft.com/office/infopath/2007/PartnerControls">
+  <documentManagement>
+    <_activity xmlns="645ae1ed-e6b3-44e5-a4c8-a24e7bdc788d" xsi:nil="true"/>
+    <_ip_UnifiedCompliancePolicyUIAction xmlns="http://schemas.microsoft.com/sharepoint/v3" xsi:nil="true"/>
+    <IMAddress xmlns="http://schemas.microsoft.com/sharepoint/v3" xsi:nil="true"/>
+    <_ip_UnifiedCompliancePolicyProperties xmlns="http://schemas.microsoft.com/sharepoint/v3" xsi:nil="true"/>
+  </documentManagement>
+</p:properties>
+</file>
+
+<file path=customXml/item3.xml><?xml version="1.0" encoding="utf-8"?>
+<?mso-contentType ?>
+<FormTemplates xmlns="http://schemas.microsoft.com/sharepoint/v3/contenttype/forms">
+  <Display>DocumentLibraryForm</Display>
+  <Edit>DocumentLibraryForm</Edit>
+  <New>DocumentLibraryForm</New>
+</FormTemplates>
+</file>
+
 <file path=customXml/itemProps1.xml><?xml version="1.0" encoding="utf-8"?>
+<ds:datastoreItem xmlns:ds="http://schemas.openxmlformats.org/officeDocument/2006/customXml" ds:itemID="{0CB5CB8F-C866-413E-AEA2-08ACD39D6312}">
+  <ds:schemaRefs>
+    <ds:schemaRef ds:uri="http://schemas.microsoft.com/office/2006/metadata/contentType"/>
+    <ds:schemaRef ds:uri="http://schemas.microsoft.com/office/2006/metadata/properties/metaAttributes"/>
+    <ds:schemaRef ds:uri="http://www.w3.org/2001/XMLSchema"/>
+    <ds:schemaRef ds:uri="http://schemas.microsoft.com/office/2006/metadata/properties"/>
+    <ds:schemaRef ds:uri="http://schemas.microsoft.com/sharepoint/v3"/>
+    <ds:schemaRef ds:uri="0e0238ec-92e3-425a-acca-874cf401e5b6"/>
+    <ds:schemaRef ds:uri="645ae1ed-e6b3-44e5-a4c8-a24e7bdc788d"/>
+    <ds:schemaRef ds:uri="http://schemas.microsoft.com/office/2006/documentManagement/types"/>
+    <ds:schemaRef ds:uri="http://schemas.microsoft.com/office/infopath/2007/PartnerControls"/>
+    <ds:schemaRef ds:uri="http://schemas.openxmlformats.org/package/2006/metadata/core-properties"/>
+    <ds:schemaRef ds:uri="http://purl.org/dc/elements/1.1/"/>
+    <ds:schemaRef ds:uri="http://purl.org/dc/terms/"/>
+    <ds:schemaRef ds:uri="http://schemas.microsoft.com/internal/obd"/>
+  </ds:schemaRefs>
+</ds:datastoreItem>
+</file>
+
+<file path=customXml/itemProps2.xml><?xml version="1.0" encoding="utf-8"?>
 <ds:datastoreItem xmlns:ds="http://schemas.openxmlformats.org/officeDocument/2006/customXml" ds:itemID="{4C409CEB-91C5-4691-B8BA-9DA32C54959C}">
   <ds:schemaRefs>
     <ds:schemaRef ds:uri="http://purl.org/dc/elements/1.1/"/>
@@ -13279,30 +18195,10 @@
 </ds:datastoreItem>
 </file>
 
-<file path=customXml/itemProps2.xml><?xml version="1.0" encoding="utf-8"?>
+<file path=customXml/itemProps3.xml><?xml version="1.0" encoding="utf-8"?>
 <ds:datastoreItem xmlns:ds="http://schemas.openxmlformats.org/officeDocument/2006/customXml" ds:itemID="{8087687E-FD40-4BD4-8C90-A39D8D799A61}">
   <ds:schemaRefs>
     <ds:schemaRef ds:uri="http://schemas.microsoft.com/sharepoint/v3/contenttype/forms"/>
   </ds:schemaRefs>
 </ds:datastoreItem>
-</file>
-
-<file path=customXml/itemProps3.xml><?xml version="1.0" encoding="utf-8"?>
-<ds:datastoreItem xmlns:ds="http://schemas.openxmlformats.org/officeDocument/2006/customXml" ds:itemID="{0CB5CB8F-C866-413E-AEA2-08ACD39D6312}">
-  <ds:schemaRefs>
-    <ds:schemaRef ds:uri="http://schemas.microsoft.com/office/2006/metadata/contentType"/>
-    <ds:schemaRef ds:uri="http://schemas.microsoft.com/office/2006/metadata/properties/metaAttributes"/>
-    <ds:schemaRef ds:uri="http://www.w3.org/2001/XMLSchema"/>
-    <ds:schemaRef ds:uri="http://schemas.microsoft.com/office/2006/metadata/properties"/>
-    <ds:schemaRef ds:uri="http://schemas.microsoft.com/sharepoint/v3"/>
-    <ds:schemaRef ds:uri="0e0238ec-92e3-425a-acca-874cf401e5b6"/>
-    <ds:schemaRef ds:uri="645ae1ed-e6b3-44e5-a4c8-a24e7bdc788d"/>
-    <ds:schemaRef ds:uri="http://schemas.microsoft.com/office/2006/documentManagement/types"/>
-    <ds:schemaRef ds:uri="http://schemas.microsoft.com/office/infopath/2007/PartnerControls"/>
-    <ds:schemaRef ds:uri="http://schemas.openxmlformats.org/package/2006/metadata/core-properties"/>
-    <ds:schemaRef ds:uri="http://purl.org/dc/elements/1.1/"/>
-    <ds:schemaRef ds:uri="http://purl.org/dc/terms/"/>
-    <ds:schemaRef ds:uri="http://schemas.microsoft.com/internal/obd"/>
-  </ds:schemaRefs>
-</ds:datastoreItem>
 </file>